--- a/curriculum/M03/W03/L03/slides.pptx
+++ b/curriculum/M03/W03/L03/slides.pptx
@@ -48,8 +48,6 @@
     <p:sldId id="296" r:id="rId48"/>
     <p:sldId id="297" r:id="rId49"/>
     <p:sldId id="298" r:id="rId50"/>
-    <p:sldId id="299" r:id="rId51"/>
-    <p:sldId id="300" r:id="rId52"/>
   </p:sldIdLst>
   <p:sldSz cx="12191695" cy="6858000" type="screen4x3"/>
   <p:notesSz cx="6858000" cy="9144000"/>
@@ -6349,7 +6347,7 @@
                 <a:ea typeface="Malgun Gothic"/>
                 <a:cs typeface="Malgun Gothic"/>
               </a:rPr>
-              <a:t>3. 번역의 개시 (1/2)</a:t>
+              <a:t>3. 번역의 개시</a:t>
             </a:r>
           </a:p>
         </p:txBody>
@@ -6865,6 +6863,108 @@
                 <a:cs typeface="Malgun Gothic"/>
               </a:rPr>
               <a:t>가 작용해 GTP가 가수분해되고 60S가 결합한다.</a:t>
+            </a:r>
+          </a:p>
+          <a:p>
+            <a:pPr>
+              <a:spcAft>
+                <a:spcPts val="900"/>
+              </a:spcAft>
+            </a:pPr>
+            <a:r>
+              <a:rPr sz="1400" b="1" i="0">
+                <a:solidFill>
+                  <a:srgbClr val="F2B705"/>
+                </a:solidFill>
+                <a:latin typeface="Malgun Gothic"/>
+                <a:ea typeface="Malgun Gothic"/>
+                <a:cs typeface="Malgun Gothic"/>
+              </a:rPr>
+              <a:t>•  </a:t>
+            </a:r>
+            <a:r>
+              <a:rPr sz="1400" b="0" i="0">
+                <a:solidFill>
+                  <a:srgbClr val="11202B"/>
+                </a:solidFill>
+                <a:latin typeface="Malgun Gothic"/>
+                <a:ea typeface="Malgun Gothic"/>
+                <a:cs typeface="Malgun Gothic"/>
+              </a:rPr>
+              <a:t>개시 코돈의 주변 서열(</a:t>
+            </a:r>
+            <a:r>
+              <a:rPr sz="1400" b="1" i="0">
+                <a:solidFill>
+                  <a:srgbClr val="11202B"/>
+                </a:solidFill>
+                <a:latin typeface="Malgun Gothic"/>
+                <a:ea typeface="Malgun Gothic"/>
+                <a:cs typeface="Malgun Gothic"/>
+              </a:rPr>
+              <a:t>Kozak 서열</a:t>
+            </a:r>
+            <a:r>
+              <a:rPr sz="1400" b="0" i="0">
+                <a:solidFill>
+                  <a:srgbClr val="11202B"/>
+                </a:solidFill>
+                <a:latin typeface="Malgun Gothic"/>
+                <a:ea typeface="Malgun Gothic"/>
+                <a:cs typeface="Malgun Gothic"/>
+              </a:rPr>
+              <a:t>, 특히 -3 위치의 purine과 +4의 G)이 개시 효율을 좌우한다.</a:t>
+            </a:r>
+          </a:p>
+          <a:p>
+            <a:pPr>
+              <a:spcAft>
+                <a:spcPts val="900"/>
+              </a:spcAft>
+            </a:pPr>
+            <a:r>
+              <a:rPr sz="1400" b="1" i="0">
+                <a:solidFill>
+                  <a:srgbClr val="F2B705"/>
+                </a:solidFill>
+                <a:latin typeface="Malgun Gothic"/>
+                <a:ea typeface="Malgun Gothic"/>
+                <a:cs typeface="Malgun Gothic"/>
+              </a:rPr>
+              <a:t>•  </a:t>
+            </a:r>
+            <a:r>
+              <a:rPr sz="1400" b="0" i="0">
+                <a:solidFill>
+                  <a:srgbClr val="11202B"/>
+                </a:solidFill>
+                <a:latin typeface="Malgun Gothic"/>
+                <a:ea typeface="Malgun Gothic"/>
+                <a:cs typeface="Malgun Gothic"/>
+              </a:rPr>
+              <a:t>진핵세포의 mRNA는 거의 모두 </a:t>
+            </a:r>
+            <a:r>
+              <a:rPr sz="1400" b="1" i="0">
+                <a:solidFill>
+                  <a:srgbClr val="11202B"/>
+                </a:solidFill>
+                <a:latin typeface="Malgun Gothic"/>
+                <a:ea typeface="Malgun Gothic"/>
+                <a:cs typeface="Malgun Gothic"/>
+              </a:rPr>
+              <a:t>monocistronic</a:t>
+            </a:r>
+            <a:r>
+              <a:rPr sz="1400" b="0" i="0">
+                <a:solidFill>
+                  <a:srgbClr val="11202B"/>
+                </a:solidFill>
+                <a:latin typeface="Malgun Gothic"/>
+                <a:ea typeface="Malgun Gothic"/>
+                <a:cs typeface="Malgun Gothic"/>
+              </a:rPr>
+              <a:t>이다.</a:t>
             </a:r>
           </a:p>
         </p:txBody>
@@ -7061,7 +7161,7 @@
                 <a:ea typeface="Malgun Gothic"/>
                 <a:cs typeface="Malgun Gothic"/>
               </a:rPr>
-              <a:t>3. 번역의 개시 (2/2)</a:t>
+              <a:t>3. 번역의 개시</a:t>
             </a:r>
           </a:p>
         </p:txBody>
@@ -7113,16 +7213,40 @@
           </a:p>
         </p:txBody>
       </p:sp>
-      <p:sp>
-        <p:nvSpPr>
-          <p:cNvPr id="7" name="TextBox 6"/>
+      <p:pic>
+        <p:nvPicPr>
+          <p:cNvPr id="7" name="Picture 6" descr="fig-initiation.slide.png"/>
+          <p:cNvPicPr>
+            <a:picLocks noChangeAspect="1"/>
+          </p:cNvPicPr>
+          <p:nvPr/>
+        </p:nvPicPr>
+        <p:blipFill>
+          <a:blip r:embed="rId2"/>
+          <a:stretch>
+            <a:fillRect/>
+          </a:stretch>
+        </p:blipFill>
+        <p:spPr>
+          <a:xfrm>
+            <a:off x="1545619" y="1325880"/>
+            <a:ext cx="9100457" cy="4343400"/>
+          </a:xfrm>
+          <a:prstGeom prst="rect">
+            <a:avLst/>
+          </a:prstGeom>
+        </p:spPr>
+      </p:pic>
+      <p:sp>
+        <p:nvSpPr>
+          <p:cNvPr id="8" name="TextBox 7"/>
           <p:cNvSpPr txBox="1"/>
           <p:nvPr/>
         </p:nvSpPr>
         <p:spPr>
           <a:xfrm>
-            <a:off x="640080" y="1280160"/>
-            <a:ext cx="10881360" cy="5029200"/>
+            <a:off x="640080" y="5806440"/>
+            <a:ext cx="10881360" cy="548640"/>
           </a:xfrm>
           <a:prstGeom prst="rect">
             <a:avLst/>
@@ -7135,105 +7259,17 @@
           </a:bodyPr>
           <a:lstStyle/>
           <a:p>
-            <a:pPr>
-              <a:spcAft>
-                <a:spcPts val="900"/>
-              </a:spcAft>
-            </a:pPr>
-            <a:r>
-              <a:rPr sz="2000" b="1" i="0">
-                <a:solidFill>
-                  <a:srgbClr val="F2B705"/>
-                </a:solidFill>
-                <a:latin typeface="Malgun Gothic"/>
-                <a:ea typeface="Malgun Gothic"/>
-                <a:cs typeface="Malgun Gothic"/>
-              </a:rPr>
-              <a:t>•  </a:t>
-            </a:r>
-            <a:r>
-              <a:rPr sz="2000" b="0" i="0">
-                <a:solidFill>
-                  <a:srgbClr val="11202B"/>
-                </a:solidFill>
-                <a:latin typeface="Malgun Gothic"/>
-                <a:ea typeface="Malgun Gothic"/>
-                <a:cs typeface="Malgun Gothic"/>
-              </a:rPr>
-              <a:t>개시 코돈의 주변 서열(</a:t>
-            </a:r>
-            <a:r>
-              <a:rPr sz="2000" b="1" i="0">
-                <a:solidFill>
-                  <a:srgbClr val="11202B"/>
-                </a:solidFill>
-                <a:latin typeface="Malgun Gothic"/>
-                <a:ea typeface="Malgun Gothic"/>
-                <a:cs typeface="Malgun Gothic"/>
-              </a:rPr>
-              <a:t>Kozak 서열</a:t>
-            </a:r>
-            <a:r>
-              <a:rPr sz="2000" b="0" i="0">
-                <a:solidFill>
-                  <a:srgbClr val="11202B"/>
-                </a:solidFill>
-                <a:latin typeface="Malgun Gothic"/>
-                <a:ea typeface="Malgun Gothic"/>
-                <a:cs typeface="Malgun Gothic"/>
-              </a:rPr>
-              <a:t>, 특히 -3 위치의 purine과 +4의 G)이 개시 효율을 좌우한다.</a:t>
-            </a:r>
-          </a:p>
-          <a:p>
-            <a:pPr>
-              <a:spcAft>
-                <a:spcPts val="900"/>
-              </a:spcAft>
-            </a:pPr>
-            <a:r>
-              <a:rPr sz="2000" b="1" i="0">
-                <a:solidFill>
-                  <a:srgbClr val="F2B705"/>
-                </a:solidFill>
-                <a:latin typeface="Malgun Gothic"/>
-                <a:ea typeface="Malgun Gothic"/>
-                <a:cs typeface="Malgun Gothic"/>
-              </a:rPr>
-              <a:t>•  </a:t>
-            </a:r>
-            <a:r>
-              <a:rPr sz="2000" b="0" i="0">
-                <a:solidFill>
-                  <a:srgbClr val="11202B"/>
-                </a:solidFill>
-                <a:latin typeface="Malgun Gothic"/>
-                <a:ea typeface="Malgun Gothic"/>
-                <a:cs typeface="Malgun Gothic"/>
-              </a:rPr>
-              <a:t>진핵세포의 mRNA는 거의 모두 </a:t>
-            </a:r>
-            <a:r>
-              <a:rPr sz="2000" b="1" i="0">
-                <a:solidFill>
-                  <a:srgbClr val="11202B"/>
-                </a:solidFill>
-                <a:latin typeface="Malgun Gothic"/>
-                <a:ea typeface="Malgun Gothic"/>
-                <a:cs typeface="Malgun Gothic"/>
-              </a:rPr>
-              <a:t>monocistronic</a:t>
-            </a:r>
-            <a:r>
-              <a:rPr sz="2000" b="0" i="0">
-                <a:solidFill>
-                  <a:srgbClr val="11202B"/>
-                </a:solidFill>
-                <a:latin typeface="Malgun Gothic"/>
-                <a:ea typeface="Malgun Gothic"/>
-                <a:cs typeface="Malgun Gothic"/>
-              </a:rPr>
-              <a:t>이다.</a:t>
+            <a:pPr algn="ctr"/>
+            <a:r>
+              <a:rPr sz="1200" b="0" i="0">
+                <a:solidFill>
+                  <a:srgbClr val="66788A"/>
+                </a:solidFill>
+                <a:latin typeface="Malgun Gothic"/>
+                <a:ea typeface="Malgun Gothic"/>
+                <a:cs typeface="Malgun Gothic"/>
+              </a:rPr>
+              <a:t>원핵과 진핵의 번역 개시. Shine-Dalgarno 서열에 의한 직접 배치와, cap 결합 복합체가 훑어 내려가 첫 AUG를 찾는 방식을 비교한다.</a:t>
             </a:r>
           </a:p>
         </p:txBody>
@@ -7482,63 +7518,145 @@
           </a:p>
         </p:txBody>
       </p:sp>
-      <p:pic>
-        <p:nvPicPr>
-          <p:cNvPr id="7" name="Picture 6" descr="fig-initiation.slide.png"/>
-          <p:cNvPicPr>
-            <a:picLocks noChangeAspect="1"/>
-          </p:cNvPicPr>
-          <p:nvPr/>
-        </p:nvPicPr>
-        <p:blipFill>
-          <a:blip r:embed="rId2"/>
-          <a:stretch>
-            <a:fillRect/>
-          </a:stretch>
-        </p:blipFill>
-        <p:spPr>
-          <a:xfrm>
-            <a:off x="1545619" y="1325880"/>
-            <a:ext cx="9100457" cy="4343400"/>
-          </a:xfrm>
-          <a:prstGeom prst="rect">
-            <a:avLst/>
-          </a:prstGeom>
-        </p:spPr>
-      </p:pic>
-      <p:sp>
-        <p:nvSpPr>
-          <p:cNvPr id="8" name="TextBox 7"/>
-          <p:cNvSpPr txBox="1"/>
-          <p:nvPr/>
-        </p:nvSpPr>
-        <p:spPr>
-          <a:xfrm>
-            <a:off x="640080" y="5806440"/>
-            <a:ext cx="10881360" cy="548640"/>
-          </a:xfrm>
-          <a:prstGeom prst="rect">
-            <a:avLst/>
-          </a:prstGeom>
-          <a:noFill/>
-        </p:spPr>
-        <p:txBody>
-          <a:bodyPr wrap="square" anchor="t">
-            <a:spAutoFit/>
-          </a:bodyPr>
-          <a:lstStyle/>
-          <a:p>
-            <a:pPr algn="ctr"/>
-            <a:r>
-              <a:rPr sz="1200" b="0" i="0">
-                <a:solidFill>
-                  <a:srgbClr val="66788A"/>
-                </a:solidFill>
-                <a:latin typeface="Malgun Gothic"/>
-                <a:ea typeface="Malgun Gothic"/>
-                <a:cs typeface="Malgun Gothic"/>
-              </a:rPr>
-              <a:t>원핵과 진핵의 번역 개시. Shine-Dalgarno 서열에 의한 직접 배치와, cap 결합 복합체가 훑어 내려가 첫 AUG를 찾는 방식을 비교한다.</a:t>
+      <p:sp>
+        <p:nvSpPr>
+          <p:cNvPr id="7" name="Rectangle 6"/>
+          <p:cNvSpPr/>
+          <p:nvPr/>
+        </p:nvSpPr>
+        <p:spPr>
+          <a:xfrm>
+            <a:off x="640080" y="1325880"/>
+            <a:ext cx="10881360" cy="2270759"/>
+          </a:xfrm>
+          <a:prstGeom prst="rect">
+            <a:avLst/>
+          </a:prstGeom>
+          <a:solidFill>
+            <a:srgbClr val="E8F1FA"/>
+          </a:solidFill>
+          <a:ln>
+            <a:noFill/>
+          </a:ln>
+          <a:effectLst/>
+        </p:spPr>
+        <p:style>
+          <a:lnRef idx="1">
+            <a:schemeClr val="accent1"/>
+          </a:lnRef>
+          <a:fillRef idx="3">
+            <a:schemeClr val="accent1"/>
+          </a:fillRef>
+          <a:effectRef idx="2">
+            <a:schemeClr val="accent1"/>
+          </a:effectRef>
+          <a:fontRef idx="minor">
+            <a:schemeClr val="lt1"/>
+          </a:fontRef>
+        </p:style>
+        <p:txBody>
+          <a:bodyPr rtlCol="0" anchor="ctr" wrap="square" lIns="228600" rIns="228600"/>
+          <a:lstStyle/>
+          <a:p>
+            <a:pPr algn="l"/>
+            <a:r>
+              <a:rPr sz="1200" b="1" i="0">
+                <a:solidFill>
+                  <a:srgbClr val="003C71"/>
+                </a:solidFill>
+                <a:latin typeface="Malgun Gothic"/>
+                <a:ea typeface="Malgun Gothic"/>
+                <a:cs typeface="Malgun Gothic"/>
+              </a:rPr>
+              <a:t>임상 연계   </a:t>
+            </a:r>
+            <a:r>
+              <a:rPr sz="1600" b="1" i="0">
+                <a:solidFill>
+                  <a:srgbClr val="11202B"/>
+                </a:solidFill>
+                <a:latin typeface="Malgun Gothic"/>
+                <a:ea typeface="Malgun Gothic"/>
+                <a:cs typeface="Malgun Gothic"/>
+              </a:rPr>
+              <a:t>임상 연계</a:t>
+            </a:r>
+            <a:r>
+              <a:rPr sz="1600" b="0" i="0">
+                <a:solidFill>
+                  <a:srgbClr val="11202B"/>
+                </a:solidFill>
+                <a:latin typeface="Malgun Gothic"/>
+                <a:ea typeface="Malgun Gothic"/>
+                <a:cs typeface="Malgun Gothic"/>
+              </a:rPr>
+              <a:t> 진핵세포의 개시는 전체 단백질 합성량을 조절하는 가장 중요한 지점이다. </a:t>
+            </a:r>
+            <a:r>
+              <a:rPr sz="1600" b="1" i="0">
+                <a:solidFill>
+                  <a:srgbClr val="11202B"/>
+                </a:solidFill>
+                <a:latin typeface="Malgun Gothic"/>
+                <a:ea typeface="Malgun Gothic"/>
+                <a:cs typeface="Malgun Gothic"/>
+              </a:rPr>
+              <a:t>eIF2의 α 소단위가 인산화되면 개시가 전반적으로 멈춘다.</a:t>
+            </a:r>
+            <a:r>
+              <a:rPr sz="1600" b="0" i="0">
+                <a:solidFill>
+                  <a:srgbClr val="11202B"/>
+                </a:solidFill>
+                <a:latin typeface="Malgun Gothic"/>
+                <a:ea typeface="Malgun Gothic"/>
+                <a:cs typeface="Malgun Gothic"/>
+              </a:rPr>
+              <a:t> 인산화를 수행하는 kinase는 자극에 따라 다르다. 소포체 내 misfolded protein이 쌓이면 PERK, 바이러스 이중사슬 RNA가 있으면 PKR, 아미노산이 부족하면 GCN2, 그리고 </a:t>
+            </a:r>
+            <a:r>
+              <a:rPr sz="1600" b="1" i="0">
+                <a:solidFill>
+                  <a:srgbClr val="11202B"/>
+                </a:solidFill>
+                <a:latin typeface="Malgun Gothic"/>
+                <a:ea typeface="Malgun Gothic"/>
+                <a:cs typeface="Malgun Gothic"/>
+              </a:rPr>
+              <a:t>적혈구 전구세포에서 heme이 부족하면 HRI</a:t>
+            </a:r>
+            <a:r>
+              <a:rPr sz="1600" b="0" i="0">
+                <a:solidFill>
+                  <a:srgbClr val="11202B"/>
+                </a:solidFill>
+                <a:latin typeface="Malgun Gothic"/>
+                <a:ea typeface="Malgun Gothic"/>
+                <a:cs typeface="Malgun Gothic"/>
+              </a:rPr>
+              <a:t>가 작용한다. 마지막 경우가 적혈구 생성에서 중요하다. heme이 없으면 globin 합성이 멈추어 </a:t>
+            </a:r>
+            <a:r>
+              <a:rPr sz="1600" b="1" i="0">
+                <a:solidFill>
+                  <a:srgbClr val="11202B"/>
+                </a:solidFill>
+                <a:latin typeface="Malgun Gothic"/>
+                <a:ea typeface="Malgun Gothic"/>
+                <a:cs typeface="Malgun Gothic"/>
+              </a:rPr>
+              <a:t>globin 사슬과 heme의 양이 맞추어진다.</a:t>
+            </a:r>
+            <a:r>
+              <a:rPr sz="1600" b="0" i="0">
+                <a:solidFill>
+                  <a:srgbClr val="11202B"/>
+                </a:solidFill>
+                <a:latin typeface="Malgun Gothic"/>
+                <a:ea typeface="Malgun Gothic"/>
+                <a:cs typeface="Malgun Gothic"/>
+              </a:rPr>
+              <a:t> 이 짝맞춤이 깨지면 짝을 찾지 못한 사슬이 침전해 적혈구를 손상시키므로, thalassemia의 적혈구 손상 기전을 이해하는 데 필요한 조절이다.</a:t>
             </a:r>
           </a:p>
         </p:txBody>
@@ -7724,7 +7842,7 @@
                 <a:ea typeface="Malgun Gothic"/>
                 <a:cs typeface="Malgun Gothic"/>
               </a:rPr>
-              <a:t>03   </a:t>
+              <a:t>04   </a:t>
             </a:r>
             <a:r>
               <a:rPr sz="2400" b="1" i="0">
@@ -7735,7 +7853,7 @@
                 <a:ea typeface="Malgun Gothic"/>
                 <a:cs typeface="Malgun Gothic"/>
               </a:rPr>
-              <a:t>3. 번역의 개시</a:t>
+              <a:t>4. 신장 주기</a:t>
             </a:r>
           </a:p>
         </p:txBody>
@@ -7789,58 +7907,44 @@
       </p:sp>
       <p:sp>
         <p:nvSpPr>
-          <p:cNvPr id="7" name="Rectangle 6"/>
-          <p:cNvSpPr/>
-          <p:nvPr/>
-        </p:nvSpPr>
-        <p:spPr>
-          <a:xfrm>
-            <a:off x="640080" y="1325880"/>
-            <a:ext cx="10881360" cy="2270759"/>
-          </a:xfrm>
-          <a:prstGeom prst="rect">
-            <a:avLst/>
-          </a:prstGeom>
-          <a:solidFill>
-            <a:srgbClr val="E8F1FA"/>
-          </a:solidFill>
-          <a:ln>
-            <a:noFill/>
-          </a:ln>
-          <a:effectLst/>
-        </p:spPr>
-        <p:style>
-          <a:lnRef idx="1">
-            <a:schemeClr val="accent1"/>
-          </a:lnRef>
-          <a:fillRef idx="3">
-            <a:schemeClr val="accent1"/>
-          </a:fillRef>
-          <a:effectRef idx="2">
-            <a:schemeClr val="accent1"/>
-          </a:effectRef>
-          <a:fontRef idx="minor">
-            <a:schemeClr val="lt1"/>
-          </a:fontRef>
-        </p:style>
-        <p:txBody>
-          <a:bodyPr rtlCol="0" anchor="ctr" wrap="square" lIns="228600" rIns="228600"/>
-          <a:lstStyle/>
-          <a:p>
-            <a:pPr algn="l"/>
-            <a:r>
-              <a:rPr sz="1200" b="1" i="0">
-                <a:solidFill>
-                  <a:srgbClr val="003C71"/>
-                </a:solidFill>
-                <a:latin typeface="Malgun Gothic"/>
-                <a:ea typeface="Malgun Gothic"/>
-                <a:cs typeface="Malgun Gothic"/>
-              </a:rPr>
-              <a:t>임상 연계   </a:t>
-            </a:r>
-            <a:r>
-              <a:rPr sz="1600" b="1" i="0">
+          <p:cNvPr id="7" name="TextBox 6"/>
+          <p:cNvSpPr txBox="1"/>
+          <p:nvPr/>
+        </p:nvSpPr>
+        <p:spPr>
+          <a:xfrm>
+            <a:off x="640080" y="1280160"/>
+            <a:ext cx="10881360" cy="5029200"/>
+          </a:xfrm>
+          <a:prstGeom prst="rect">
+            <a:avLst/>
+          </a:prstGeom>
+          <a:noFill/>
+        </p:spPr>
+        <p:txBody>
+          <a:bodyPr wrap="square" anchor="t">
+            <a:spAutoFit/>
+          </a:bodyPr>
+          <a:lstStyle/>
+          <a:p>
+            <a:pPr>
+              <a:spcAft>
+                <a:spcPts val="900"/>
+              </a:spcAft>
+            </a:pPr>
+            <a:r>
+              <a:rPr sz="1400" b="1" i="0">
+                <a:solidFill>
+                  <a:srgbClr val="F2B705"/>
+                </a:solidFill>
+                <a:latin typeface="Malgun Gothic"/>
+                <a:ea typeface="Malgun Gothic"/>
+                <a:cs typeface="Malgun Gothic"/>
+              </a:rPr>
+              <a:t>•  </a:t>
+            </a:r>
+            <a:r>
+              <a:rPr sz="1400" b="0" i="0">
                 <a:solidFill>
                   <a:srgbClr val="11202B"/>
                 </a:solidFill>
@@ -7848,10 +7952,28 @@
                 <a:ea typeface="Malgun Gothic"/>
                 <a:cs typeface="Malgun Gothic"/>
               </a:rPr>
-              <a:t>임상 연계</a:t>
-            </a:r>
-            <a:r>
-              <a:rPr sz="1600" b="0" i="0">
+              <a:t>신장(elongation)은 같은 세 단계가 아미노산 하나당 한 번씩 반복되는 주기다. 진핵세포의 인자 이름은 원핵세포와 다르지만 기능은 같다.</a:t>
+            </a:r>
+          </a:p>
+          <a:p>
+            <a:pPr>
+              <a:spcAft>
+                <a:spcPts val="900"/>
+              </a:spcAft>
+            </a:pPr>
+            <a:r>
+              <a:rPr sz="1400" b="1" i="0">
+                <a:solidFill>
+                  <a:srgbClr val="F2B705"/>
+                </a:solidFill>
+                <a:latin typeface="Malgun Gothic"/>
+                <a:ea typeface="Malgun Gothic"/>
+                <a:cs typeface="Malgun Gothic"/>
+              </a:rPr>
+              <a:t>•  </a:t>
+            </a:r>
+            <a:r>
+              <a:rPr sz="1400" b="1" i="0">
                 <a:solidFill>
                   <a:srgbClr val="11202B"/>
                 </a:solidFill>
@@ -7859,10 +7981,10 @@
                 <a:ea typeface="Malgun Gothic"/>
                 <a:cs typeface="Malgun Gothic"/>
               </a:rPr>
-              <a:t> 진핵세포의 개시는 전체 단백질 합성량을 조절하는 가장 중요한 지점이다. </a:t>
-            </a:r>
-            <a:r>
-              <a:rPr sz="1600" b="1" i="0">
+              <a:t>(1) A 자리 결합</a:t>
+            </a:r>
+            <a:r>
+              <a:rPr sz="1400" b="0" i="0">
                 <a:solidFill>
                   <a:srgbClr val="11202B"/>
                 </a:solidFill>
@@ -7870,10 +7992,10 @@
                 <a:ea typeface="Malgun Gothic"/>
                 <a:cs typeface="Malgun Gothic"/>
               </a:rPr>
-              <a:t>eIF2의 α 소단위가 인산화되면 개시가 전반적으로 멈춘다.</a:t>
-            </a:r>
-            <a:r>
-              <a:rPr sz="1600" b="0" i="0">
+              <a:t> </a:t>
+            </a:r>
+            <a:r>
+              <a:rPr sz="1400" b="1" i="0">
                 <a:solidFill>
                   <a:srgbClr val="11202B"/>
                 </a:solidFill>
@@ -7881,10 +8003,10 @@
                 <a:ea typeface="Malgun Gothic"/>
                 <a:cs typeface="Malgun Gothic"/>
               </a:rPr>
-              <a:t> 인산화를 수행하는 kinase는 자극에 따라 다르다. 소포체 내 misfolded protein이 쌓이면 PERK, 바이러스 이중사슬 RNA가 있으면 PKR, 아미노산이 부족하면 GCN2, 그리고 </a:t>
-            </a:r>
-            <a:r>
-              <a:rPr sz="1600" b="1" i="0">
+              <a:t>EF-Tu</a:t>
+            </a:r>
+            <a:r>
+              <a:rPr sz="1400" b="0" i="0">
                 <a:solidFill>
                   <a:srgbClr val="11202B"/>
                 </a:solidFill>
@@ -7892,10 +8014,10 @@
                 <a:ea typeface="Malgun Gothic"/>
                 <a:cs typeface="Malgun Gothic"/>
               </a:rPr>
-              <a:t>적혈구 전구세포에서 heme이 부족하면 HRI</a:t>
-            </a:r>
-            <a:r>
-              <a:rPr sz="1600" b="0" i="0">
+              <a:t>(진핵에서는 eEF1A)가 GTP와 함께 aminoacyl-tRNA를 A 자리로 데려온다. 코돈과 anticodon이 올바르게 짝지어졌을 때만 GTP 가수분해가 효율적으로 일어나므로, 이 단계가 </a:t>
+            </a:r>
+            <a:r>
+              <a:rPr sz="1400" b="1" i="0">
                 <a:solidFill>
                   <a:srgbClr val="11202B"/>
                 </a:solidFill>
@@ -7903,10 +8025,10 @@
                 <a:ea typeface="Malgun Gothic"/>
                 <a:cs typeface="Malgun Gothic"/>
               </a:rPr>
-              <a:t>가 작용한다. 마지막 경우가 적혈구 생성에서 중요하다. heme이 없으면 globin 합성이 멈추어 </a:t>
-            </a:r>
-            <a:r>
-              <a:rPr sz="1600" b="1" i="0">
+              <a:t>해독의 정확성을 걸러내는 지점</a:t>
+            </a:r>
+            <a:r>
+              <a:rPr sz="1400" b="0" i="0">
                 <a:solidFill>
                   <a:srgbClr val="11202B"/>
                 </a:solidFill>
@@ -7914,10 +8036,28 @@
                 <a:ea typeface="Malgun Gothic"/>
                 <a:cs typeface="Malgun Gothic"/>
               </a:rPr>
-              <a:t>globin 사슬과 heme의 양이 맞추어진다.</a:t>
-            </a:r>
-            <a:r>
-              <a:rPr sz="1600" b="0" i="0">
+              <a:t>이다. 잘못 결합한 tRNA는 GTP 가수분해 전에 떨어져 나갈 시간을 갖는다.</a:t>
+            </a:r>
+          </a:p>
+          <a:p>
+            <a:pPr>
+              <a:spcAft>
+                <a:spcPts val="900"/>
+              </a:spcAft>
+            </a:pPr>
+            <a:r>
+              <a:rPr sz="1400" b="1" i="0">
+                <a:solidFill>
+                  <a:srgbClr val="F2B705"/>
+                </a:solidFill>
+                <a:latin typeface="Malgun Gothic"/>
+                <a:ea typeface="Malgun Gothic"/>
+                <a:cs typeface="Malgun Gothic"/>
+              </a:rPr>
+              <a:t>•  </a:t>
+            </a:r>
+            <a:r>
+              <a:rPr sz="1400" b="1" i="0">
                 <a:solidFill>
                   <a:srgbClr val="11202B"/>
                 </a:solidFill>
@@ -7925,7 +8065,124 @@
                 <a:ea typeface="Malgun Gothic"/>
                 <a:cs typeface="Malgun Gothic"/>
               </a:rPr>
-              <a:t> 이 짝맞춤이 깨지면 짝을 찾지 못한 사슬이 침전해 적혈구를 손상시키므로, thalassemia의 적혈구 손상 기전을 이해하는 데 필요한 조절이다.</a:t>
+              <a:t>(2) Peptide 결합 형성</a:t>
+            </a:r>
+            <a:r>
+              <a:rPr sz="1400" b="0" i="0">
+                <a:solidFill>
+                  <a:srgbClr val="11202B"/>
+                </a:solidFill>
+                <a:latin typeface="Malgun Gothic"/>
+                <a:ea typeface="Malgun Gothic"/>
+                <a:cs typeface="Malgun Gothic"/>
+              </a:rPr>
+              <a:t> 대단위 rRNA의 </a:t>
+            </a:r>
+            <a:r>
+              <a:rPr sz="1400" b="1" i="0">
+                <a:solidFill>
+                  <a:srgbClr val="11202B"/>
+                </a:solidFill>
+                <a:latin typeface="Malgun Gothic"/>
+                <a:ea typeface="Malgun Gothic"/>
+                <a:cs typeface="Malgun Gothic"/>
+              </a:rPr>
+              <a:t>peptidyl transferase</a:t>
+            </a:r>
+            <a:r>
+              <a:rPr sz="1400" b="0" i="0">
+                <a:solidFill>
+                  <a:srgbClr val="11202B"/>
+                </a:solidFill>
+                <a:latin typeface="Malgun Gothic"/>
+                <a:ea typeface="Malgun Gothic"/>
+                <a:cs typeface="Malgun Gothic"/>
+              </a:rPr>
+              <a:t> 활성이 P 자리 tRNA에 달린 polypeptide 전체를 A 자리 아미노산의 아미노기로 옮긴다. </a:t>
+            </a:r>
+            <a:r>
+              <a:rPr sz="1400" b="1" i="0">
+                <a:solidFill>
+                  <a:srgbClr val="11202B"/>
+                </a:solidFill>
+                <a:latin typeface="Malgun Gothic"/>
+                <a:ea typeface="Malgun Gothic"/>
+                <a:cs typeface="Malgun Gothic"/>
+              </a:rPr>
+              <a:t>사슬이 새 아미노산으로 옮겨 가는 것이지 아미노산이 사슬에 붙는 것이 아니다.</a:t>
+            </a:r>
+            <a:r>
+              <a:rPr sz="1400" b="0" i="0">
+                <a:solidFill>
+                  <a:srgbClr val="11202B"/>
+                </a:solidFill>
+                <a:latin typeface="Malgun Gothic"/>
+                <a:ea typeface="Malgun Gothic"/>
+                <a:cs typeface="Malgun Gothic"/>
+              </a:rPr>
+              <a:t> 이 반응에는 ATP도 GTP도 쓰이지 않는다. 필요한 에너지는 aminoacyl-tRNA의 에스터 결합에 이미 저장되어 있다.</a:t>
+            </a:r>
+          </a:p>
+          <a:p>
+            <a:pPr>
+              <a:spcAft>
+                <a:spcPts val="900"/>
+              </a:spcAft>
+            </a:pPr>
+            <a:r>
+              <a:rPr sz="1400" b="1" i="0">
+                <a:solidFill>
+                  <a:srgbClr val="F2B705"/>
+                </a:solidFill>
+                <a:latin typeface="Malgun Gothic"/>
+                <a:ea typeface="Malgun Gothic"/>
+                <a:cs typeface="Malgun Gothic"/>
+              </a:rPr>
+              <a:t>•  </a:t>
+            </a:r>
+            <a:r>
+              <a:rPr sz="1400" b="1" i="0">
+                <a:solidFill>
+                  <a:srgbClr val="11202B"/>
+                </a:solidFill>
+                <a:latin typeface="Malgun Gothic"/>
+                <a:ea typeface="Malgun Gothic"/>
+                <a:cs typeface="Malgun Gothic"/>
+              </a:rPr>
+              <a:t>(3) Translocation</a:t>
+            </a:r>
+            <a:r>
+              <a:rPr sz="1400" b="0" i="0">
+                <a:solidFill>
+                  <a:srgbClr val="11202B"/>
+                </a:solidFill>
+                <a:latin typeface="Malgun Gothic"/>
+                <a:ea typeface="Malgun Gothic"/>
+                <a:cs typeface="Malgun Gothic"/>
+              </a:rPr>
+              <a:t> </a:t>
+            </a:r>
+            <a:r>
+              <a:rPr sz="1400" b="1" i="0">
+                <a:solidFill>
+                  <a:srgbClr val="11202B"/>
+                </a:solidFill>
+                <a:latin typeface="Malgun Gothic"/>
+                <a:ea typeface="Malgun Gothic"/>
+                <a:cs typeface="Malgun Gothic"/>
+              </a:rPr>
+              <a:t>EF-G</a:t>
+            </a:r>
+            <a:r>
+              <a:rPr sz="1400" b="0" i="0">
+                <a:solidFill>
+                  <a:srgbClr val="11202B"/>
+                </a:solidFill>
+                <a:latin typeface="Malgun Gothic"/>
+                <a:ea typeface="Malgun Gothic"/>
+                <a:cs typeface="Malgun Gothic"/>
+              </a:rPr>
+              <a:t>(진핵에서는 eEF2)가 GTP를 가수분해하며 ribosome을 mRNA 위에서 세 뉴클레오타이드 전진시킨다. 그 결과 peptidyl-tRNA가 A에서 P로, 비어 있는 tRNA가 P에서 E로 옮겨 가고 A 자리가 비어 다음 코돈이 노출된다.</a:t>
             </a:r>
           </a:p>
         </p:txBody>
@@ -8174,16 +8431,40 @@
           </a:p>
         </p:txBody>
       </p:sp>
-      <p:sp>
-        <p:nvSpPr>
-          <p:cNvPr id="7" name="TextBox 6"/>
+      <p:pic>
+        <p:nvPicPr>
+          <p:cNvPr id="7" name="Picture 6" descr="fig-elongation.slide.png"/>
+          <p:cNvPicPr>
+            <a:picLocks noChangeAspect="1"/>
+          </p:cNvPicPr>
+          <p:nvPr/>
+        </p:nvPicPr>
+        <p:blipFill>
+          <a:blip r:embed="rId2"/>
+          <a:stretch>
+            <a:fillRect/>
+          </a:stretch>
+        </p:blipFill>
+        <p:spPr>
+          <a:xfrm>
+            <a:off x="1848967" y="1325880"/>
+            <a:ext cx="8493760" cy="4343400"/>
+          </a:xfrm>
+          <a:prstGeom prst="rect">
+            <a:avLst/>
+          </a:prstGeom>
+        </p:spPr>
+      </p:pic>
+      <p:sp>
+        <p:nvSpPr>
+          <p:cNvPr id="8" name="TextBox 7"/>
           <p:cNvSpPr txBox="1"/>
           <p:nvPr/>
         </p:nvSpPr>
         <p:spPr>
           <a:xfrm>
-            <a:off x="640080" y="1280160"/>
-            <a:ext cx="10881360" cy="5029200"/>
+            <a:off x="640080" y="5806440"/>
+            <a:ext cx="10881360" cy="548640"/>
           </a:xfrm>
           <a:prstGeom prst="rect">
             <a:avLst/>
@@ -8196,262 +8477,17 @@
           </a:bodyPr>
           <a:lstStyle/>
           <a:p>
-            <a:pPr>
-              <a:spcAft>
-                <a:spcPts val="900"/>
-              </a:spcAft>
-            </a:pPr>
-            <a:r>
-              <a:rPr sz="1400" b="1" i="0">
-                <a:solidFill>
-                  <a:srgbClr val="F2B705"/>
-                </a:solidFill>
-                <a:latin typeface="Malgun Gothic"/>
-                <a:ea typeface="Malgun Gothic"/>
-                <a:cs typeface="Malgun Gothic"/>
-              </a:rPr>
-              <a:t>•  </a:t>
-            </a:r>
-            <a:r>
-              <a:rPr sz="1400" b="0" i="0">
-                <a:solidFill>
-                  <a:srgbClr val="11202B"/>
-                </a:solidFill>
-                <a:latin typeface="Malgun Gothic"/>
-                <a:ea typeface="Malgun Gothic"/>
-                <a:cs typeface="Malgun Gothic"/>
-              </a:rPr>
-              <a:t>신장(elongation)은 같은 세 단계가 아미노산 하나당 한 번씩 반복되는 주기다. 진핵세포의 인자 이름은 원핵세포와 다르지만 기능은 같다.</a:t>
-            </a:r>
-          </a:p>
-          <a:p>
-            <a:pPr>
-              <a:spcAft>
-                <a:spcPts val="900"/>
-              </a:spcAft>
-            </a:pPr>
-            <a:r>
-              <a:rPr sz="1400" b="1" i="0">
-                <a:solidFill>
-                  <a:srgbClr val="F2B705"/>
-                </a:solidFill>
-                <a:latin typeface="Malgun Gothic"/>
-                <a:ea typeface="Malgun Gothic"/>
-                <a:cs typeface="Malgun Gothic"/>
-              </a:rPr>
-              <a:t>•  </a:t>
-            </a:r>
-            <a:r>
-              <a:rPr sz="1400" b="1" i="0">
-                <a:solidFill>
-                  <a:srgbClr val="11202B"/>
-                </a:solidFill>
-                <a:latin typeface="Malgun Gothic"/>
-                <a:ea typeface="Malgun Gothic"/>
-                <a:cs typeface="Malgun Gothic"/>
-              </a:rPr>
-              <a:t>(1) A 자리 결합</a:t>
-            </a:r>
-            <a:r>
-              <a:rPr sz="1400" b="0" i="0">
-                <a:solidFill>
-                  <a:srgbClr val="11202B"/>
-                </a:solidFill>
-                <a:latin typeface="Malgun Gothic"/>
-                <a:ea typeface="Malgun Gothic"/>
-                <a:cs typeface="Malgun Gothic"/>
-              </a:rPr>
-              <a:t> </a:t>
-            </a:r>
-            <a:r>
-              <a:rPr sz="1400" b="1" i="0">
-                <a:solidFill>
-                  <a:srgbClr val="11202B"/>
-                </a:solidFill>
-                <a:latin typeface="Malgun Gothic"/>
-                <a:ea typeface="Malgun Gothic"/>
-                <a:cs typeface="Malgun Gothic"/>
-              </a:rPr>
-              <a:t>EF-Tu</a:t>
-            </a:r>
-            <a:r>
-              <a:rPr sz="1400" b="0" i="0">
-                <a:solidFill>
-                  <a:srgbClr val="11202B"/>
-                </a:solidFill>
-                <a:latin typeface="Malgun Gothic"/>
-                <a:ea typeface="Malgun Gothic"/>
-                <a:cs typeface="Malgun Gothic"/>
-              </a:rPr>
-              <a:t>(진핵에서는 eEF1A)가 GTP와 함께 aminoacyl-tRNA를 A 자리로 데려온다. 코돈과 anticodon이 올바르게 짝지어졌을 때만 GTP 가수분해가 효율적으로 일어나므로, 이 단계가 </a:t>
-            </a:r>
-            <a:r>
-              <a:rPr sz="1400" b="1" i="0">
-                <a:solidFill>
-                  <a:srgbClr val="11202B"/>
-                </a:solidFill>
-                <a:latin typeface="Malgun Gothic"/>
-                <a:ea typeface="Malgun Gothic"/>
-                <a:cs typeface="Malgun Gothic"/>
-              </a:rPr>
-              <a:t>해독의 정확성을 걸러내는 지점</a:t>
-            </a:r>
-            <a:r>
-              <a:rPr sz="1400" b="0" i="0">
-                <a:solidFill>
-                  <a:srgbClr val="11202B"/>
-                </a:solidFill>
-                <a:latin typeface="Malgun Gothic"/>
-                <a:ea typeface="Malgun Gothic"/>
-                <a:cs typeface="Malgun Gothic"/>
-              </a:rPr>
-              <a:t>이다. 잘못 결합한 tRNA는 GTP 가수분해 전에 떨어져 나갈 시간을 갖는다.</a:t>
-            </a:r>
-          </a:p>
-          <a:p>
-            <a:pPr>
-              <a:spcAft>
-                <a:spcPts val="900"/>
-              </a:spcAft>
-            </a:pPr>
-            <a:r>
-              <a:rPr sz="1400" b="1" i="0">
-                <a:solidFill>
-                  <a:srgbClr val="F2B705"/>
-                </a:solidFill>
-                <a:latin typeface="Malgun Gothic"/>
-                <a:ea typeface="Malgun Gothic"/>
-                <a:cs typeface="Malgun Gothic"/>
-              </a:rPr>
-              <a:t>•  </a:t>
-            </a:r>
-            <a:r>
-              <a:rPr sz="1400" b="1" i="0">
-                <a:solidFill>
-                  <a:srgbClr val="11202B"/>
-                </a:solidFill>
-                <a:latin typeface="Malgun Gothic"/>
-                <a:ea typeface="Malgun Gothic"/>
-                <a:cs typeface="Malgun Gothic"/>
-              </a:rPr>
-              <a:t>(2) Peptide 결합 형성</a:t>
-            </a:r>
-            <a:r>
-              <a:rPr sz="1400" b="0" i="0">
-                <a:solidFill>
-                  <a:srgbClr val="11202B"/>
-                </a:solidFill>
-                <a:latin typeface="Malgun Gothic"/>
-                <a:ea typeface="Malgun Gothic"/>
-                <a:cs typeface="Malgun Gothic"/>
-              </a:rPr>
-              <a:t> 대단위 rRNA의 </a:t>
-            </a:r>
-            <a:r>
-              <a:rPr sz="1400" b="1" i="0">
-                <a:solidFill>
-                  <a:srgbClr val="11202B"/>
-                </a:solidFill>
-                <a:latin typeface="Malgun Gothic"/>
-                <a:ea typeface="Malgun Gothic"/>
-                <a:cs typeface="Malgun Gothic"/>
-              </a:rPr>
-              <a:t>peptidyl transferase</a:t>
-            </a:r>
-            <a:r>
-              <a:rPr sz="1400" b="0" i="0">
-                <a:solidFill>
-                  <a:srgbClr val="11202B"/>
-                </a:solidFill>
-                <a:latin typeface="Malgun Gothic"/>
-                <a:ea typeface="Malgun Gothic"/>
-                <a:cs typeface="Malgun Gothic"/>
-              </a:rPr>
-              <a:t> 활성이 P 자리 tRNA에 달린 polypeptide 전체를 A 자리 아미노산의 아미노기로 옮긴다. </a:t>
-            </a:r>
-            <a:r>
-              <a:rPr sz="1400" b="1" i="0">
-                <a:solidFill>
-                  <a:srgbClr val="11202B"/>
-                </a:solidFill>
-                <a:latin typeface="Malgun Gothic"/>
-                <a:ea typeface="Malgun Gothic"/>
-                <a:cs typeface="Malgun Gothic"/>
-              </a:rPr>
-              <a:t>사슬이 새 아미노산으로 옮겨 가는 것이지 아미노산이 사슬에 붙는 것이 아니다.</a:t>
-            </a:r>
-            <a:r>
-              <a:rPr sz="1400" b="0" i="0">
-                <a:solidFill>
-                  <a:srgbClr val="11202B"/>
-                </a:solidFill>
-                <a:latin typeface="Malgun Gothic"/>
-                <a:ea typeface="Malgun Gothic"/>
-                <a:cs typeface="Malgun Gothic"/>
-              </a:rPr>
-              <a:t> 이 반응에는 ATP도 GTP도 쓰이지 않는다. 필요한 에너지는 aminoacyl-tRNA의 에스터 결합에 이미 저장되어 있다.</a:t>
-            </a:r>
-          </a:p>
-          <a:p>
-            <a:pPr>
-              <a:spcAft>
-                <a:spcPts val="900"/>
-              </a:spcAft>
-            </a:pPr>
-            <a:r>
-              <a:rPr sz="1400" b="1" i="0">
-                <a:solidFill>
-                  <a:srgbClr val="F2B705"/>
-                </a:solidFill>
-                <a:latin typeface="Malgun Gothic"/>
-                <a:ea typeface="Malgun Gothic"/>
-                <a:cs typeface="Malgun Gothic"/>
-              </a:rPr>
-              <a:t>•  </a:t>
-            </a:r>
-            <a:r>
-              <a:rPr sz="1400" b="1" i="0">
-                <a:solidFill>
-                  <a:srgbClr val="11202B"/>
-                </a:solidFill>
-                <a:latin typeface="Malgun Gothic"/>
-                <a:ea typeface="Malgun Gothic"/>
-                <a:cs typeface="Malgun Gothic"/>
-              </a:rPr>
-              <a:t>(3) Translocation</a:t>
-            </a:r>
-            <a:r>
-              <a:rPr sz="1400" b="0" i="0">
-                <a:solidFill>
-                  <a:srgbClr val="11202B"/>
-                </a:solidFill>
-                <a:latin typeface="Malgun Gothic"/>
-                <a:ea typeface="Malgun Gothic"/>
-                <a:cs typeface="Malgun Gothic"/>
-              </a:rPr>
-              <a:t> </a:t>
-            </a:r>
-            <a:r>
-              <a:rPr sz="1400" b="1" i="0">
-                <a:solidFill>
-                  <a:srgbClr val="11202B"/>
-                </a:solidFill>
-                <a:latin typeface="Malgun Gothic"/>
-                <a:ea typeface="Malgun Gothic"/>
-                <a:cs typeface="Malgun Gothic"/>
-              </a:rPr>
-              <a:t>EF-G</a:t>
-            </a:r>
-            <a:r>
-              <a:rPr sz="1400" b="0" i="0">
-                <a:solidFill>
-                  <a:srgbClr val="11202B"/>
-                </a:solidFill>
-                <a:latin typeface="Malgun Gothic"/>
-                <a:ea typeface="Malgun Gothic"/>
-                <a:cs typeface="Malgun Gothic"/>
-              </a:rPr>
-              <a:t>(진핵에서는 eEF2)가 GTP를 가수분해하며 ribosome을 mRNA 위에서 세 뉴클레오타이드 전진시킨다. 그 결과 peptidyl-tRNA가 A에서 P로, 비어 있는 tRNA가 P에서 E로 옮겨 가고 A 자리가 비어 다음 코돈이 노출된다.</a:t>
+            <a:pPr algn="ctr"/>
+            <a:r>
+              <a:rPr sz="1200" b="0" i="0">
+                <a:solidFill>
+                  <a:srgbClr val="66788A"/>
+                </a:solidFill>
+                <a:latin typeface="Malgun Gothic"/>
+                <a:ea typeface="Malgun Gothic"/>
+                <a:cs typeface="Malgun Gothic"/>
+              </a:rPr>
+              <a:t>신장 주기의 세 단계. EF-Tu에 의한 A 자리 결합, peptidyl transferase에 의한 사슬 전달, EF-G에 의한 translocation을 순서대로 보인다.</a:t>
             </a:r>
           </a:p>
         </p:txBody>
@@ -8700,40 +8736,16 @@
           </a:p>
         </p:txBody>
       </p:sp>
-      <p:pic>
-        <p:nvPicPr>
-          <p:cNvPr id="7" name="Picture 6" descr="fig-elongation.slide.png"/>
-          <p:cNvPicPr>
-            <a:picLocks noChangeAspect="1"/>
-          </p:cNvPicPr>
-          <p:nvPr/>
-        </p:nvPicPr>
-        <p:blipFill>
-          <a:blip r:embed="rId2"/>
-          <a:stretch>
-            <a:fillRect/>
-          </a:stretch>
-        </p:blipFill>
-        <p:spPr>
-          <a:xfrm>
-            <a:off x="1848967" y="1325880"/>
-            <a:ext cx="8493760" cy="4343400"/>
-          </a:xfrm>
-          <a:prstGeom prst="rect">
-            <a:avLst/>
-          </a:prstGeom>
-        </p:spPr>
-      </p:pic>
-      <p:sp>
-        <p:nvSpPr>
-          <p:cNvPr id="8" name="TextBox 7"/>
+      <p:sp>
+        <p:nvSpPr>
+          <p:cNvPr id="7" name="TextBox 6"/>
           <p:cNvSpPr txBox="1"/>
           <p:nvPr/>
         </p:nvSpPr>
         <p:spPr>
           <a:xfrm>
-            <a:off x="640080" y="5806440"/>
-            <a:ext cx="10881360" cy="548640"/>
+            <a:off x="640080" y="1280160"/>
+            <a:ext cx="10881360" cy="5029200"/>
           </a:xfrm>
           <a:prstGeom prst="rect">
             <a:avLst/>
@@ -8746,17 +8758,65 @@
           </a:bodyPr>
           <a:lstStyle/>
           <a:p>
-            <a:pPr algn="ctr"/>
-            <a:r>
-              <a:rPr sz="1200" b="0" i="0">
-                <a:solidFill>
-                  <a:srgbClr val="66788A"/>
-                </a:solidFill>
-                <a:latin typeface="Malgun Gothic"/>
-                <a:ea typeface="Malgun Gothic"/>
-                <a:cs typeface="Malgun Gothic"/>
-              </a:rPr>
-              <a:t>신장 주기의 세 단계. EF-Tu에 의한 A 자리 결합, peptidyl transferase에 의한 사슬 전달, EF-G에 의한 translocation을 순서대로 보인다.</a:t>
+            <a:pPr>
+              <a:spcAft>
+                <a:spcPts val="900"/>
+              </a:spcAft>
+            </a:pPr>
+            <a:r>
+              <a:rPr sz="2000" b="1" i="0">
+                <a:solidFill>
+                  <a:srgbClr val="F2B705"/>
+                </a:solidFill>
+                <a:latin typeface="Malgun Gothic"/>
+                <a:ea typeface="Malgun Gothic"/>
+                <a:cs typeface="Malgun Gothic"/>
+              </a:rPr>
+              <a:t>•  </a:t>
+            </a:r>
+            <a:r>
+              <a:rPr sz="2000" b="1" i="0">
+                <a:solidFill>
+                  <a:srgbClr val="11202B"/>
+                </a:solidFill>
+                <a:latin typeface="Malgun Gothic"/>
+                <a:ea typeface="Malgun Gothic"/>
+                <a:cs typeface="Malgun Gothic"/>
+              </a:rPr>
+              <a:t>에너지 비용</a:t>
+            </a:r>
+            <a:r>
+              <a:rPr sz="2000" b="0" i="0">
+                <a:solidFill>
+                  <a:srgbClr val="11202B"/>
+                </a:solidFill>
+                <a:latin typeface="Malgun Gothic"/>
+                <a:ea typeface="Malgun Gothic"/>
+                <a:cs typeface="Malgun Gothic"/>
+              </a:rPr>
+              <a:t>을 정리하면 아미노산 하나를 붙이는 데 고에너지 인산 결합 </a:t>
+            </a:r>
+            <a:r>
+              <a:rPr sz="2000" b="1" i="0">
+                <a:solidFill>
+                  <a:srgbClr val="11202B"/>
+                </a:solidFill>
+                <a:latin typeface="Malgun Gothic"/>
+                <a:ea typeface="Malgun Gothic"/>
+                <a:cs typeface="Malgun Gothic"/>
+              </a:rPr>
+              <a:t>4개</a:t>
+            </a:r>
+            <a:r>
+              <a:rPr sz="2000" b="0" i="0">
+                <a:solidFill>
+                  <a:srgbClr val="11202B"/>
+                </a:solidFill>
+                <a:latin typeface="Malgun Gothic"/>
+                <a:ea typeface="Malgun Gothic"/>
+                <a:cs typeface="Malgun Gothic"/>
+              </a:rPr>
+              <a:t>가 쓰인다.</a:t>
             </a:r>
           </a:p>
         </p:txBody>
@@ -9442,335 +9502,6 @@
                 <a:cs typeface="Malgun Gothic"/>
               </a:rPr>
               <a:t>      20</a:t>
-            </a:r>
-          </a:p>
-        </p:txBody>
-      </p:sp>
-      <p:sp>
-        <p:nvSpPr>
-          <p:cNvPr id="7" name="TextBox 6"/>
-          <p:cNvSpPr txBox="1"/>
-          <p:nvPr/>
-        </p:nvSpPr>
-        <p:spPr>
-          <a:xfrm>
-            <a:off x="640080" y="1280160"/>
-            <a:ext cx="10881360" cy="5029200"/>
-          </a:xfrm>
-          <a:prstGeom prst="rect">
-            <a:avLst/>
-          </a:prstGeom>
-          <a:noFill/>
-        </p:spPr>
-        <p:txBody>
-          <a:bodyPr wrap="square" anchor="t">
-            <a:spAutoFit/>
-          </a:bodyPr>
-          <a:lstStyle/>
-          <a:p>
-            <a:pPr>
-              <a:spcAft>
-                <a:spcPts val="900"/>
-              </a:spcAft>
-            </a:pPr>
-            <a:r>
-              <a:rPr sz="2000" b="1" i="0">
-                <a:solidFill>
-                  <a:srgbClr val="F2B705"/>
-                </a:solidFill>
-                <a:latin typeface="Malgun Gothic"/>
-                <a:ea typeface="Malgun Gothic"/>
-                <a:cs typeface="Malgun Gothic"/>
-              </a:rPr>
-              <a:t>•  </a:t>
-            </a:r>
-            <a:r>
-              <a:rPr sz="2000" b="1" i="0">
-                <a:solidFill>
-                  <a:srgbClr val="11202B"/>
-                </a:solidFill>
-                <a:latin typeface="Malgun Gothic"/>
-                <a:ea typeface="Malgun Gothic"/>
-                <a:cs typeface="Malgun Gothic"/>
-              </a:rPr>
-              <a:t>에너지 비용</a:t>
-            </a:r>
-            <a:r>
-              <a:rPr sz="2000" b="0" i="0">
-                <a:solidFill>
-                  <a:srgbClr val="11202B"/>
-                </a:solidFill>
-                <a:latin typeface="Malgun Gothic"/>
-                <a:ea typeface="Malgun Gothic"/>
-                <a:cs typeface="Malgun Gothic"/>
-              </a:rPr>
-              <a:t>을 정리하면 아미노산 하나를 붙이는 데 고에너지 인산 결합 </a:t>
-            </a:r>
-            <a:r>
-              <a:rPr sz="2000" b="1" i="0">
-                <a:solidFill>
-                  <a:srgbClr val="11202B"/>
-                </a:solidFill>
-                <a:latin typeface="Malgun Gothic"/>
-                <a:ea typeface="Malgun Gothic"/>
-                <a:cs typeface="Malgun Gothic"/>
-              </a:rPr>
-              <a:t>4개</a:t>
-            </a:r>
-            <a:r>
-              <a:rPr sz="2000" b="0" i="0">
-                <a:solidFill>
-                  <a:srgbClr val="11202B"/>
-                </a:solidFill>
-                <a:latin typeface="Malgun Gothic"/>
-                <a:ea typeface="Malgun Gothic"/>
-                <a:cs typeface="Malgun Gothic"/>
-              </a:rPr>
-              <a:t>가 쓰인다.</a:t>
-            </a:r>
-          </a:p>
-        </p:txBody>
-      </p:sp>
-    </p:spTree>
-  </p:cSld>
-  <p:clrMapOvr>
-    <a:masterClrMapping/>
-  </p:clrMapOvr>
-</p:sld>
-</file>
-
-<file path=ppt/slides/slide21.xml><?xml version="1.0" encoding="utf-8"?>
-<p:sld xmlns:a="http://schemas.openxmlformats.org/drawingml/2006/main" xmlns:p="http://schemas.openxmlformats.org/presentationml/2006/main" xmlns:r="http://schemas.openxmlformats.org/officeDocument/2006/relationships">
-  <p:cSld>
-    <p:spTree>
-      <p:nvGrpSpPr>
-        <p:cNvPr id="1" name=""/>
-        <p:cNvGrpSpPr/>
-        <p:nvPr/>
-      </p:nvGrpSpPr>
-      <p:grpSpPr/>
-      <p:sp>
-        <p:nvSpPr>
-          <p:cNvPr id="2" name="Rectangle 1"/>
-          <p:cNvSpPr/>
-          <p:nvPr/>
-        </p:nvSpPr>
-        <p:spPr>
-          <a:xfrm>
-            <a:off x="0" y="0"/>
-            <a:ext cx="12191695" cy="6858000"/>
-          </a:xfrm>
-          <a:prstGeom prst="rect">
-            <a:avLst/>
-          </a:prstGeom>
-          <a:solidFill>
-            <a:srgbClr val="F5F8F9"/>
-          </a:solidFill>
-          <a:ln>
-            <a:noFill/>
-          </a:ln>
-          <a:effectLst/>
-        </p:spPr>
-        <p:style>
-          <a:lnRef idx="1">
-            <a:schemeClr val="accent1"/>
-          </a:lnRef>
-          <a:fillRef idx="3">
-            <a:schemeClr val="accent1"/>
-          </a:fillRef>
-          <a:effectRef idx="2">
-            <a:schemeClr val="accent1"/>
-          </a:effectRef>
-          <a:fontRef idx="minor">
-            <a:schemeClr val="lt1"/>
-          </a:fontRef>
-        </p:style>
-        <p:txBody>
-          <a:bodyPr rtlCol="0" anchor="ctr"/>
-          <a:lstStyle/>
-          <a:p>
-            <a:pPr algn="ctr"/>
-          </a:p>
-        </p:txBody>
-      </p:sp>
-      <p:sp>
-        <p:nvSpPr>
-          <p:cNvPr id="3" name="Rectangle 2"/>
-          <p:cNvSpPr/>
-          <p:nvPr/>
-        </p:nvSpPr>
-        <p:spPr>
-          <a:xfrm>
-            <a:off x="0" y="0"/>
-            <a:ext cx="12191695" cy="960120"/>
-          </a:xfrm>
-          <a:prstGeom prst="rect">
-            <a:avLst/>
-          </a:prstGeom>
-          <a:solidFill>
-            <a:srgbClr val="003C71"/>
-          </a:solidFill>
-          <a:ln>
-            <a:noFill/>
-          </a:ln>
-          <a:effectLst/>
-        </p:spPr>
-        <p:style>
-          <a:lnRef idx="1">
-            <a:schemeClr val="accent1"/>
-          </a:lnRef>
-          <a:fillRef idx="3">
-            <a:schemeClr val="accent1"/>
-          </a:fillRef>
-          <a:effectRef idx="2">
-            <a:schemeClr val="accent1"/>
-          </a:effectRef>
-          <a:fontRef idx="minor">
-            <a:schemeClr val="lt1"/>
-          </a:fontRef>
-        </p:style>
-        <p:txBody>
-          <a:bodyPr rtlCol="0" anchor="ctr"/>
-          <a:lstStyle/>
-          <a:p>
-            <a:pPr algn="ctr"/>
-          </a:p>
-        </p:txBody>
-      </p:sp>
-      <p:sp>
-        <p:nvSpPr>
-          <p:cNvPr id="4" name="Rectangle 3"/>
-          <p:cNvSpPr/>
-          <p:nvPr/>
-        </p:nvSpPr>
-        <p:spPr>
-          <a:xfrm>
-            <a:off x="0" y="960120"/>
-            <a:ext cx="12191695" cy="54864"/>
-          </a:xfrm>
-          <a:prstGeom prst="rect">
-            <a:avLst/>
-          </a:prstGeom>
-          <a:solidFill>
-            <a:srgbClr val="F2B705"/>
-          </a:solidFill>
-          <a:ln>
-            <a:noFill/>
-          </a:ln>
-          <a:effectLst/>
-        </p:spPr>
-        <p:style>
-          <a:lnRef idx="1">
-            <a:schemeClr val="accent1"/>
-          </a:lnRef>
-          <a:fillRef idx="3">
-            <a:schemeClr val="accent1"/>
-          </a:fillRef>
-          <a:effectRef idx="2">
-            <a:schemeClr val="accent1"/>
-          </a:effectRef>
-          <a:fontRef idx="minor">
-            <a:schemeClr val="lt1"/>
-          </a:fontRef>
-        </p:style>
-        <p:txBody>
-          <a:bodyPr rtlCol="0" anchor="ctr"/>
-          <a:lstStyle/>
-          <a:p>
-            <a:pPr algn="ctr"/>
-          </a:p>
-        </p:txBody>
-      </p:sp>
-      <p:sp>
-        <p:nvSpPr>
-          <p:cNvPr id="5" name="TextBox 4"/>
-          <p:cNvSpPr txBox="1"/>
-          <p:nvPr/>
-        </p:nvSpPr>
-        <p:spPr>
-          <a:xfrm>
-            <a:off x="457200" y="109728"/>
-            <a:ext cx="11247120" cy="777240"/>
-          </a:xfrm>
-          <a:prstGeom prst="rect">
-            <a:avLst/>
-          </a:prstGeom>
-          <a:noFill/>
-        </p:spPr>
-        <p:txBody>
-          <a:bodyPr wrap="square" anchor="ctr">
-            <a:spAutoFit/>
-          </a:bodyPr>
-          <a:lstStyle/>
-          <a:p>
-            <a:r>
-              <a:rPr sz="1300" b="1" i="0">
-                <a:solidFill>
-                  <a:srgbClr val="F2B705"/>
-                </a:solidFill>
-                <a:latin typeface="Malgun Gothic"/>
-                <a:ea typeface="Malgun Gothic"/>
-                <a:cs typeface="Malgun Gothic"/>
-              </a:rPr>
-              <a:t>04   </a:t>
-            </a:r>
-            <a:r>
-              <a:rPr sz="2400" b="1" i="0">
-                <a:solidFill>
-                  <a:srgbClr val="FFFFFF"/>
-                </a:solidFill>
-                <a:latin typeface="Malgun Gothic"/>
-                <a:ea typeface="Malgun Gothic"/>
-                <a:cs typeface="Malgun Gothic"/>
-              </a:rPr>
-              <a:t>4. 신장 주기</a:t>
-            </a:r>
-          </a:p>
-        </p:txBody>
-      </p:sp>
-      <p:sp>
-        <p:nvSpPr>
-          <p:cNvPr id="6" name="TextBox 5"/>
-          <p:cNvSpPr txBox="1"/>
-          <p:nvPr/>
-        </p:nvSpPr>
-        <p:spPr>
-          <a:xfrm>
-            <a:off x="457200" y="6446520"/>
-            <a:ext cx="11247120" cy="301752"/>
-          </a:xfrm>
-          <a:prstGeom prst="rect">
-            <a:avLst/>
-          </a:prstGeom>
-          <a:noFill/>
-        </p:spPr>
-        <p:txBody>
-          <a:bodyPr wrap="square" anchor="ctr">
-            <a:spAutoFit/>
-          </a:bodyPr>
-          <a:lstStyle/>
-          <a:p>
-            <a:r>
-              <a:rPr sz="900" b="0" i="0">
-                <a:solidFill>
-                  <a:srgbClr val="66788A"/>
-                </a:solidFill>
-                <a:latin typeface="Malgun Gothic"/>
-                <a:ea typeface="Malgun Gothic"/>
-                <a:cs typeface="Malgun Gothic"/>
-              </a:rPr>
-              <a:t>M03-W03-L03  ·  Ribosome과 번역의 단계</a:t>
-            </a:r>
-            <a:r>
-              <a:rPr sz="900" b="1" i="0">
-                <a:solidFill>
-                  <a:srgbClr val="003C71"/>
-                </a:solidFill>
-                <a:latin typeface="Malgun Gothic"/>
-                <a:ea typeface="Malgun Gothic"/>
-                <a:cs typeface="Malgun Gothic"/>
-              </a:rPr>
-              <a:t>      21</a:t>
             </a:r>
           </a:p>
         </p:txBody>
@@ -10106,6 +9837,302 @@
 </p:sld>
 </file>
 
+<file path=ppt/slides/slide21.xml><?xml version="1.0" encoding="utf-8"?>
+<p:sld xmlns:a="http://schemas.openxmlformats.org/drawingml/2006/main" xmlns:p="http://schemas.openxmlformats.org/presentationml/2006/main" xmlns:r="http://schemas.openxmlformats.org/officeDocument/2006/relationships">
+  <p:cSld>
+    <p:spTree>
+      <p:nvGrpSpPr>
+        <p:cNvPr id="1" name=""/>
+        <p:cNvGrpSpPr/>
+        <p:nvPr/>
+      </p:nvGrpSpPr>
+      <p:grpSpPr/>
+      <p:sp>
+        <p:nvSpPr>
+          <p:cNvPr id="2" name="Rectangle 1"/>
+          <p:cNvSpPr/>
+          <p:nvPr/>
+        </p:nvSpPr>
+        <p:spPr>
+          <a:xfrm>
+            <a:off x="0" y="0"/>
+            <a:ext cx="12191695" cy="6858000"/>
+          </a:xfrm>
+          <a:prstGeom prst="rect">
+            <a:avLst/>
+          </a:prstGeom>
+          <a:solidFill>
+            <a:srgbClr val="F5F8F9"/>
+          </a:solidFill>
+          <a:ln>
+            <a:noFill/>
+          </a:ln>
+          <a:effectLst/>
+        </p:spPr>
+        <p:style>
+          <a:lnRef idx="1">
+            <a:schemeClr val="accent1"/>
+          </a:lnRef>
+          <a:fillRef idx="3">
+            <a:schemeClr val="accent1"/>
+          </a:fillRef>
+          <a:effectRef idx="2">
+            <a:schemeClr val="accent1"/>
+          </a:effectRef>
+          <a:fontRef idx="minor">
+            <a:schemeClr val="lt1"/>
+          </a:fontRef>
+        </p:style>
+        <p:txBody>
+          <a:bodyPr rtlCol="0" anchor="ctr"/>
+          <a:lstStyle/>
+          <a:p>
+            <a:pPr algn="ctr"/>
+          </a:p>
+        </p:txBody>
+      </p:sp>
+      <p:sp>
+        <p:nvSpPr>
+          <p:cNvPr id="3" name="Rectangle 2"/>
+          <p:cNvSpPr/>
+          <p:nvPr/>
+        </p:nvSpPr>
+        <p:spPr>
+          <a:xfrm>
+            <a:off x="0" y="0"/>
+            <a:ext cx="12191695" cy="960120"/>
+          </a:xfrm>
+          <a:prstGeom prst="rect">
+            <a:avLst/>
+          </a:prstGeom>
+          <a:solidFill>
+            <a:srgbClr val="003C71"/>
+          </a:solidFill>
+          <a:ln>
+            <a:noFill/>
+          </a:ln>
+          <a:effectLst/>
+        </p:spPr>
+        <p:style>
+          <a:lnRef idx="1">
+            <a:schemeClr val="accent1"/>
+          </a:lnRef>
+          <a:fillRef idx="3">
+            <a:schemeClr val="accent1"/>
+          </a:fillRef>
+          <a:effectRef idx="2">
+            <a:schemeClr val="accent1"/>
+          </a:effectRef>
+          <a:fontRef idx="minor">
+            <a:schemeClr val="lt1"/>
+          </a:fontRef>
+        </p:style>
+        <p:txBody>
+          <a:bodyPr rtlCol="0" anchor="ctr"/>
+          <a:lstStyle/>
+          <a:p>
+            <a:pPr algn="ctr"/>
+          </a:p>
+        </p:txBody>
+      </p:sp>
+      <p:sp>
+        <p:nvSpPr>
+          <p:cNvPr id="4" name="Rectangle 3"/>
+          <p:cNvSpPr/>
+          <p:nvPr/>
+        </p:nvSpPr>
+        <p:spPr>
+          <a:xfrm>
+            <a:off x="0" y="960120"/>
+            <a:ext cx="12191695" cy="54864"/>
+          </a:xfrm>
+          <a:prstGeom prst="rect">
+            <a:avLst/>
+          </a:prstGeom>
+          <a:solidFill>
+            <a:srgbClr val="F2B705"/>
+          </a:solidFill>
+          <a:ln>
+            <a:noFill/>
+          </a:ln>
+          <a:effectLst/>
+        </p:spPr>
+        <p:style>
+          <a:lnRef idx="1">
+            <a:schemeClr val="accent1"/>
+          </a:lnRef>
+          <a:fillRef idx="3">
+            <a:schemeClr val="accent1"/>
+          </a:fillRef>
+          <a:effectRef idx="2">
+            <a:schemeClr val="accent1"/>
+          </a:effectRef>
+          <a:fontRef idx="minor">
+            <a:schemeClr val="lt1"/>
+          </a:fontRef>
+        </p:style>
+        <p:txBody>
+          <a:bodyPr rtlCol="0" anchor="ctr"/>
+          <a:lstStyle/>
+          <a:p>
+            <a:pPr algn="ctr"/>
+          </a:p>
+        </p:txBody>
+      </p:sp>
+      <p:sp>
+        <p:nvSpPr>
+          <p:cNvPr id="5" name="TextBox 4"/>
+          <p:cNvSpPr txBox="1"/>
+          <p:nvPr/>
+        </p:nvSpPr>
+        <p:spPr>
+          <a:xfrm>
+            <a:off x="457200" y="109728"/>
+            <a:ext cx="11247120" cy="777240"/>
+          </a:xfrm>
+          <a:prstGeom prst="rect">
+            <a:avLst/>
+          </a:prstGeom>
+          <a:noFill/>
+        </p:spPr>
+        <p:txBody>
+          <a:bodyPr wrap="square" anchor="ctr">
+            <a:spAutoFit/>
+          </a:bodyPr>
+          <a:lstStyle/>
+          <a:p>
+            <a:r>
+              <a:rPr sz="1300" b="1" i="0">
+                <a:solidFill>
+                  <a:srgbClr val="F2B705"/>
+                </a:solidFill>
+                <a:latin typeface="Malgun Gothic"/>
+                <a:ea typeface="Malgun Gothic"/>
+                <a:cs typeface="Malgun Gothic"/>
+              </a:rPr>
+              <a:t>04   </a:t>
+            </a:r>
+            <a:r>
+              <a:rPr sz="2400" b="1" i="0">
+                <a:solidFill>
+                  <a:srgbClr val="FFFFFF"/>
+                </a:solidFill>
+                <a:latin typeface="Malgun Gothic"/>
+                <a:ea typeface="Malgun Gothic"/>
+                <a:cs typeface="Malgun Gothic"/>
+              </a:rPr>
+              <a:t>4. 신장 주기</a:t>
+            </a:r>
+          </a:p>
+        </p:txBody>
+      </p:sp>
+      <p:sp>
+        <p:nvSpPr>
+          <p:cNvPr id="6" name="TextBox 5"/>
+          <p:cNvSpPr txBox="1"/>
+          <p:nvPr/>
+        </p:nvSpPr>
+        <p:spPr>
+          <a:xfrm>
+            <a:off x="457200" y="6446520"/>
+            <a:ext cx="11247120" cy="301752"/>
+          </a:xfrm>
+          <a:prstGeom prst="rect">
+            <a:avLst/>
+          </a:prstGeom>
+          <a:noFill/>
+        </p:spPr>
+        <p:txBody>
+          <a:bodyPr wrap="square" anchor="ctr">
+            <a:spAutoFit/>
+          </a:bodyPr>
+          <a:lstStyle/>
+          <a:p>
+            <a:r>
+              <a:rPr sz="900" b="0" i="0">
+                <a:solidFill>
+                  <a:srgbClr val="66788A"/>
+                </a:solidFill>
+                <a:latin typeface="Malgun Gothic"/>
+                <a:ea typeface="Malgun Gothic"/>
+                <a:cs typeface="Malgun Gothic"/>
+              </a:rPr>
+              <a:t>M03-W03-L03  ·  Ribosome과 번역의 단계</a:t>
+            </a:r>
+            <a:r>
+              <a:rPr sz="900" b="1" i="0">
+                <a:solidFill>
+                  <a:srgbClr val="003C71"/>
+                </a:solidFill>
+                <a:latin typeface="Malgun Gothic"/>
+                <a:ea typeface="Malgun Gothic"/>
+                <a:cs typeface="Malgun Gothic"/>
+              </a:rPr>
+              <a:t>      21</a:t>
+            </a:r>
+          </a:p>
+        </p:txBody>
+      </p:sp>
+      <p:sp>
+        <p:nvSpPr>
+          <p:cNvPr id="7" name="TextBox 6"/>
+          <p:cNvSpPr txBox="1"/>
+          <p:nvPr/>
+        </p:nvSpPr>
+        <p:spPr>
+          <a:xfrm>
+            <a:off x="640080" y="1280160"/>
+            <a:ext cx="10881360" cy="5029200"/>
+          </a:xfrm>
+          <a:prstGeom prst="rect">
+            <a:avLst/>
+          </a:prstGeom>
+          <a:noFill/>
+        </p:spPr>
+        <p:txBody>
+          <a:bodyPr wrap="square" anchor="t">
+            <a:spAutoFit/>
+          </a:bodyPr>
+          <a:lstStyle/>
+          <a:p>
+            <a:pPr>
+              <a:spcAft>
+                <a:spcPts val="900"/>
+              </a:spcAft>
+            </a:pPr>
+            <a:r>
+              <a:rPr sz="2000" b="1" i="0">
+                <a:solidFill>
+                  <a:srgbClr val="F2B705"/>
+                </a:solidFill>
+                <a:latin typeface="Malgun Gothic"/>
+                <a:ea typeface="Malgun Gothic"/>
+                <a:cs typeface="Malgun Gothic"/>
+              </a:rPr>
+              <a:t>•  </a:t>
+            </a:r>
+            <a:r>
+              <a:rPr sz="2000" b="0" i="0">
+                <a:solidFill>
+                  <a:srgbClr val="11202B"/>
+                </a:solidFill>
+                <a:latin typeface="Malgun Gothic"/>
+                <a:ea typeface="Malgun Gothic"/>
+                <a:cs typeface="Malgun Gothic"/>
+              </a:rPr>
+              <a:t>따라서 아미노산 300개의 단백질 하나에 약 1,200개의 고에너지 결합이 들어간다. 단백질 합성이 세포의 에너지 소비에서 큰 몫을 차지하는 이유이고, 영양 결핍이나 허혈에서 번역이 먼저 억제되는 이유다.</a:t>
+            </a:r>
+          </a:p>
+        </p:txBody>
+      </p:sp>
+    </p:spTree>
+  </p:cSld>
+  <p:clrMapOvr>
+    <a:masterClrMapping/>
+  </p:clrMapOvr>
+</p:sld>
+</file>
+
 <file path=ppt/slides/slide22.xml><?xml version="1.0" encoding="utf-8"?>
 <p:sld xmlns:a="http://schemas.openxmlformats.org/drawingml/2006/main" xmlns:p="http://schemas.openxmlformats.org/presentationml/2006/main" xmlns:r="http://schemas.openxmlformats.org/officeDocument/2006/relationships">
   <p:cSld>
@@ -10279,7 +10306,7 @@
                 <a:ea typeface="Malgun Gothic"/>
                 <a:cs typeface="Malgun Gothic"/>
               </a:rPr>
-              <a:t>04   </a:t>
+              <a:t>05   </a:t>
             </a:r>
             <a:r>
               <a:rPr sz="2400" b="1" i="0">
@@ -10290,7 +10317,7 @@
                 <a:ea typeface="Malgun Gothic"/>
                 <a:cs typeface="Malgun Gothic"/>
               </a:rPr>
-              <a:t>4. 신장 주기</a:t>
+              <a:t>5. 종결과 ribosome의 재순환</a:t>
             </a:r>
           </a:p>
         </p:txBody>
@@ -10370,7 +10397,7 @@
               </a:spcAft>
             </a:pPr>
             <a:r>
-              <a:rPr sz="2000" b="1" i="0">
+              <a:rPr sz="1600" b="1" i="0">
                 <a:solidFill>
                   <a:srgbClr val="F2B705"/>
                 </a:solidFill>
@@ -10381,7 +10408,7 @@
               <a:t>•  </a:t>
             </a:r>
             <a:r>
-              <a:rPr sz="2000" b="0" i="0">
+              <a:rPr sz="1600" b="0" i="0">
                 <a:solidFill>
                   <a:srgbClr val="11202B"/>
                 </a:solidFill>
@@ -10389,7 +10416,222 @@
                 <a:ea typeface="Malgun Gothic"/>
                 <a:cs typeface="Malgun Gothic"/>
               </a:rPr>
-              <a:t>따라서 아미노산 300개의 단백질 하나에 약 1,200개의 고에너지 결합이 들어간다. 단백질 합성이 세포의 에너지 소비에서 큰 몫을 차지하는 이유이고, 영양 결핍이나 허혈에서 번역이 먼저 억제되는 이유다.</a:t>
+              <a:t>A 자리에 종결 코돈이 들어오면 그에 맞는 tRNA가 없으므로 대신 </a:t>
+            </a:r>
+            <a:r>
+              <a:rPr sz="1600" b="1" i="0">
+                <a:solidFill>
+                  <a:srgbClr val="11202B"/>
+                </a:solidFill>
+                <a:latin typeface="Malgun Gothic"/>
+                <a:ea typeface="Malgun Gothic"/>
+                <a:cs typeface="Malgun Gothic"/>
+              </a:rPr>
+              <a:t>release factor</a:t>
+            </a:r>
+            <a:r>
+              <a:rPr sz="1600" b="0" i="0">
+                <a:solidFill>
+                  <a:srgbClr val="11202B"/>
+                </a:solidFill>
+                <a:latin typeface="Malgun Gothic"/>
+                <a:ea typeface="Malgun Gothic"/>
+                <a:cs typeface="Malgun Gothic"/>
+              </a:rPr>
+              <a:t>가 결합한다.</a:t>
+            </a:r>
+          </a:p>
+          <a:p>
+            <a:pPr>
+              <a:spcAft>
+                <a:spcPts val="900"/>
+              </a:spcAft>
+            </a:pPr>
+            <a:r>
+              <a:rPr sz="1600" b="1" i="0">
+                <a:solidFill>
+                  <a:srgbClr val="F2B705"/>
+                </a:solidFill>
+                <a:latin typeface="Malgun Gothic"/>
+                <a:ea typeface="Malgun Gothic"/>
+                <a:cs typeface="Malgun Gothic"/>
+              </a:rPr>
+              <a:t>•  </a:t>
+            </a:r>
+            <a:r>
+              <a:rPr sz="1600" b="1" i="0">
+                <a:solidFill>
+                  <a:srgbClr val="11202B"/>
+                </a:solidFill>
+                <a:latin typeface="Malgun Gothic"/>
+                <a:ea typeface="Malgun Gothic"/>
+                <a:cs typeface="Malgun Gothic"/>
+              </a:rPr>
+              <a:t>원핵세포</a:t>
+            </a:r>
+            <a:r>
+              <a:rPr sz="1600" b="0" i="0">
+                <a:solidFill>
+                  <a:srgbClr val="11202B"/>
+                </a:solidFill>
+                <a:latin typeface="Malgun Gothic"/>
+                <a:ea typeface="Malgun Gothic"/>
+                <a:cs typeface="Malgun Gothic"/>
+              </a:rPr>
+              <a:t>: RF1은 UAA와 UAG를, RF2는 UAA와 UGA를 인식하고, RF3는 GTPase로서 방출을 돕는다.</a:t>
+            </a:r>
+          </a:p>
+          <a:p>
+            <a:pPr>
+              <a:spcAft>
+                <a:spcPts val="900"/>
+              </a:spcAft>
+            </a:pPr>
+            <a:r>
+              <a:rPr sz="1600" b="1" i="0">
+                <a:solidFill>
+                  <a:srgbClr val="F2B705"/>
+                </a:solidFill>
+                <a:latin typeface="Malgun Gothic"/>
+                <a:ea typeface="Malgun Gothic"/>
+                <a:cs typeface="Malgun Gothic"/>
+              </a:rPr>
+              <a:t>•  </a:t>
+            </a:r>
+            <a:r>
+              <a:rPr sz="1600" b="1" i="0">
+                <a:solidFill>
+                  <a:srgbClr val="11202B"/>
+                </a:solidFill>
+                <a:latin typeface="Malgun Gothic"/>
+                <a:ea typeface="Malgun Gothic"/>
+                <a:cs typeface="Malgun Gothic"/>
+              </a:rPr>
+              <a:t>진핵세포</a:t>
+            </a:r>
+            <a:r>
+              <a:rPr sz="1600" b="0" i="0">
+                <a:solidFill>
+                  <a:srgbClr val="11202B"/>
+                </a:solidFill>
+                <a:latin typeface="Malgun Gothic"/>
+                <a:ea typeface="Malgun Gothic"/>
+                <a:cs typeface="Malgun Gothic"/>
+              </a:rPr>
+              <a:t>: </a:t>
+            </a:r>
+            <a:r>
+              <a:rPr sz="1600" b="1" i="0">
+                <a:solidFill>
+                  <a:srgbClr val="11202B"/>
+                </a:solidFill>
+                <a:latin typeface="Malgun Gothic"/>
+                <a:ea typeface="Malgun Gothic"/>
+                <a:cs typeface="Malgun Gothic"/>
+              </a:rPr>
+              <a:t>eRF1</a:t>
+            </a:r>
+            <a:r>
+              <a:rPr sz="1600" b="0" i="0">
+                <a:solidFill>
+                  <a:srgbClr val="11202B"/>
+                </a:solidFill>
+                <a:latin typeface="Malgun Gothic"/>
+                <a:ea typeface="Malgun Gothic"/>
+                <a:cs typeface="Malgun Gothic"/>
+              </a:rPr>
+              <a:t> 하나가 세 종결 코돈을 모두 인식하고 eRF3가 GTPase로 작용한다.</a:t>
+            </a:r>
+          </a:p>
+          <a:p>
+            <a:pPr>
+              <a:spcAft>
+                <a:spcPts val="900"/>
+              </a:spcAft>
+            </a:pPr>
+            <a:r>
+              <a:rPr sz="1600" b="1" i="0">
+                <a:solidFill>
+                  <a:srgbClr val="F2B705"/>
+                </a:solidFill>
+                <a:latin typeface="Malgun Gothic"/>
+                <a:ea typeface="Malgun Gothic"/>
+                <a:cs typeface="Malgun Gothic"/>
+              </a:rPr>
+              <a:t>•  </a:t>
+            </a:r>
+            <a:r>
+              <a:rPr sz="1600" b="0" i="0">
+                <a:solidFill>
+                  <a:srgbClr val="11202B"/>
+                </a:solidFill>
+                <a:latin typeface="Malgun Gothic"/>
+                <a:ea typeface="Malgun Gothic"/>
+                <a:cs typeface="Malgun Gothic"/>
+              </a:rPr>
+              <a:t>Release factor는 A 자리에 들어가 peptidyl transferase 중심이 아미노산 대신 </a:t>
+            </a:r>
+            <a:r>
+              <a:rPr sz="1600" b="1" i="0">
+                <a:solidFill>
+                  <a:srgbClr val="11202B"/>
+                </a:solidFill>
+                <a:latin typeface="Malgun Gothic"/>
+                <a:ea typeface="Malgun Gothic"/>
+                <a:cs typeface="Malgun Gothic"/>
+              </a:rPr>
+              <a:t>물을 받아들이게</a:t>
+            </a:r>
+            <a:r>
+              <a:rPr sz="1600" b="0" i="0">
+                <a:solidFill>
+                  <a:srgbClr val="11202B"/>
+                </a:solidFill>
+                <a:latin typeface="Malgun Gothic"/>
+                <a:ea typeface="Malgun Gothic"/>
+                <a:cs typeface="Malgun Gothic"/>
+              </a:rPr>
+              <a:t> 만든다. 그 결과 peptidyl-tRNA의 에스터 결합이 가수분해되어 polypeptide가 방출된다.</a:t>
+            </a:r>
+          </a:p>
+          <a:p>
+            <a:pPr>
+              <a:spcAft>
+                <a:spcPts val="900"/>
+              </a:spcAft>
+            </a:pPr>
+            <a:r>
+              <a:rPr sz="1600" b="1" i="0">
+                <a:solidFill>
+                  <a:srgbClr val="F2B705"/>
+                </a:solidFill>
+                <a:latin typeface="Malgun Gothic"/>
+                <a:ea typeface="Malgun Gothic"/>
+                <a:cs typeface="Malgun Gothic"/>
+              </a:rPr>
+              <a:t>•  </a:t>
+            </a:r>
+            <a:r>
+              <a:rPr sz="1600" b="0" i="0">
+                <a:solidFill>
+                  <a:srgbClr val="11202B"/>
+                </a:solidFill>
+                <a:latin typeface="Malgun Gothic"/>
+                <a:ea typeface="Malgun Gothic"/>
+                <a:cs typeface="Malgun Gothic"/>
+              </a:rPr>
+              <a:t>이어서 소단위가 분리되고 mRNA와 tRNA가 떨어져 나간다. 원핵세포는 ribosome recycling factor와 EF-G가, 진핵세포는 ABCE1이 이 과정을 수행한다. </a:t>
+            </a:r>
+            <a:r>
+              <a:rPr sz="1600" b="1" i="0">
+                <a:solidFill>
+                  <a:srgbClr val="11202B"/>
+                </a:solidFill>
+                <a:latin typeface="Malgun Gothic"/>
+                <a:ea typeface="Malgun Gothic"/>
+                <a:cs typeface="Malgun Gothic"/>
+              </a:rPr>
+              <a:t>구성 요소가 모두 재사용되므로 ribosome의 수는 번역량에 비해 적어도 된다.</a:t>
             </a:r>
           </a:p>
         </p:txBody>
@@ -10638,16 +10880,40 @@
           </a:p>
         </p:txBody>
       </p:sp>
-      <p:sp>
-        <p:nvSpPr>
-          <p:cNvPr id="7" name="TextBox 6"/>
+      <p:pic>
+        <p:nvPicPr>
+          <p:cNvPr id="7" name="Picture 6" descr="fig-termination.slide.png"/>
+          <p:cNvPicPr>
+            <a:picLocks noChangeAspect="1"/>
+          </p:cNvPicPr>
+          <p:nvPr/>
+        </p:nvPicPr>
+        <p:blipFill>
+          <a:blip r:embed="rId2"/>
+          <a:stretch>
+            <a:fillRect/>
+          </a:stretch>
+        </p:blipFill>
+        <p:spPr>
+          <a:xfrm>
+            <a:off x="1180477" y="1325880"/>
+            <a:ext cx="9830740" cy="4343400"/>
+          </a:xfrm>
+          <a:prstGeom prst="rect">
+            <a:avLst/>
+          </a:prstGeom>
+        </p:spPr>
+      </p:pic>
+      <p:sp>
+        <p:nvSpPr>
+          <p:cNvPr id="8" name="TextBox 7"/>
           <p:cNvSpPr txBox="1"/>
           <p:nvPr/>
         </p:nvSpPr>
         <p:spPr>
           <a:xfrm>
-            <a:off x="640080" y="1280160"/>
-            <a:ext cx="10881360" cy="5029200"/>
+            <a:off x="640080" y="5806440"/>
+            <a:ext cx="10881360" cy="548640"/>
           </a:xfrm>
           <a:prstGeom prst="rect">
             <a:avLst/>
@@ -10660,247 +10926,17 @@
           </a:bodyPr>
           <a:lstStyle/>
           <a:p>
-            <a:pPr>
-              <a:spcAft>
-                <a:spcPts val="900"/>
-              </a:spcAft>
-            </a:pPr>
-            <a:r>
-              <a:rPr sz="1600" b="1" i="0">
-                <a:solidFill>
-                  <a:srgbClr val="F2B705"/>
-                </a:solidFill>
-                <a:latin typeface="Malgun Gothic"/>
-                <a:ea typeface="Malgun Gothic"/>
-                <a:cs typeface="Malgun Gothic"/>
-              </a:rPr>
-              <a:t>•  </a:t>
-            </a:r>
-            <a:r>
-              <a:rPr sz="1600" b="0" i="0">
-                <a:solidFill>
-                  <a:srgbClr val="11202B"/>
-                </a:solidFill>
-                <a:latin typeface="Malgun Gothic"/>
-                <a:ea typeface="Malgun Gothic"/>
-                <a:cs typeface="Malgun Gothic"/>
-              </a:rPr>
-              <a:t>A 자리에 종결 코돈이 들어오면 그에 맞는 tRNA가 없으므로 대신 </a:t>
-            </a:r>
-            <a:r>
-              <a:rPr sz="1600" b="1" i="0">
-                <a:solidFill>
-                  <a:srgbClr val="11202B"/>
-                </a:solidFill>
-                <a:latin typeface="Malgun Gothic"/>
-                <a:ea typeface="Malgun Gothic"/>
-                <a:cs typeface="Malgun Gothic"/>
-              </a:rPr>
-              <a:t>release factor</a:t>
-            </a:r>
-            <a:r>
-              <a:rPr sz="1600" b="0" i="0">
-                <a:solidFill>
-                  <a:srgbClr val="11202B"/>
-                </a:solidFill>
-                <a:latin typeface="Malgun Gothic"/>
-                <a:ea typeface="Malgun Gothic"/>
-                <a:cs typeface="Malgun Gothic"/>
-              </a:rPr>
-              <a:t>가 결합한다.</a:t>
-            </a:r>
-          </a:p>
-          <a:p>
-            <a:pPr>
-              <a:spcAft>
-                <a:spcPts val="900"/>
-              </a:spcAft>
-            </a:pPr>
-            <a:r>
-              <a:rPr sz="1600" b="1" i="0">
-                <a:solidFill>
-                  <a:srgbClr val="F2B705"/>
-                </a:solidFill>
-                <a:latin typeface="Malgun Gothic"/>
-                <a:ea typeface="Malgun Gothic"/>
-                <a:cs typeface="Malgun Gothic"/>
-              </a:rPr>
-              <a:t>•  </a:t>
-            </a:r>
-            <a:r>
-              <a:rPr sz="1600" b="1" i="0">
-                <a:solidFill>
-                  <a:srgbClr val="11202B"/>
-                </a:solidFill>
-                <a:latin typeface="Malgun Gothic"/>
-                <a:ea typeface="Malgun Gothic"/>
-                <a:cs typeface="Malgun Gothic"/>
-              </a:rPr>
-              <a:t>원핵세포</a:t>
-            </a:r>
-            <a:r>
-              <a:rPr sz="1600" b="0" i="0">
-                <a:solidFill>
-                  <a:srgbClr val="11202B"/>
-                </a:solidFill>
-                <a:latin typeface="Malgun Gothic"/>
-                <a:ea typeface="Malgun Gothic"/>
-                <a:cs typeface="Malgun Gothic"/>
-              </a:rPr>
-              <a:t>: RF1은 UAA와 UAG를, RF2는 UAA와 UGA를 인식하고, RF3는 GTPase로서 방출을 돕는다.</a:t>
-            </a:r>
-          </a:p>
-          <a:p>
-            <a:pPr>
-              <a:spcAft>
-                <a:spcPts val="900"/>
-              </a:spcAft>
-            </a:pPr>
-            <a:r>
-              <a:rPr sz="1600" b="1" i="0">
-                <a:solidFill>
-                  <a:srgbClr val="F2B705"/>
-                </a:solidFill>
-                <a:latin typeface="Malgun Gothic"/>
-                <a:ea typeface="Malgun Gothic"/>
-                <a:cs typeface="Malgun Gothic"/>
-              </a:rPr>
-              <a:t>•  </a:t>
-            </a:r>
-            <a:r>
-              <a:rPr sz="1600" b="1" i="0">
-                <a:solidFill>
-                  <a:srgbClr val="11202B"/>
-                </a:solidFill>
-                <a:latin typeface="Malgun Gothic"/>
-                <a:ea typeface="Malgun Gothic"/>
-                <a:cs typeface="Malgun Gothic"/>
-              </a:rPr>
-              <a:t>진핵세포</a:t>
-            </a:r>
-            <a:r>
-              <a:rPr sz="1600" b="0" i="0">
-                <a:solidFill>
-                  <a:srgbClr val="11202B"/>
-                </a:solidFill>
-                <a:latin typeface="Malgun Gothic"/>
-                <a:ea typeface="Malgun Gothic"/>
-                <a:cs typeface="Malgun Gothic"/>
-              </a:rPr>
-              <a:t>: </a:t>
-            </a:r>
-            <a:r>
-              <a:rPr sz="1600" b="1" i="0">
-                <a:solidFill>
-                  <a:srgbClr val="11202B"/>
-                </a:solidFill>
-                <a:latin typeface="Malgun Gothic"/>
-                <a:ea typeface="Malgun Gothic"/>
-                <a:cs typeface="Malgun Gothic"/>
-              </a:rPr>
-              <a:t>eRF1</a:t>
-            </a:r>
-            <a:r>
-              <a:rPr sz="1600" b="0" i="0">
-                <a:solidFill>
-                  <a:srgbClr val="11202B"/>
-                </a:solidFill>
-                <a:latin typeface="Malgun Gothic"/>
-                <a:ea typeface="Malgun Gothic"/>
-                <a:cs typeface="Malgun Gothic"/>
-              </a:rPr>
-              <a:t> 하나가 세 종결 코돈을 모두 인식하고 eRF3가 GTPase로 작용한다.</a:t>
-            </a:r>
-          </a:p>
-          <a:p>
-            <a:pPr>
-              <a:spcAft>
-                <a:spcPts val="900"/>
-              </a:spcAft>
-            </a:pPr>
-            <a:r>
-              <a:rPr sz="1600" b="1" i="0">
-                <a:solidFill>
-                  <a:srgbClr val="F2B705"/>
-                </a:solidFill>
-                <a:latin typeface="Malgun Gothic"/>
-                <a:ea typeface="Malgun Gothic"/>
-                <a:cs typeface="Malgun Gothic"/>
-              </a:rPr>
-              <a:t>•  </a:t>
-            </a:r>
-            <a:r>
-              <a:rPr sz="1600" b="0" i="0">
-                <a:solidFill>
-                  <a:srgbClr val="11202B"/>
-                </a:solidFill>
-                <a:latin typeface="Malgun Gothic"/>
-                <a:ea typeface="Malgun Gothic"/>
-                <a:cs typeface="Malgun Gothic"/>
-              </a:rPr>
-              <a:t>Release factor는 A 자리에 들어가 peptidyl transferase 중심이 아미노산 대신 </a:t>
-            </a:r>
-            <a:r>
-              <a:rPr sz="1600" b="1" i="0">
-                <a:solidFill>
-                  <a:srgbClr val="11202B"/>
-                </a:solidFill>
-                <a:latin typeface="Malgun Gothic"/>
-                <a:ea typeface="Malgun Gothic"/>
-                <a:cs typeface="Malgun Gothic"/>
-              </a:rPr>
-              <a:t>물을 받아들이게</a:t>
-            </a:r>
-            <a:r>
-              <a:rPr sz="1600" b="0" i="0">
-                <a:solidFill>
-                  <a:srgbClr val="11202B"/>
-                </a:solidFill>
-                <a:latin typeface="Malgun Gothic"/>
-                <a:ea typeface="Malgun Gothic"/>
-                <a:cs typeface="Malgun Gothic"/>
-              </a:rPr>
-              <a:t> 만든다. 그 결과 peptidyl-tRNA의 에스터 결합이 가수분해되어 polypeptide가 방출된다.</a:t>
-            </a:r>
-          </a:p>
-          <a:p>
-            <a:pPr>
-              <a:spcAft>
-                <a:spcPts val="900"/>
-              </a:spcAft>
-            </a:pPr>
-            <a:r>
-              <a:rPr sz="1600" b="1" i="0">
-                <a:solidFill>
-                  <a:srgbClr val="F2B705"/>
-                </a:solidFill>
-                <a:latin typeface="Malgun Gothic"/>
-                <a:ea typeface="Malgun Gothic"/>
-                <a:cs typeface="Malgun Gothic"/>
-              </a:rPr>
-              <a:t>•  </a:t>
-            </a:r>
-            <a:r>
-              <a:rPr sz="1600" b="0" i="0">
-                <a:solidFill>
-                  <a:srgbClr val="11202B"/>
-                </a:solidFill>
-                <a:latin typeface="Malgun Gothic"/>
-                <a:ea typeface="Malgun Gothic"/>
-                <a:cs typeface="Malgun Gothic"/>
-              </a:rPr>
-              <a:t>이어서 소단위가 분리되고 mRNA와 tRNA가 떨어져 나간다. 원핵세포는 ribosome recycling factor와 EF-G가, 진핵세포는 ABCE1이 이 과정을 수행한다. </a:t>
-            </a:r>
-            <a:r>
-              <a:rPr sz="1600" b="1" i="0">
-                <a:solidFill>
-                  <a:srgbClr val="11202B"/>
-                </a:solidFill>
-                <a:latin typeface="Malgun Gothic"/>
-                <a:ea typeface="Malgun Gothic"/>
-                <a:cs typeface="Malgun Gothic"/>
-              </a:rPr>
-              <a:t>구성 요소가 모두 재사용되므로 ribosome의 수는 번역량에 비해 적어도 된다.</a:t>
+            <a:pPr algn="ctr"/>
+            <a:r>
+              <a:rPr sz="1200" b="0" i="0">
+                <a:solidFill>
+                  <a:srgbClr val="66788A"/>
+                </a:solidFill>
+                <a:latin typeface="Malgun Gothic"/>
+                <a:ea typeface="Malgun Gothic"/>
+                <a:cs typeface="Malgun Gothic"/>
+              </a:rPr>
+              <a:t>종결과 재순환, 그리고 polysome. Release factor가 A 자리에 들어가 가수분해를 유도하고, 분리된 소단위와 mRNA가 재사용되며, 하나의 mRNA에 여러 ribosome이 동시에 올라탄다.</a:t>
             </a:r>
           </a:p>
         </p:txBody>
@@ -11149,40 +11185,16 @@
           </a:p>
         </p:txBody>
       </p:sp>
-      <p:pic>
-        <p:nvPicPr>
-          <p:cNvPr id="7" name="Picture 6" descr="fig-termination.slide.png"/>
-          <p:cNvPicPr>
-            <a:picLocks noChangeAspect="1"/>
-          </p:cNvPicPr>
-          <p:nvPr/>
-        </p:nvPicPr>
-        <p:blipFill>
-          <a:blip r:embed="rId2"/>
-          <a:stretch>
-            <a:fillRect/>
-          </a:stretch>
-        </p:blipFill>
-        <p:spPr>
-          <a:xfrm>
-            <a:off x="1180477" y="1325880"/>
-            <a:ext cx="9830740" cy="4343400"/>
-          </a:xfrm>
-          <a:prstGeom prst="rect">
-            <a:avLst/>
-          </a:prstGeom>
-        </p:spPr>
-      </p:pic>
-      <p:sp>
-        <p:nvSpPr>
-          <p:cNvPr id="8" name="TextBox 7"/>
+      <p:sp>
+        <p:nvSpPr>
+          <p:cNvPr id="7" name="TextBox 6"/>
           <p:cNvSpPr txBox="1"/>
           <p:nvPr/>
         </p:nvSpPr>
         <p:spPr>
           <a:xfrm>
-            <a:off x="640080" y="5806440"/>
-            <a:ext cx="10881360" cy="548640"/>
+            <a:off x="640080" y="1280160"/>
+            <a:ext cx="10881360" cy="5029200"/>
           </a:xfrm>
           <a:prstGeom prst="rect">
             <a:avLst/>
@@ -11195,17 +11207,76 @@
           </a:bodyPr>
           <a:lstStyle/>
           <a:p>
-            <a:pPr algn="ctr"/>
-            <a:r>
-              <a:rPr sz="1200" b="0" i="0">
-                <a:solidFill>
-                  <a:srgbClr val="66788A"/>
-                </a:solidFill>
-                <a:latin typeface="Malgun Gothic"/>
-                <a:ea typeface="Malgun Gothic"/>
-                <a:cs typeface="Malgun Gothic"/>
-              </a:rPr>
-              <a:t>종결과 재순환, 그리고 polysome. Release factor가 A 자리에 들어가 가수분해를 유도하고, 분리된 소단위와 mRNA가 재사용되며, 하나의 mRNA에 여러 ribosome이 동시에 올라탄다.</a:t>
+            <a:pPr>
+              <a:spcAft>
+                <a:spcPts val="900"/>
+              </a:spcAft>
+            </a:pPr>
+            <a:r>
+              <a:rPr sz="1800" b="1" i="0">
+                <a:solidFill>
+                  <a:srgbClr val="F2B705"/>
+                </a:solidFill>
+                <a:latin typeface="Malgun Gothic"/>
+                <a:ea typeface="Malgun Gothic"/>
+                <a:cs typeface="Malgun Gothic"/>
+              </a:rPr>
+              <a:t>•  </a:t>
+            </a:r>
+            <a:r>
+              <a:rPr sz="1800" b="0" i="0">
+                <a:solidFill>
+                  <a:srgbClr val="11202B"/>
+                </a:solidFill>
+                <a:latin typeface="Malgun Gothic"/>
+                <a:ea typeface="Malgun Gothic"/>
+                <a:cs typeface="Malgun Gothic"/>
+              </a:rPr>
+              <a:t>하나의 mRNA에는 여러 ribosome이 동시에 올라탄다. 이 상태를 </a:t>
+            </a:r>
+            <a:r>
+              <a:rPr sz="1800" b="1" i="0">
+                <a:solidFill>
+                  <a:srgbClr val="11202B"/>
+                </a:solidFill>
+                <a:latin typeface="Malgun Gothic"/>
+                <a:ea typeface="Malgun Gothic"/>
+                <a:cs typeface="Malgun Gothic"/>
+              </a:rPr>
+              <a:t>polysome(polyribosome)</a:t>
+            </a:r>
+            <a:r>
+              <a:rPr sz="1800" b="0" i="0">
+                <a:solidFill>
+                  <a:srgbClr val="11202B"/>
+                </a:solidFill>
+                <a:latin typeface="Malgun Gothic"/>
+                <a:ea typeface="Malgun Gothic"/>
+                <a:cs typeface="Malgun Gothic"/>
+              </a:rPr>
+              <a:t>이라 하고, ribosome 사이 간격은 약 80 뉴클레오타이드다. Polysome 덕분에 mRNA 한 분자에서 짧은 시간에 여러 개의 단백질이 만들어진다. 원핵세포에서는 전사와 번역이 </a:t>
+            </a:r>
+            <a:r>
+              <a:rPr sz="1800" b="1" i="0">
+                <a:solidFill>
+                  <a:srgbClr val="11202B"/>
+                </a:solidFill>
+                <a:latin typeface="Malgun Gothic"/>
+                <a:ea typeface="Malgun Gothic"/>
+                <a:cs typeface="Malgun Gothic"/>
+              </a:rPr>
+              <a:t>결합(coupled)</a:t>
+            </a:r>
+            <a:r>
+              <a:rPr sz="1800" b="0" i="0">
+                <a:solidFill>
+                  <a:srgbClr val="11202B"/>
+                </a:solidFill>
+                <a:latin typeface="Malgun Gothic"/>
+                <a:ea typeface="Malgun Gothic"/>
+                <a:cs typeface="Malgun Gothic"/>
+              </a:rPr>
+              <a:t>되어 있어 전사가 끝나기 전에 ribosome이 올라타지만, 진핵세포는 전사와 번역이 핵과 세포질로 분리되어 있어 그럴 수 없다.</a:t>
             </a:r>
           </a:p>
         </p:txBody>
@@ -11391,7 +11462,7 @@
                 <a:ea typeface="Malgun Gothic"/>
                 <a:cs typeface="Malgun Gothic"/>
               </a:rPr>
-              <a:t>05   </a:t>
+              <a:t>06   </a:t>
             </a:r>
             <a:r>
               <a:rPr sz="2400" b="1" i="0">
@@ -11402,7 +11473,7 @@
                 <a:ea typeface="Malgun Gothic"/>
                 <a:cs typeface="Malgun Gothic"/>
               </a:rPr>
-              <a:t>5. 종결과 ribosome의 재순환</a:t>
+              <a:t>6. 번역 속도와 번역 중 일어나는 사건</a:t>
             </a:r>
           </a:p>
         </p:txBody>
@@ -11482,7 +11553,7 @@
               </a:spcAft>
             </a:pPr>
             <a:r>
-              <a:rPr sz="1800" b="1" i="0">
+              <a:rPr sz="1600" b="1" i="0">
                 <a:solidFill>
                   <a:srgbClr val="F2B705"/>
                 </a:solidFill>
@@ -11493,7 +11564,7 @@
               <a:t>•  </a:t>
             </a:r>
             <a:r>
-              <a:rPr sz="1800" b="0" i="0">
+              <a:rPr sz="1600" b="0" i="0">
                 <a:solidFill>
                   <a:srgbClr val="11202B"/>
                 </a:solidFill>
@@ -11501,10 +11572,10 @@
                 <a:ea typeface="Malgun Gothic"/>
                 <a:cs typeface="Malgun Gothic"/>
               </a:rPr>
-              <a:t>하나의 mRNA에는 여러 ribosome이 동시에 올라탄다. 이 상태를 </a:t>
-            </a:r>
-            <a:r>
-              <a:rPr sz="1800" b="1" i="0">
+              <a:t>번역 속도는 원핵세포에서 초당 약 15~20 아미노산, 진핵세포에서 초당 약 2~6 아미노산이다. 이 속도와 출구 터널의 길이가 맞물려 </a:t>
+            </a:r>
+            <a:r>
+              <a:rPr sz="1600" b="1" i="0">
                 <a:solidFill>
                   <a:srgbClr val="11202B"/>
                 </a:solidFill>
@@ -11512,10 +11583,10 @@
                 <a:ea typeface="Malgun Gothic"/>
                 <a:cs typeface="Malgun Gothic"/>
               </a:rPr>
-              <a:t>polysome(polyribosome)</a:t>
-            </a:r>
-            <a:r>
-              <a:rPr sz="1800" b="0" i="0">
+              <a:t>번역이 끝나기 전에 시작되는 사건들</a:t>
+            </a:r>
+            <a:r>
+              <a:rPr sz="1600" b="0" i="0">
                 <a:solidFill>
                   <a:srgbClr val="11202B"/>
                 </a:solidFill>
@@ -11523,10 +11594,28 @@
                 <a:ea typeface="Malgun Gothic"/>
                 <a:cs typeface="Malgun Gothic"/>
               </a:rPr>
-              <a:t>이라 하고, ribosome 사이 간격은 약 80 뉴클레오타이드다. Polysome 덕분에 mRNA 한 분자에서 짧은 시간에 여러 개의 단백질이 만들어진다. 원핵세포에서는 전사와 번역이 </a:t>
-            </a:r>
-            <a:r>
-              <a:rPr sz="1800" b="1" i="0">
+              <a:t>이 생긴다.</a:t>
+            </a:r>
+          </a:p>
+          <a:p>
+            <a:pPr>
+              <a:spcAft>
+                <a:spcPts val="900"/>
+              </a:spcAft>
+            </a:pPr>
+            <a:r>
+              <a:rPr sz="1600" b="1" i="0">
+                <a:solidFill>
+                  <a:srgbClr val="F2B705"/>
+                </a:solidFill>
+                <a:latin typeface="Malgun Gothic"/>
+                <a:ea typeface="Malgun Gothic"/>
+                <a:cs typeface="Malgun Gothic"/>
+              </a:rPr>
+              <a:t>•  </a:t>
+            </a:r>
+            <a:r>
+              <a:rPr sz="1600" b="1" i="0">
                 <a:solidFill>
                   <a:srgbClr val="11202B"/>
                 </a:solidFill>
@@ -11534,10 +11623,10 @@
                 <a:ea typeface="Malgun Gothic"/>
                 <a:cs typeface="Malgun Gothic"/>
               </a:rPr>
-              <a:t>결합(coupled)</a:t>
-            </a:r>
-            <a:r>
-              <a:rPr sz="1800" b="0" i="0">
+              <a:t>공동번역 접힘</a:t>
+            </a:r>
+            <a:r>
+              <a:rPr sz="1600" b="0" i="0">
                 <a:solidFill>
                   <a:srgbClr val="11202B"/>
                 </a:solidFill>
@@ -11545,7 +11634,200 @@
                 <a:ea typeface="Malgun Gothic"/>
                 <a:cs typeface="Malgun Gothic"/>
               </a:rPr>
-              <a:t>되어 있어 전사가 끝나기 전에 ribosome이 올라타지만, 진핵세포는 전사와 번역이 핵과 세포질로 분리되어 있어 그럴 수 없다.</a:t>
+              <a:t>: N 말단 부분이 터널을 나오면서 바로 접히기 시작하고, chaperone이 여기에 붙어 잘못된 접힘을 막는다.</a:t>
+            </a:r>
+          </a:p>
+          <a:p>
+            <a:pPr>
+              <a:spcAft>
+                <a:spcPts val="900"/>
+              </a:spcAft>
+            </a:pPr>
+            <a:r>
+              <a:rPr sz="1600" b="1" i="0">
+                <a:solidFill>
+                  <a:srgbClr val="F2B705"/>
+                </a:solidFill>
+                <a:latin typeface="Malgun Gothic"/>
+                <a:ea typeface="Malgun Gothic"/>
+                <a:cs typeface="Malgun Gothic"/>
+              </a:rPr>
+              <a:t>•  </a:t>
+            </a:r>
+            <a:r>
+              <a:rPr sz="1600" b="1" i="0">
+                <a:solidFill>
+                  <a:srgbClr val="11202B"/>
+                </a:solidFill>
+                <a:latin typeface="Malgun Gothic"/>
+                <a:ea typeface="Malgun Gothic"/>
+                <a:cs typeface="Malgun Gothic"/>
+              </a:rPr>
+              <a:t>ER로의 표적화</a:t>
+            </a:r>
+            <a:r>
+              <a:rPr sz="1600" b="0" i="0">
+                <a:solidFill>
+                  <a:srgbClr val="11202B"/>
+                </a:solidFill>
+                <a:latin typeface="Malgun Gothic"/>
+                <a:ea typeface="Malgun Gothic"/>
+                <a:cs typeface="Malgun Gothic"/>
+              </a:rPr>
+              <a:t>: 분비 단백질과 막 단백질의 N 말단 signal sequence가 터널을 나오면 </a:t>
+            </a:r>
+            <a:r>
+              <a:rPr sz="1600" b="1" i="0">
+                <a:solidFill>
+                  <a:srgbClr val="11202B"/>
+                </a:solidFill>
+                <a:latin typeface="Malgun Gothic"/>
+                <a:ea typeface="Malgun Gothic"/>
+                <a:cs typeface="Malgun Gothic"/>
+              </a:rPr>
+              <a:t>signal recognition particle</a:t>
+            </a:r>
+            <a:r>
+              <a:rPr sz="1600" b="0" i="0">
+                <a:solidFill>
+                  <a:srgbClr val="11202B"/>
+                </a:solidFill>
+                <a:latin typeface="Malgun Gothic"/>
+                <a:ea typeface="Malgun Gothic"/>
+                <a:cs typeface="Malgun Gothic"/>
+              </a:rPr>
+              <a:t>이 결합해 번역을 잠시 멈추고 ribosome 전체를 rough ER 막으로 데려간다.</a:t>
+            </a:r>
+          </a:p>
+          <a:p>
+            <a:pPr>
+              <a:spcAft>
+                <a:spcPts val="900"/>
+              </a:spcAft>
+            </a:pPr>
+            <a:r>
+              <a:rPr sz="1600" b="1" i="0">
+                <a:solidFill>
+                  <a:srgbClr val="F2B705"/>
+                </a:solidFill>
+                <a:latin typeface="Malgun Gothic"/>
+                <a:ea typeface="Malgun Gothic"/>
+                <a:cs typeface="Malgun Gothic"/>
+              </a:rPr>
+              <a:t>•  </a:t>
+            </a:r>
+            <a:r>
+              <a:rPr sz="1600" b="1" i="0">
+                <a:solidFill>
+                  <a:srgbClr val="11202B"/>
+                </a:solidFill>
+                <a:latin typeface="Malgun Gothic"/>
+                <a:ea typeface="Malgun Gothic"/>
+                <a:cs typeface="Malgun Gothic"/>
+              </a:rPr>
+              <a:t>공동번역 수정</a:t>
+            </a:r>
+            <a:r>
+              <a:rPr sz="1600" b="0" i="0">
+                <a:solidFill>
+                  <a:srgbClr val="11202B"/>
+                </a:solidFill>
+                <a:latin typeface="Malgun Gothic"/>
+                <a:ea typeface="Malgun Gothic"/>
+                <a:cs typeface="Malgun Gothic"/>
+              </a:rPr>
+              <a:t>: N 말단의 formylmethionine이나 methionine 제거, N 말단 acetylation이 번역 중에 일어난다.</a:t>
+            </a:r>
+          </a:p>
+          <a:p>
+            <a:pPr>
+              <a:spcAft>
+                <a:spcPts val="900"/>
+              </a:spcAft>
+            </a:pPr>
+            <a:r>
+              <a:rPr sz="1600" b="1" i="0">
+                <a:solidFill>
+                  <a:srgbClr val="F2B705"/>
+                </a:solidFill>
+                <a:latin typeface="Malgun Gothic"/>
+                <a:ea typeface="Malgun Gothic"/>
+                <a:cs typeface="Malgun Gothic"/>
+              </a:rPr>
+              <a:t>•  </a:t>
+            </a:r>
+            <a:r>
+              <a:rPr sz="1600" b="1" i="0">
+                <a:solidFill>
+                  <a:srgbClr val="11202B"/>
+                </a:solidFill>
+                <a:latin typeface="Malgun Gothic"/>
+                <a:ea typeface="Malgun Gothic"/>
+                <a:cs typeface="Malgun Gothic"/>
+              </a:rPr>
+              <a:t>품질 관리</a:t>
+            </a:r>
+            <a:r>
+              <a:rPr sz="1600" b="0" i="0">
+                <a:solidFill>
+                  <a:srgbClr val="11202B"/>
+                </a:solidFill>
+                <a:latin typeface="Malgun Gothic"/>
+                <a:ea typeface="Malgun Gothic"/>
+                <a:cs typeface="Malgun Gothic"/>
+              </a:rPr>
+              <a:t>: 번역이 비정상적으로 멈춘 ribosome은 ribosome-associated quality control에 의해 해체되고 미완성 사슬은 분해로 보내진다.</a:t>
+            </a:r>
+          </a:p>
+          <a:p>
+            <a:pPr>
+              <a:spcAft>
+                <a:spcPts val="900"/>
+              </a:spcAft>
+            </a:pPr>
+            <a:r>
+              <a:rPr sz="1600" b="1" i="0">
+                <a:solidFill>
+                  <a:srgbClr val="F2B705"/>
+                </a:solidFill>
+                <a:latin typeface="Malgun Gothic"/>
+                <a:ea typeface="Malgun Gothic"/>
+                <a:cs typeface="Malgun Gothic"/>
+              </a:rPr>
+              <a:t>•  </a:t>
+            </a:r>
+            <a:r>
+              <a:rPr sz="1600" b="0" i="0">
+                <a:solidFill>
+                  <a:srgbClr val="11202B"/>
+                </a:solidFill>
+                <a:latin typeface="Malgun Gothic"/>
+                <a:ea typeface="Malgun Gothic"/>
+                <a:cs typeface="Malgun Gothic"/>
+              </a:rPr>
+              <a:t>이 사건들은 다음 수업(번역 후 수정과 단백질 접힘)의 주제이므로 여기서는 </a:t>
+            </a:r>
+            <a:r>
+              <a:rPr sz="1600" b="1" i="0">
+                <a:solidFill>
+                  <a:srgbClr val="11202B"/>
+                </a:solidFill>
+                <a:latin typeface="Malgun Gothic"/>
+                <a:ea typeface="Malgun Gothic"/>
+                <a:cs typeface="Malgun Gothic"/>
+              </a:rPr>
+              <a:t>번역과 분리된 별개의 과정이 아니라 번역과 겹쳐 일어나는 과정</a:t>
+            </a:r>
+            <a:r>
+              <a:rPr sz="1600" b="0" i="0">
+                <a:solidFill>
+                  <a:srgbClr val="11202B"/>
+                </a:solidFill>
+                <a:latin typeface="Malgun Gothic"/>
+                <a:ea typeface="Malgun Gothic"/>
+                <a:cs typeface="Malgun Gothic"/>
+              </a:rPr>
+              <a:t>이라는 점만 확인한다.</a:t>
             </a:r>
           </a:p>
         </p:txBody>
@@ -11796,41 +12078,66 @@
       </p:sp>
       <p:sp>
         <p:nvSpPr>
-          <p:cNvPr id="7" name="TextBox 6"/>
-          <p:cNvSpPr txBox="1"/>
-          <p:nvPr/>
-        </p:nvSpPr>
-        <p:spPr>
-          <a:xfrm>
-            <a:off x="640080" y="1280160"/>
-            <a:ext cx="10881360" cy="5029200"/>
-          </a:xfrm>
-          <a:prstGeom prst="rect">
-            <a:avLst/>
-          </a:prstGeom>
-          <a:noFill/>
-        </p:spPr>
-        <p:txBody>
-          <a:bodyPr wrap="square" anchor="t">
-            <a:spAutoFit/>
-          </a:bodyPr>
-          <a:lstStyle/>
-          <a:p>
-            <a:pPr>
-              <a:spcAft>
-                <a:spcPts val="900"/>
-              </a:spcAft>
-            </a:pPr>
+          <p:cNvPr id="7" name="Rectangle 6"/>
+          <p:cNvSpPr/>
+          <p:nvPr/>
+        </p:nvSpPr>
+        <p:spPr>
+          <a:xfrm>
+            <a:off x="640080" y="1325880"/>
+            <a:ext cx="10881360" cy="1976120"/>
+          </a:xfrm>
+          <a:prstGeom prst="rect">
+            <a:avLst/>
+          </a:prstGeom>
+          <a:solidFill>
+            <a:srgbClr val="E8F1FA"/>
+          </a:solidFill>
+          <a:ln>
+            <a:noFill/>
+          </a:ln>
+          <a:effectLst/>
+        </p:spPr>
+        <p:style>
+          <a:lnRef idx="1">
+            <a:schemeClr val="accent1"/>
+          </a:lnRef>
+          <a:fillRef idx="3">
+            <a:schemeClr val="accent1"/>
+          </a:fillRef>
+          <a:effectRef idx="2">
+            <a:schemeClr val="accent1"/>
+          </a:effectRef>
+          <a:fontRef idx="minor">
+            <a:schemeClr val="lt1"/>
+          </a:fontRef>
+        </p:style>
+        <p:txBody>
+          <a:bodyPr rtlCol="0" anchor="ctr" wrap="square" lIns="228600" rIns="228600"/>
+          <a:lstStyle/>
+          <a:p>
+            <a:pPr algn="l"/>
+            <a:r>
+              <a:rPr sz="1200" b="1" i="0">
+                <a:solidFill>
+                  <a:srgbClr val="003C71"/>
+                </a:solidFill>
+                <a:latin typeface="Malgun Gothic"/>
+                <a:ea typeface="Malgun Gothic"/>
+                <a:cs typeface="Malgun Gothic"/>
+              </a:rPr>
+              <a:t>임상 연계   </a:t>
+            </a:r>
             <a:r>
               <a:rPr sz="1600" b="1" i="0">
                 <a:solidFill>
-                  <a:srgbClr val="F2B705"/>
-                </a:solidFill>
-                <a:latin typeface="Malgun Gothic"/>
-                <a:ea typeface="Malgun Gothic"/>
-                <a:cs typeface="Malgun Gothic"/>
-              </a:rPr>
-              <a:t>•  </a:t>
+                  <a:srgbClr val="11202B"/>
+                </a:solidFill>
+                <a:latin typeface="Malgun Gothic"/>
+                <a:ea typeface="Malgun Gothic"/>
+                <a:cs typeface="Malgun Gothic"/>
+              </a:rPr>
+              <a:t>임상 연계</a:t>
             </a:r>
             <a:r>
               <a:rPr sz="1600" b="0" i="0">
@@ -11841,7 +12148,7 @@
                 <a:ea typeface="Malgun Gothic"/>
                 <a:cs typeface="Malgun Gothic"/>
               </a:rPr>
-              <a:t>번역 속도는 원핵세포에서 초당 약 15~20 아미노산, 진핵세포에서 초당 약 2~6 아미노산이다. 이 속도와 출구 터널의 길이가 맞물려 </a:t>
+              <a:t> 번역의 신장 인자는 독소의 표적이다. </a:t>
             </a:r>
             <a:r>
               <a:rPr sz="1600" b="1" i="0">
@@ -11852,7 +12159,7 @@
                 <a:ea typeface="Malgun Gothic"/>
                 <a:cs typeface="Malgun Gothic"/>
               </a:rPr>
-              <a:t>번역이 끝나기 전에 시작되는 사건들</a:t>
+              <a:t>Diphtheria toxin</a:t>
             </a:r>
             <a:r>
               <a:rPr sz="1600" b="0" i="0">
@@ -11863,25 +12170,29 @@
                 <a:ea typeface="Malgun Gothic"/>
                 <a:cs typeface="Malgun Gothic"/>
               </a:rPr>
-              <a:t>이 생긴다.</a:t>
-            </a:r>
-          </a:p>
-          <a:p>
-            <a:pPr>
-              <a:spcAft>
-                <a:spcPts val="900"/>
-              </a:spcAft>
-            </a:pPr>
+              <a:t>은 eEF2의 특정 잔기(diphthamide)에 ADP-ribose를 붙여 eEF2를 영구히 불활성화한다. 한 분자의 독소가 촉매로 작용해 수많은 eEF2를 망가뜨리므로 극소량으로 세포를 죽인다. </a:t>
+            </a:r>
             <a:r>
               <a:rPr sz="1600" b="1" i="0">
                 <a:solidFill>
-                  <a:srgbClr val="F2B705"/>
-                </a:solidFill>
-                <a:latin typeface="Malgun Gothic"/>
-                <a:ea typeface="Malgun Gothic"/>
-                <a:cs typeface="Malgun Gothic"/>
-              </a:rPr>
-              <a:t>•  </a:t>
+                  <a:srgbClr val="11202B"/>
+                </a:solidFill>
+                <a:latin typeface="Malgun Gothic"/>
+                <a:ea typeface="Malgun Gothic"/>
+                <a:cs typeface="Malgun Gothic"/>
+              </a:rPr>
+              <a:t>Ricin</a:t>
+            </a:r>
+            <a:r>
+              <a:rPr sz="1600" b="0" i="0">
+                <a:solidFill>
+                  <a:srgbClr val="11202B"/>
+                </a:solidFill>
+                <a:latin typeface="Malgun Gothic"/>
+                <a:ea typeface="Malgun Gothic"/>
+                <a:cs typeface="Malgun Gothic"/>
+              </a:rPr>
+              <a:t>은 60S의 28S rRNA에서 아데닌 하나를 떼어 내 신장을 막는다. Shiga toxin과 Shiga-like toxin도 같은 방식으로 작용하며, 장출혈성 대장균 감염에서 혈액응고와 신장 손상을 일으키는 용혈성 요독증후군의 기전에 관여한다. </a:t>
             </a:r>
             <a:r>
               <a:rPr sz="1600" b="1" i="0">
@@ -11892,211 +12203,7 @@
                 <a:ea typeface="Malgun Gothic"/>
                 <a:cs typeface="Malgun Gothic"/>
               </a:rPr>
-              <a:t>공동번역 접힘</a:t>
-            </a:r>
-            <a:r>
-              <a:rPr sz="1600" b="0" i="0">
-                <a:solidFill>
-                  <a:srgbClr val="11202B"/>
-                </a:solidFill>
-                <a:latin typeface="Malgun Gothic"/>
-                <a:ea typeface="Malgun Gothic"/>
-                <a:cs typeface="Malgun Gothic"/>
-              </a:rPr>
-              <a:t>: N 말단 부분이 터널을 나오면서 바로 접히기 시작하고, chaperone이 여기에 붙어 잘못된 접힘을 막는다.</a:t>
-            </a:r>
-          </a:p>
-          <a:p>
-            <a:pPr>
-              <a:spcAft>
-                <a:spcPts val="900"/>
-              </a:spcAft>
-            </a:pPr>
-            <a:r>
-              <a:rPr sz="1600" b="1" i="0">
-                <a:solidFill>
-                  <a:srgbClr val="F2B705"/>
-                </a:solidFill>
-                <a:latin typeface="Malgun Gothic"/>
-                <a:ea typeface="Malgun Gothic"/>
-                <a:cs typeface="Malgun Gothic"/>
-              </a:rPr>
-              <a:t>•  </a:t>
-            </a:r>
-            <a:r>
-              <a:rPr sz="1600" b="1" i="0">
-                <a:solidFill>
-                  <a:srgbClr val="11202B"/>
-                </a:solidFill>
-                <a:latin typeface="Malgun Gothic"/>
-                <a:ea typeface="Malgun Gothic"/>
-                <a:cs typeface="Malgun Gothic"/>
-              </a:rPr>
-              <a:t>ER로의 표적화</a:t>
-            </a:r>
-            <a:r>
-              <a:rPr sz="1600" b="0" i="0">
-                <a:solidFill>
-                  <a:srgbClr val="11202B"/>
-                </a:solidFill>
-                <a:latin typeface="Malgun Gothic"/>
-                <a:ea typeface="Malgun Gothic"/>
-                <a:cs typeface="Malgun Gothic"/>
-              </a:rPr>
-              <a:t>: 분비 단백질과 막 단백질의 N 말단 signal sequence가 터널을 나오면 </a:t>
-            </a:r>
-            <a:r>
-              <a:rPr sz="1600" b="1" i="0">
-                <a:solidFill>
-                  <a:srgbClr val="11202B"/>
-                </a:solidFill>
-                <a:latin typeface="Malgun Gothic"/>
-                <a:ea typeface="Malgun Gothic"/>
-                <a:cs typeface="Malgun Gothic"/>
-              </a:rPr>
-              <a:t>signal recognition particle</a:t>
-            </a:r>
-            <a:r>
-              <a:rPr sz="1600" b="0" i="0">
-                <a:solidFill>
-                  <a:srgbClr val="11202B"/>
-                </a:solidFill>
-                <a:latin typeface="Malgun Gothic"/>
-                <a:ea typeface="Malgun Gothic"/>
-                <a:cs typeface="Malgun Gothic"/>
-              </a:rPr>
-              <a:t>이 결합해 번역을 잠시 멈추고 ribosome 전체를 rough ER 막으로 데려간다.</a:t>
-            </a:r>
-          </a:p>
-          <a:p>
-            <a:pPr>
-              <a:spcAft>
-                <a:spcPts val="900"/>
-              </a:spcAft>
-            </a:pPr>
-            <a:r>
-              <a:rPr sz="1600" b="1" i="0">
-                <a:solidFill>
-                  <a:srgbClr val="F2B705"/>
-                </a:solidFill>
-                <a:latin typeface="Malgun Gothic"/>
-                <a:ea typeface="Malgun Gothic"/>
-                <a:cs typeface="Malgun Gothic"/>
-              </a:rPr>
-              <a:t>•  </a:t>
-            </a:r>
-            <a:r>
-              <a:rPr sz="1600" b="1" i="0">
-                <a:solidFill>
-                  <a:srgbClr val="11202B"/>
-                </a:solidFill>
-                <a:latin typeface="Malgun Gothic"/>
-                <a:ea typeface="Malgun Gothic"/>
-                <a:cs typeface="Malgun Gothic"/>
-              </a:rPr>
-              <a:t>공동번역 수정</a:t>
-            </a:r>
-            <a:r>
-              <a:rPr sz="1600" b="0" i="0">
-                <a:solidFill>
-                  <a:srgbClr val="11202B"/>
-                </a:solidFill>
-                <a:latin typeface="Malgun Gothic"/>
-                <a:ea typeface="Malgun Gothic"/>
-                <a:cs typeface="Malgun Gothic"/>
-              </a:rPr>
-              <a:t>: N 말단의 formylmethionine이나 methionine 제거, N 말단 acetylation이 번역 중에 일어난다.</a:t>
-            </a:r>
-          </a:p>
-          <a:p>
-            <a:pPr>
-              <a:spcAft>
-                <a:spcPts val="900"/>
-              </a:spcAft>
-            </a:pPr>
-            <a:r>
-              <a:rPr sz="1600" b="1" i="0">
-                <a:solidFill>
-                  <a:srgbClr val="F2B705"/>
-                </a:solidFill>
-                <a:latin typeface="Malgun Gothic"/>
-                <a:ea typeface="Malgun Gothic"/>
-                <a:cs typeface="Malgun Gothic"/>
-              </a:rPr>
-              <a:t>•  </a:t>
-            </a:r>
-            <a:r>
-              <a:rPr sz="1600" b="1" i="0">
-                <a:solidFill>
-                  <a:srgbClr val="11202B"/>
-                </a:solidFill>
-                <a:latin typeface="Malgun Gothic"/>
-                <a:ea typeface="Malgun Gothic"/>
-                <a:cs typeface="Malgun Gothic"/>
-              </a:rPr>
-              <a:t>품질 관리</a:t>
-            </a:r>
-            <a:r>
-              <a:rPr sz="1600" b="0" i="0">
-                <a:solidFill>
-                  <a:srgbClr val="11202B"/>
-                </a:solidFill>
-                <a:latin typeface="Malgun Gothic"/>
-                <a:ea typeface="Malgun Gothic"/>
-                <a:cs typeface="Malgun Gothic"/>
-              </a:rPr>
-              <a:t>: 번역이 비정상적으로 멈춘 ribosome은 ribosome-associated quality control에 의해 해체되고 미완성 사슬은 분해로 보내진다.</a:t>
-            </a:r>
-          </a:p>
-          <a:p>
-            <a:pPr>
-              <a:spcAft>
-                <a:spcPts val="900"/>
-              </a:spcAft>
-            </a:pPr>
-            <a:r>
-              <a:rPr sz="1600" b="1" i="0">
-                <a:solidFill>
-                  <a:srgbClr val="F2B705"/>
-                </a:solidFill>
-                <a:latin typeface="Malgun Gothic"/>
-                <a:ea typeface="Malgun Gothic"/>
-                <a:cs typeface="Malgun Gothic"/>
-              </a:rPr>
-              <a:t>•  </a:t>
-            </a:r>
-            <a:r>
-              <a:rPr sz="1600" b="0" i="0">
-                <a:solidFill>
-                  <a:srgbClr val="11202B"/>
-                </a:solidFill>
-                <a:latin typeface="Malgun Gothic"/>
-                <a:ea typeface="Malgun Gothic"/>
-                <a:cs typeface="Malgun Gothic"/>
-              </a:rPr>
-              <a:t>이 사건들은 다음 수업(번역 후 수정과 단백질 접힘)의 주제이므로 여기서는 </a:t>
-            </a:r>
-            <a:r>
-              <a:rPr sz="1600" b="1" i="0">
-                <a:solidFill>
-                  <a:srgbClr val="11202B"/>
-                </a:solidFill>
-                <a:latin typeface="Malgun Gothic"/>
-                <a:ea typeface="Malgun Gothic"/>
-                <a:cs typeface="Malgun Gothic"/>
-              </a:rPr>
-              <a:t>번역과 분리된 별개의 과정이 아니라 번역과 겹쳐 일어나는 과정</a:t>
-            </a:r>
-            <a:r>
-              <a:rPr sz="1600" b="0" i="0">
-                <a:solidFill>
-                  <a:srgbClr val="11202B"/>
-                </a:solidFill>
-                <a:latin typeface="Malgun Gothic"/>
-                <a:ea typeface="Malgun Gothic"/>
-                <a:cs typeface="Malgun Gothic"/>
-              </a:rPr>
-              <a:t>이라는 점만 확인한다.</a:t>
+              <a:t>표적이 번역이라는 점에서 세 독소의 독성이 매우 높은 이유가 설명된다.</a:t>
             </a:r>
           </a:p>
         </p:txBody>
@@ -12282,7 +12389,7 @@
                 <a:ea typeface="Malgun Gothic"/>
                 <a:cs typeface="Malgun Gothic"/>
               </a:rPr>
-              <a:t>06   </a:t>
+              <a:t>07   </a:t>
             </a:r>
             <a:r>
               <a:rPr sz="2400" b="1" i="0">
@@ -12293,7 +12400,7 @@
                 <a:ea typeface="Malgun Gothic"/>
                 <a:cs typeface="Malgun Gothic"/>
               </a:rPr>
-              <a:t>6. 번역 속도와 번역 중 일어나는 사건</a:t>
+              <a:t>7. 번역을 표적으로 하는 항생제</a:t>
             </a:r>
           </a:p>
         </p:txBody>
@@ -12347,58 +12454,44 @@
       </p:sp>
       <p:sp>
         <p:nvSpPr>
-          <p:cNvPr id="7" name="Rectangle 6"/>
-          <p:cNvSpPr/>
-          <p:nvPr/>
-        </p:nvSpPr>
-        <p:spPr>
-          <a:xfrm>
-            <a:off x="640080" y="1325880"/>
-            <a:ext cx="10881360" cy="1976120"/>
-          </a:xfrm>
-          <a:prstGeom prst="rect">
-            <a:avLst/>
-          </a:prstGeom>
-          <a:solidFill>
-            <a:srgbClr val="E8F1FA"/>
-          </a:solidFill>
-          <a:ln>
-            <a:noFill/>
-          </a:ln>
-          <a:effectLst/>
-        </p:spPr>
-        <p:style>
-          <a:lnRef idx="1">
-            <a:schemeClr val="accent1"/>
-          </a:lnRef>
-          <a:fillRef idx="3">
-            <a:schemeClr val="accent1"/>
-          </a:fillRef>
-          <a:effectRef idx="2">
-            <a:schemeClr val="accent1"/>
-          </a:effectRef>
-          <a:fontRef idx="minor">
-            <a:schemeClr val="lt1"/>
-          </a:fontRef>
-        </p:style>
-        <p:txBody>
-          <a:bodyPr rtlCol="0" anchor="ctr" wrap="square" lIns="228600" rIns="228600"/>
-          <a:lstStyle/>
-          <a:p>
-            <a:pPr algn="l"/>
-            <a:r>
-              <a:rPr sz="1200" b="1" i="0">
-                <a:solidFill>
-                  <a:srgbClr val="003C71"/>
-                </a:solidFill>
-                <a:latin typeface="Malgun Gothic"/>
-                <a:ea typeface="Malgun Gothic"/>
-                <a:cs typeface="Malgun Gothic"/>
-              </a:rPr>
-              <a:t>임상 연계   </a:t>
-            </a:r>
-            <a:r>
-              <a:rPr sz="1600" b="1" i="0">
+          <p:cNvPr id="7" name="TextBox 6"/>
+          <p:cNvSpPr txBox="1"/>
+          <p:nvPr/>
+        </p:nvSpPr>
+        <p:spPr>
+          <a:xfrm>
+            <a:off x="640080" y="1280160"/>
+            <a:ext cx="10881360" cy="5029200"/>
+          </a:xfrm>
+          <a:prstGeom prst="rect">
+            <a:avLst/>
+          </a:prstGeom>
+          <a:noFill/>
+        </p:spPr>
+        <p:txBody>
+          <a:bodyPr wrap="square" anchor="t">
+            <a:spAutoFit/>
+          </a:bodyPr>
+          <a:lstStyle/>
+          <a:p>
+            <a:pPr>
+              <a:spcAft>
+                <a:spcPts val="900"/>
+              </a:spcAft>
+            </a:pPr>
+            <a:r>
+              <a:rPr sz="2000" b="1" i="0">
+                <a:solidFill>
+                  <a:srgbClr val="F2B705"/>
+                </a:solidFill>
+                <a:latin typeface="Malgun Gothic"/>
+                <a:ea typeface="Malgun Gothic"/>
+                <a:cs typeface="Malgun Gothic"/>
+              </a:rPr>
+              <a:t>•  </a:t>
+            </a:r>
+            <a:r>
+              <a:rPr sz="2000" b="0" i="0">
                 <a:solidFill>
                   <a:srgbClr val="11202B"/>
                 </a:solidFill>
@@ -12406,73 +12499,7 @@
                 <a:ea typeface="Malgun Gothic"/>
                 <a:cs typeface="Malgun Gothic"/>
               </a:rPr>
-              <a:t>임상 연계</a:t>
-            </a:r>
-            <a:r>
-              <a:rPr sz="1600" b="0" i="0">
-                <a:solidFill>
-                  <a:srgbClr val="11202B"/>
-                </a:solidFill>
-                <a:latin typeface="Malgun Gothic"/>
-                <a:ea typeface="Malgun Gothic"/>
-                <a:cs typeface="Malgun Gothic"/>
-              </a:rPr>
-              <a:t> 번역의 신장 인자는 독소의 표적이다. </a:t>
-            </a:r>
-            <a:r>
-              <a:rPr sz="1600" b="1" i="0">
-                <a:solidFill>
-                  <a:srgbClr val="11202B"/>
-                </a:solidFill>
-                <a:latin typeface="Malgun Gothic"/>
-                <a:ea typeface="Malgun Gothic"/>
-                <a:cs typeface="Malgun Gothic"/>
-              </a:rPr>
-              <a:t>Diphtheria toxin</a:t>
-            </a:r>
-            <a:r>
-              <a:rPr sz="1600" b="0" i="0">
-                <a:solidFill>
-                  <a:srgbClr val="11202B"/>
-                </a:solidFill>
-                <a:latin typeface="Malgun Gothic"/>
-                <a:ea typeface="Malgun Gothic"/>
-                <a:cs typeface="Malgun Gothic"/>
-              </a:rPr>
-              <a:t>은 eEF2의 특정 잔기(diphthamide)에 ADP-ribose를 붙여 eEF2를 영구히 불활성화한다. 한 분자의 독소가 촉매로 작용해 수많은 eEF2를 망가뜨리므로 극소량으로 세포를 죽인다. </a:t>
-            </a:r>
-            <a:r>
-              <a:rPr sz="1600" b="1" i="0">
-                <a:solidFill>
-                  <a:srgbClr val="11202B"/>
-                </a:solidFill>
-                <a:latin typeface="Malgun Gothic"/>
-                <a:ea typeface="Malgun Gothic"/>
-                <a:cs typeface="Malgun Gothic"/>
-              </a:rPr>
-              <a:t>Ricin</a:t>
-            </a:r>
-            <a:r>
-              <a:rPr sz="1600" b="0" i="0">
-                <a:solidFill>
-                  <a:srgbClr val="11202B"/>
-                </a:solidFill>
-                <a:latin typeface="Malgun Gothic"/>
-                <a:ea typeface="Malgun Gothic"/>
-                <a:cs typeface="Malgun Gothic"/>
-              </a:rPr>
-              <a:t>은 60S의 28S rRNA에서 아데닌 하나를 떼어 내 신장을 막는다. Shiga toxin과 Shiga-like toxin도 같은 방식으로 작용하며, 장출혈성 대장균 감염에서 혈액응고와 신장 손상을 일으키는 용혈성 요독증후군의 기전에 관여한다. </a:t>
-            </a:r>
-            <a:r>
-              <a:rPr sz="1600" b="1" i="0">
-                <a:solidFill>
-                  <a:srgbClr val="11202B"/>
-                </a:solidFill>
-                <a:latin typeface="Malgun Gothic"/>
-                <a:ea typeface="Malgun Gothic"/>
-                <a:cs typeface="Malgun Gothic"/>
-              </a:rPr>
-              <a:t>표적이 번역이라는 점에서 세 독소의 독성이 매우 높은 이유가 설명된다.</a:t>
+              <a:t>세균과 진핵세포의 ribosome은 구조가 충분히 달라서, 세균 ribosome에만 결합하는 약물을 만들 수 있다. 번역 저해제는 항균제에서 가장 큰 계열 중 하나다.</a:t>
             </a:r>
           </a:p>
         </p:txBody>
@@ -12721,16 +12748,40 @@
           </a:p>
         </p:txBody>
       </p:sp>
-      <p:sp>
-        <p:nvSpPr>
-          <p:cNvPr id="7" name="TextBox 6"/>
+      <p:pic>
+        <p:nvPicPr>
+          <p:cNvPr id="7" name="Picture 6" descr="fig-antibiotics.slide.png"/>
+          <p:cNvPicPr>
+            <a:picLocks noChangeAspect="1"/>
+          </p:cNvPicPr>
+          <p:nvPr/>
+        </p:nvPicPr>
+        <p:blipFill>
+          <a:blip r:embed="rId2"/>
+          <a:stretch>
+            <a:fillRect/>
+          </a:stretch>
+        </p:blipFill>
+        <p:spPr>
+          <a:xfrm>
+            <a:off x="1545619" y="1325880"/>
+            <a:ext cx="9100457" cy="4343400"/>
+          </a:xfrm>
+          <a:prstGeom prst="rect">
+            <a:avLst/>
+          </a:prstGeom>
+        </p:spPr>
+      </p:pic>
+      <p:sp>
+        <p:nvSpPr>
+          <p:cNvPr id="8" name="TextBox 7"/>
           <p:cNvSpPr txBox="1"/>
           <p:nvPr/>
         </p:nvSpPr>
         <p:spPr>
           <a:xfrm>
-            <a:off x="640080" y="1280160"/>
-            <a:ext cx="10881360" cy="5029200"/>
+            <a:off x="640080" y="5806440"/>
+            <a:ext cx="10881360" cy="548640"/>
           </a:xfrm>
           <a:prstGeom prst="rect">
             <a:avLst/>
@@ -12743,32 +12794,17 @@
           </a:bodyPr>
           <a:lstStyle/>
           <a:p>
-            <a:pPr>
-              <a:spcAft>
-                <a:spcPts val="900"/>
-              </a:spcAft>
-            </a:pPr>
-            <a:r>
-              <a:rPr sz="2000" b="1" i="0">
-                <a:solidFill>
-                  <a:srgbClr val="F2B705"/>
-                </a:solidFill>
-                <a:latin typeface="Malgun Gothic"/>
-                <a:ea typeface="Malgun Gothic"/>
-                <a:cs typeface="Malgun Gothic"/>
-              </a:rPr>
-              <a:t>•  </a:t>
-            </a:r>
-            <a:r>
-              <a:rPr sz="2000" b="0" i="0">
-                <a:solidFill>
-                  <a:srgbClr val="11202B"/>
-                </a:solidFill>
-                <a:latin typeface="Malgun Gothic"/>
-                <a:ea typeface="Malgun Gothic"/>
-                <a:cs typeface="Malgun Gothic"/>
-              </a:rPr>
-              <a:t>세균과 진핵세포의 ribosome은 구조가 충분히 달라서, 세균 ribosome에만 결합하는 약물을 만들 수 있다. 번역 저해제는 항균제에서 가장 큰 계열 중 하나다.</a:t>
+            <a:pPr algn="ctr"/>
+            <a:r>
+              <a:rPr sz="1200" b="0" i="0">
+                <a:solidFill>
+                  <a:srgbClr val="66788A"/>
+                </a:solidFill>
+                <a:latin typeface="Malgun Gothic"/>
+                <a:ea typeface="Malgun Gothic"/>
+                <a:cs typeface="Malgun Gothic"/>
+              </a:rPr>
+              <a:t>번역 저해 약물과 독소의 결합 부위와 저해 단계. 소단위에 작용하는 약물과 대단위에 작용하는 약물이 구분된다.</a:t>
             </a:r>
           </a:p>
         </p:txBody>
@@ -13013,665 +13049,6 @@
                 <a:cs typeface="Malgun Gothic"/>
               </a:rPr>
               <a:t>      29</a:t>
-            </a:r>
-          </a:p>
-        </p:txBody>
-      </p:sp>
-      <p:pic>
-        <p:nvPicPr>
-          <p:cNvPr id="7" name="Picture 6" descr="fig-antibiotics.slide.png"/>
-          <p:cNvPicPr>
-            <a:picLocks noChangeAspect="1"/>
-          </p:cNvPicPr>
-          <p:nvPr/>
-        </p:nvPicPr>
-        <p:blipFill>
-          <a:blip r:embed="rId2"/>
-          <a:stretch>
-            <a:fillRect/>
-          </a:stretch>
-        </p:blipFill>
-        <p:spPr>
-          <a:xfrm>
-            <a:off x="1545619" y="1325880"/>
-            <a:ext cx="9100457" cy="4343400"/>
-          </a:xfrm>
-          <a:prstGeom prst="rect">
-            <a:avLst/>
-          </a:prstGeom>
-        </p:spPr>
-      </p:pic>
-      <p:sp>
-        <p:nvSpPr>
-          <p:cNvPr id="8" name="TextBox 7"/>
-          <p:cNvSpPr txBox="1"/>
-          <p:nvPr/>
-        </p:nvSpPr>
-        <p:spPr>
-          <a:xfrm>
-            <a:off x="640080" y="5806440"/>
-            <a:ext cx="10881360" cy="548640"/>
-          </a:xfrm>
-          <a:prstGeom prst="rect">
-            <a:avLst/>
-          </a:prstGeom>
-          <a:noFill/>
-        </p:spPr>
-        <p:txBody>
-          <a:bodyPr wrap="square" anchor="t">
-            <a:spAutoFit/>
-          </a:bodyPr>
-          <a:lstStyle/>
-          <a:p>
-            <a:pPr algn="ctr"/>
-            <a:r>
-              <a:rPr sz="1200" b="0" i="0">
-                <a:solidFill>
-                  <a:srgbClr val="66788A"/>
-                </a:solidFill>
-                <a:latin typeface="Malgun Gothic"/>
-                <a:ea typeface="Malgun Gothic"/>
-                <a:cs typeface="Malgun Gothic"/>
-              </a:rPr>
-              <a:t>번역 저해 약물과 독소의 결합 부위와 저해 단계. 소단위에 작용하는 약물과 대단위에 작용하는 약물이 구분된다.</a:t>
-            </a:r>
-          </a:p>
-        </p:txBody>
-      </p:sp>
-    </p:spTree>
-  </p:cSld>
-  <p:clrMapOvr>
-    <a:masterClrMapping/>
-  </p:clrMapOvr>
-</p:sld>
-</file>
-
-<file path=ppt/slides/slide3.xml><?xml version="1.0" encoding="utf-8"?>
-<p:sld xmlns:a="http://schemas.openxmlformats.org/drawingml/2006/main" xmlns:p="http://schemas.openxmlformats.org/presentationml/2006/main" xmlns:r="http://schemas.openxmlformats.org/officeDocument/2006/relationships">
-  <p:cSld>
-    <p:spTree>
-      <p:nvGrpSpPr>
-        <p:cNvPr id="1" name=""/>
-        <p:cNvGrpSpPr/>
-        <p:nvPr/>
-      </p:nvGrpSpPr>
-      <p:grpSpPr/>
-      <p:sp>
-        <p:nvSpPr>
-          <p:cNvPr id="2" name="Rectangle 1"/>
-          <p:cNvSpPr/>
-          <p:nvPr/>
-        </p:nvSpPr>
-        <p:spPr>
-          <a:xfrm>
-            <a:off x="0" y="0"/>
-            <a:ext cx="12191695" cy="6858000"/>
-          </a:xfrm>
-          <a:prstGeom prst="rect">
-            <a:avLst/>
-          </a:prstGeom>
-          <a:solidFill>
-            <a:srgbClr val="F5F8F9"/>
-          </a:solidFill>
-          <a:ln>
-            <a:noFill/>
-          </a:ln>
-          <a:effectLst/>
-        </p:spPr>
-        <p:style>
-          <a:lnRef idx="1">
-            <a:schemeClr val="accent1"/>
-          </a:lnRef>
-          <a:fillRef idx="3">
-            <a:schemeClr val="accent1"/>
-          </a:fillRef>
-          <a:effectRef idx="2">
-            <a:schemeClr val="accent1"/>
-          </a:effectRef>
-          <a:fontRef idx="minor">
-            <a:schemeClr val="lt1"/>
-          </a:fontRef>
-        </p:style>
-        <p:txBody>
-          <a:bodyPr rtlCol="0" anchor="ctr"/>
-          <a:lstStyle/>
-          <a:p>
-            <a:pPr algn="ctr"/>
-          </a:p>
-        </p:txBody>
-      </p:sp>
-      <p:sp>
-        <p:nvSpPr>
-          <p:cNvPr id="3" name="Rectangle 2"/>
-          <p:cNvSpPr/>
-          <p:nvPr/>
-        </p:nvSpPr>
-        <p:spPr>
-          <a:xfrm>
-            <a:off x="0" y="0"/>
-            <a:ext cx="12191695" cy="960120"/>
-          </a:xfrm>
-          <a:prstGeom prst="rect">
-            <a:avLst/>
-          </a:prstGeom>
-          <a:solidFill>
-            <a:srgbClr val="003C71"/>
-          </a:solidFill>
-          <a:ln>
-            <a:noFill/>
-          </a:ln>
-          <a:effectLst/>
-        </p:spPr>
-        <p:style>
-          <a:lnRef idx="1">
-            <a:schemeClr val="accent1"/>
-          </a:lnRef>
-          <a:fillRef idx="3">
-            <a:schemeClr val="accent1"/>
-          </a:fillRef>
-          <a:effectRef idx="2">
-            <a:schemeClr val="accent1"/>
-          </a:effectRef>
-          <a:fontRef idx="minor">
-            <a:schemeClr val="lt1"/>
-          </a:fontRef>
-        </p:style>
-        <p:txBody>
-          <a:bodyPr rtlCol="0" anchor="ctr"/>
-          <a:lstStyle/>
-          <a:p>
-            <a:pPr algn="ctr"/>
-          </a:p>
-        </p:txBody>
-      </p:sp>
-      <p:sp>
-        <p:nvSpPr>
-          <p:cNvPr id="4" name="Rectangle 3"/>
-          <p:cNvSpPr/>
-          <p:nvPr/>
-        </p:nvSpPr>
-        <p:spPr>
-          <a:xfrm>
-            <a:off x="0" y="960120"/>
-            <a:ext cx="12191695" cy="54864"/>
-          </a:xfrm>
-          <a:prstGeom prst="rect">
-            <a:avLst/>
-          </a:prstGeom>
-          <a:solidFill>
-            <a:srgbClr val="F2B705"/>
-          </a:solidFill>
-          <a:ln>
-            <a:noFill/>
-          </a:ln>
-          <a:effectLst/>
-        </p:spPr>
-        <p:style>
-          <a:lnRef idx="1">
-            <a:schemeClr val="accent1"/>
-          </a:lnRef>
-          <a:fillRef idx="3">
-            <a:schemeClr val="accent1"/>
-          </a:fillRef>
-          <a:effectRef idx="2">
-            <a:schemeClr val="accent1"/>
-          </a:effectRef>
-          <a:fontRef idx="minor">
-            <a:schemeClr val="lt1"/>
-          </a:fontRef>
-        </p:style>
-        <p:txBody>
-          <a:bodyPr rtlCol="0" anchor="ctr"/>
-          <a:lstStyle/>
-          <a:p>
-            <a:pPr algn="ctr"/>
-          </a:p>
-        </p:txBody>
-      </p:sp>
-      <p:sp>
-        <p:nvSpPr>
-          <p:cNvPr id="5" name="TextBox 4"/>
-          <p:cNvSpPr txBox="1"/>
-          <p:nvPr/>
-        </p:nvSpPr>
-        <p:spPr>
-          <a:xfrm>
-            <a:off x="457200" y="109728"/>
-            <a:ext cx="11247120" cy="777240"/>
-          </a:xfrm>
-          <a:prstGeom prst="rect">
-            <a:avLst/>
-          </a:prstGeom>
-          <a:noFill/>
-        </p:spPr>
-        <p:txBody>
-          <a:bodyPr wrap="square" anchor="ctr">
-            <a:spAutoFit/>
-          </a:bodyPr>
-          <a:lstStyle/>
-          <a:p>
-            <a:r>
-              <a:rPr sz="1300" b="1" i="0">
-                <a:solidFill>
-                  <a:srgbClr val="F2B705"/>
-                </a:solidFill>
-                <a:latin typeface="Malgun Gothic"/>
-                <a:ea typeface="Malgun Gothic"/>
-                <a:cs typeface="Malgun Gothic"/>
-              </a:rPr>
-              <a:t>PREREQ   </a:t>
-            </a:r>
-            <a:r>
-              <a:rPr sz="2400" b="1" i="0">
-                <a:solidFill>
-                  <a:srgbClr val="FFFFFF"/>
-                </a:solidFill>
-                <a:latin typeface="Malgun Gothic"/>
-                <a:ea typeface="Malgun Gothic"/>
-                <a:cs typeface="Malgun Gothic"/>
-              </a:rPr>
-              <a:t>선수지식</a:t>
-            </a:r>
-          </a:p>
-        </p:txBody>
-      </p:sp>
-      <p:sp>
-        <p:nvSpPr>
-          <p:cNvPr id="6" name="TextBox 5"/>
-          <p:cNvSpPr txBox="1"/>
-          <p:nvPr/>
-        </p:nvSpPr>
-        <p:spPr>
-          <a:xfrm>
-            <a:off x="457200" y="6446520"/>
-            <a:ext cx="11247120" cy="301752"/>
-          </a:xfrm>
-          <a:prstGeom prst="rect">
-            <a:avLst/>
-          </a:prstGeom>
-          <a:noFill/>
-        </p:spPr>
-        <p:txBody>
-          <a:bodyPr wrap="square" anchor="ctr">
-            <a:spAutoFit/>
-          </a:bodyPr>
-          <a:lstStyle/>
-          <a:p>
-            <a:r>
-              <a:rPr sz="900" b="0" i="0">
-                <a:solidFill>
-                  <a:srgbClr val="66788A"/>
-                </a:solidFill>
-                <a:latin typeface="Malgun Gothic"/>
-                <a:ea typeface="Malgun Gothic"/>
-                <a:cs typeface="Malgun Gothic"/>
-              </a:rPr>
-              <a:t>M03-W03-L03  ·  Ribosome과 번역의 단계</a:t>
-            </a:r>
-            <a:r>
-              <a:rPr sz="900" b="1" i="0">
-                <a:solidFill>
-                  <a:srgbClr val="003C71"/>
-                </a:solidFill>
-                <a:latin typeface="Malgun Gothic"/>
-                <a:ea typeface="Malgun Gothic"/>
-                <a:cs typeface="Malgun Gothic"/>
-              </a:rPr>
-              <a:t>      3</a:t>
-            </a:r>
-          </a:p>
-        </p:txBody>
-      </p:sp>
-      <p:sp>
-        <p:nvSpPr>
-          <p:cNvPr id="7" name="TextBox 6"/>
-          <p:cNvSpPr txBox="1"/>
-          <p:nvPr/>
-        </p:nvSpPr>
-        <p:spPr>
-          <a:xfrm>
-            <a:off x="640080" y="1280160"/>
-            <a:ext cx="10881360" cy="5029200"/>
-          </a:xfrm>
-          <a:prstGeom prst="rect">
-            <a:avLst/>
-          </a:prstGeom>
-          <a:noFill/>
-        </p:spPr>
-        <p:txBody>
-          <a:bodyPr wrap="square" anchor="t">
-            <a:spAutoFit/>
-          </a:bodyPr>
-          <a:lstStyle/>
-          <a:p>
-            <a:pPr>
-              <a:spcAft>
-                <a:spcPts val="900"/>
-              </a:spcAft>
-            </a:pPr>
-            <a:r>
-              <a:rPr sz="2000" b="1" i="0">
-                <a:solidFill>
-                  <a:srgbClr val="F2B705"/>
-                </a:solidFill>
-                <a:latin typeface="Malgun Gothic"/>
-                <a:ea typeface="Malgun Gothic"/>
-                <a:cs typeface="Malgun Gothic"/>
-              </a:rPr>
-              <a:t>•  </a:t>
-            </a:r>
-            <a:r>
-              <a:rPr sz="2000" b="0" i="0">
-                <a:solidFill>
-                  <a:srgbClr val="11202B"/>
-                </a:solidFill>
-                <a:latin typeface="Malgun Gothic"/>
-                <a:ea typeface="Malgun Gothic"/>
-                <a:cs typeface="Malgun Gothic"/>
-              </a:rPr>
-              <a:t>M03-W03-L02 유전암호와 tRNA의 역할 — 코돈, anticodon, aminoacyl-tRNA의 생성</a:t>
-            </a:r>
-          </a:p>
-          <a:p>
-            <a:pPr>
-              <a:spcAft>
-                <a:spcPts val="900"/>
-              </a:spcAft>
-            </a:pPr>
-            <a:r>
-              <a:rPr sz="2000" b="1" i="0">
-                <a:solidFill>
-                  <a:srgbClr val="F2B705"/>
-                </a:solidFill>
-                <a:latin typeface="Malgun Gothic"/>
-                <a:ea typeface="Malgun Gothic"/>
-                <a:cs typeface="Malgun Gothic"/>
-              </a:rPr>
-              <a:t>•  </a:t>
-            </a:r>
-            <a:r>
-              <a:rPr sz="2000" b="0" i="0">
-                <a:solidFill>
-                  <a:srgbClr val="11202B"/>
-                </a:solidFill>
-                <a:latin typeface="Malgun Gothic"/>
-                <a:ea typeface="Malgun Gothic"/>
-                <a:cs typeface="Malgun Gothic"/>
-              </a:rPr>
-              <a:t>M03-W03-L01 Splicing 이상과 질환 — 성숙 mRNA의 구조, 5' cap과 poly(A)</a:t>
-            </a:r>
-          </a:p>
-          <a:p>
-            <a:pPr>
-              <a:spcAft>
-                <a:spcPts val="900"/>
-              </a:spcAft>
-            </a:pPr>
-            <a:r>
-              <a:rPr sz="2000" b="1" i="0">
-                <a:solidFill>
-                  <a:srgbClr val="F2B705"/>
-                </a:solidFill>
-                <a:latin typeface="Malgun Gothic"/>
-                <a:ea typeface="Malgun Gothic"/>
-                <a:cs typeface="Malgun Gothic"/>
-              </a:rPr>
-              <a:t>•  </a:t>
-            </a:r>
-            <a:r>
-              <a:rPr sz="2000" b="0" i="0">
-                <a:solidFill>
-                  <a:srgbClr val="11202B"/>
-                </a:solidFill>
-                <a:latin typeface="Malgun Gothic"/>
-                <a:ea typeface="Malgun Gothic"/>
-                <a:cs typeface="Malgun Gothic"/>
-              </a:rPr>
-              <a:t>M01-W03-L01 단백질의 1차 구조 — peptide 결합의 성질과 N·C 말단의 정의</a:t>
-            </a:r>
-          </a:p>
-        </p:txBody>
-      </p:sp>
-    </p:spTree>
-  </p:cSld>
-  <p:clrMapOvr>
-    <a:masterClrMapping/>
-  </p:clrMapOvr>
-</p:sld>
-</file>
-
-<file path=ppt/slides/slide30.xml><?xml version="1.0" encoding="utf-8"?>
-<p:sld xmlns:a="http://schemas.openxmlformats.org/drawingml/2006/main" xmlns:p="http://schemas.openxmlformats.org/presentationml/2006/main" xmlns:r="http://schemas.openxmlformats.org/officeDocument/2006/relationships">
-  <p:cSld>
-    <p:spTree>
-      <p:nvGrpSpPr>
-        <p:cNvPr id="1" name=""/>
-        <p:cNvGrpSpPr/>
-        <p:nvPr/>
-      </p:nvGrpSpPr>
-      <p:grpSpPr/>
-      <p:sp>
-        <p:nvSpPr>
-          <p:cNvPr id="2" name="Rectangle 1"/>
-          <p:cNvSpPr/>
-          <p:nvPr/>
-        </p:nvSpPr>
-        <p:spPr>
-          <a:xfrm>
-            <a:off x="0" y="0"/>
-            <a:ext cx="12191695" cy="6858000"/>
-          </a:xfrm>
-          <a:prstGeom prst="rect">
-            <a:avLst/>
-          </a:prstGeom>
-          <a:solidFill>
-            <a:srgbClr val="F5F8F9"/>
-          </a:solidFill>
-          <a:ln>
-            <a:noFill/>
-          </a:ln>
-          <a:effectLst/>
-        </p:spPr>
-        <p:style>
-          <a:lnRef idx="1">
-            <a:schemeClr val="accent1"/>
-          </a:lnRef>
-          <a:fillRef idx="3">
-            <a:schemeClr val="accent1"/>
-          </a:fillRef>
-          <a:effectRef idx="2">
-            <a:schemeClr val="accent1"/>
-          </a:effectRef>
-          <a:fontRef idx="minor">
-            <a:schemeClr val="lt1"/>
-          </a:fontRef>
-        </p:style>
-        <p:txBody>
-          <a:bodyPr rtlCol="0" anchor="ctr"/>
-          <a:lstStyle/>
-          <a:p>
-            <a:pPr algn="ctr"/>
-          </a:p>
-        </p:txBody>
-      </p:sp>
-      <p:sp>
-        <p:nvSpPr>
-          <p:cNvPr id="3" name="Rectangle 2"/>
-          <p:cNvSpPr/>
-          <p:nvPr/>
-        </p:nvSpPr>
-        <p:spPr>
-          <a:xfrm>
-            <a:off x="0" y="0"/>
-            <a:ext cx="12191695" cy="960120"/>
-          </a:xfrm>
-          <a:prstGeom prst="rect">
-            <a:avLst/>
-          </a:prstGeom>
-          <a:solidFill>
-            <a:srgbClr val="003C71"/>
-          </a:solidFill>
-          <a:ln>
-            <a:noFill/>
-          </a:ln>
-          <a:effectLst/>
-        </p:spPr>
-        <p:style>
-          <a:lnRef idx="1">
-            <a:schemeClr val="accent1"/>
-          </a:lnRef>
-          <a:fillRef idx="3">
-            <a:schemeClr val="accent1"/>
-          </a:fillRef>
-          <a:effectRef idx="2">
-            <a:schemeClr val="accent1"/>
-          </a:effectRef>
-          <a:fontRef idx="minor">
-            <a:schemeClr val="lt1"/>
-          </a:fontRef>
-        </p:style>
-        <p:txBody>
-          <a:bodyPr rtlCol="0" anchor="ctr"/>
-          <a:lstStyle/>
-          <a:p>
-            <a:pPr algn="ctr"/>
-          </a:p>
-        </p:txBody>
-      </p:sp>
-      <p:sp>
-        <p:nvSpPr>
-          <p:cNvPr id="4" name="Rectangle 3"/>
-          <p:cNvSpPr/>
-          <p:nvPr/>
-        </p:nvSpPr>
-        <p:spPr>
-          <a:xfrm>
-            <a:off x="0" y="960120"/>
-            <a:ext cx="12191695" cy="54864"/>
-          </a:xfrm>
-          <a:prstGeom prst="rect">
-            <a:avLst/>
-          </a:prstGeom>
-          <a:solidFill>
-            <a:srgbClr val="F2B705"/>
-          </a:solidFill>
-          <a:ln>
-            <a:noFill/>
-          </a:ln>
-          <a:effectLst/>
-        </p:spPr>
-        <p:style>
-          <a:lnRef idx="1">
-            <a:schemeClr val="accent1"/>
-          </a:lnRef>
-          <a:fillRef idx="3">
-            <a:schemeClr val="accent1"/>
-          </a:fillRef>
-          <a:effectRef idx="2">
-            <a:schemeClr val="accent1"/>
-          </a:effectRef>
-          <a:fontRef idx="minor">
-            <a:schemeClr val="lt1"/>
-          </a:fontRef>
-        </p:style>
-        <p:txBody>
-          <a:bodyPr rtlCol="0" anchor="ctr"/>
-          <a:lstStyle/>
-          <a:p>
-            <a:pPr algn="ctr"/>
-          </a:p>
-        </p:txBody>
-      </p:sp>
-      <p:sp>
-        <p:nvSpPr>
-          <p:cNvPr id="5" name="TextBox 4"/>
-          <p:cNvSpPr txBox="1"/>
-          <p:nvPr/>
-        </p:nvSpPr>
-        <p:spPr>
-          <a:xfrm>
-            <a:off x="457200" y="109728"/>
-            <a:ext cx="11247120" cy="777240"/>
-          </a:xfrm>
-          <a:prstGeom prst="rect">
-            <a:avLst/>
-          </a:prstGeom>
-          <a:noFill/>
-        </p:spPr>
-        <p:txBody>
-          <a:bodyPr wrap="square" anchor="ctr">
-            <a:spAutoFit/>
-          </a:bodyPr>
-          <a:lstStyle/>
-          <a:p>
-            <a:r>
-              <a:rPr sz="1300" b="1" i="0">
-                <a:solidFill>
-                  <a:srgbClr val="F2B705"/>
-                </a:solidFill>
-                <a:latin typeface="Malgun Gothic"/>
-                <a:ea typeface="Malgun Gothic"/>
-                <a:cs typeface="Malgun Gothic"/>
-              </a:rPr>
-              <a:t>07   </a:t>
-            </a:r>
-            <a:r>
-              <a:rPr sz="2400" b="1" i="0">
-                <a:solidFill>
-                  <a:srgbClr val="FFFFFF"/>
-                </a:solidFill>
-                <a:latin typeface="Malgun Gothic"/>
-                <a:ea typeface="Malgun Gothic"/>
-                <a:cs typeface="Malgun Gothic"/>
-              </a:rPr>
-              <a:t>7. 번역을 표적으로 하는 항생제</a:t>
-            </a:r>
-          </a:p>
-        </p:txBody>
-      </p:sp>
-      <p:sp>
-        <p:nvSpPr>
-          <p:cNvPr id="6" name="TextBox 5"/>
-          <p:cNvSpPr txBox="1"/>
-          <p:nvPr/>
-        </p:nvSpPr>
-        <p:spPr>
-          <a:xfrm>
-            <a:off x="457200" y="6446520"/>
-            <a:ext cx="11247120" cy="301752"/>
-          </a:xfrm>
-          <a:prstGeom prst="rect">
-            <a:avLst/>
-          </a:prstGeom>
-          <a:noFill/>
-        </p:spPr>
-        <p:txBody>
-          <a:bodyPr wrap="square" anchor="ctr">
-            <a:spAutoFit/>
-          </a:bodyPr>
-          <a:lstStyle/>
-          <a:p>
-            <a:r>
-              <a:rPr sz="900" b="0" i="0">
-                <a:solidFill>
-                  <a:srgbClr val="66788A"/>
-                </a:solidFill>
-                <a:latin typeface="Malgun Gothic"/>
-                <a:ea typeface="Malgun Gothic"/>
-                <a:cs typeface="Malgun Gothic"/>
-              </a:rPr>
-              <a:t>M03-W03-L03  ·  Ribosome과 번역의 단계</a:t>
-            </a:r>
-            <a:r>
-              <a:rPr sz="900" b="1" i="0">
-                <a:solidFill>
-                  <a:srgbClr val="003C71"/>
-                </a:solidFill>
-                <a:latin typeface="Malgun Gothic"/>
-                <a:ea typeface="Malgun Gothic"/>
-                <a:cs typeface="Malgun Gothic"/>
-              </a:rPr>
-              <a:t>      30</a:t>
             </a:r>
           </a:p>
         </p:txBody>
@@ -14567,6 +13944,871 @@
 </p:sld>
 </file>
 
+<file path=ppt/slides/slide3.xml><?xml version="1.0" encoding="utf-8"?>
+<p:sld xmlns:a="http://schemas.openxmlformats.org/drawingml/2006/main" xmlns:p="http://schemas.openxmlformats.org/presentationml/2006/main" xmlns:r="http://schemas.openxmlformats.org/officeDocument/2006/relationships">
+  <p:cSld>
+    <p:spTree>
+      <p:nvGrpSpPr>
+        <p:cNvPr id="1" name=""/>
+        <p:cNvGrpSpPr/>
+        <p:nvPr/>
+      </p:nvGrpSpPr>
+      <p:grpSpPr/>
+      <p:sp>
+        <p:nvSpPr>
+          <p:cNvPr id="2" name="Rectangle 1"/>
+          <p:cNvSpPr/>
+          <p:nvPr/>
+        </p:nvSpPr>
+        <p:spPr>
+          <a:xfrm>
+            <a:off x="0" y="0"/>
+            <a:ext cx="12191695" cy="6858000"/>
+          </a:xfrm>
+          <a:prstGeom prst="rect">
+            <a:avLst/>
+          </a:prstGeom>
+          <a:solidFill>
+            <a:srgbClr val="F5F8F9"/>
+          </a:solidFill>
+          <a:ln>
+            <a:noFill/>
+          </a:ln>
+          <a:effectLst/>
+        </p:spPr>
+        <p:style>
+          <a:lnRef idx="1">
+            <a:schemeClr val="accent1"/>
+          </a:lnRef>
+          <a:fillRef idx="3">
+            <a:schemeClr val="accent1"/>
+          </a:fillRef>
+          <a:effectRef idx="2">
+            <a:schemeClr val="accent1"/>
+          </a:effectRef>
+          <a:fontRef idx="minor">
+            <a:schemeClr val="lt1"/>
+          </a:fontRef>
+        </p:style>
+        <p:txBody>
+          <a:bodyPr rtlCol="0" anchor="ctr"/>
+          <a:lstStyle/>
+          <a:p>
+            <a:pPr algn="ctr"/>
+          </a:p>
+        </p:txBody>
+      </p:sp>
+      <p:sp>
+        <p:nvSpPr>
+          <p:cNvPr id="3" name="Rectangle 2"/>
+          <p:cNvSpPr/>
+          <p:nvPr/>
+        </p:nvSpPr>
+        <p:spPr>
+          <a:xfrm>
+            <a:off x="0" y="0"/>
+            <a:ext cx="12191695" cy="960120"/>
+          </a:xfrm>
+          <a:prstGeom prst="rect">
+            <a:avLst/>
+          </a:prstGeom>
+          <a:solidFill>
+            <a:srgbClr val="003C71"/>
+          </a:solidFill>
+          <a:ln>
+            <a:noFill/>
+          </a:ln>
+          <a:effectLst/>
+        </p:spPr>
+        <p:style>
+          <a:lnRef idx="1">
+            <a:schemeClr val="accent1"/>
+          </a:lnRef>
+          <a:fillRef idx="3">
+            <a:schemeClr val="accent1"/>
+          </a:fillRef>
+          <a:effectRef idx="2">
+            <a:schemeClr val="accent1"/>
+          </a:effectRef>
+          <a:fontRef idx="minor">
+            <a:schemeClr val="lt1"/>
+          </a:fontRef>
+        </p:style>
+        <p:txBody>
+          <a:bodyPr rtlCol="0" anchor="ctr"/>
+          <a:lstStyle/>
+          <a:p>
+            <a:pPr algn="ctr"/>
+          </a:p>
+        </p:txBody>
+      </p:sp>
+      <p:sp>
+        <p:nvSpPr>
+          <p:cNvPr id="4" name="Rectangle 3"/>
+          <p:cNvSpPr/>
+          <p:nvPr/>
+        </p:nvSpPr>
+        <p:spPr>
+          <a:xfrm>
+            <a:off x="0" y="960120"/>
+            <a:ext cx="12191695" cy="54864"/>
+          </a:xfrm>
+          <a:prstGeom prst="rect">
+            <a:avLst/>
+          </a:prstGeom>
+          <a:solidFill>
+            <a:srgbClr val="F2B705"/>
+          </a:solidFill>
+          <a:ln>
+            <a:noFill/>
+          </a:ln>
+          <a:effectLst/>
+        </p:spPr>
+        <p:style>
+          <a:lnRef idx="1">
+            <a:schemeClr val="accent1"/>
+          </a:lnRef>
+          <a:fillRef idx="3">
+            <a:schemeClr val="accent1"/>
+          </a:fillRef>
+          <a:effectRef idx="2">
+            <a:schemeClr val="accent1"/>
+          </a:effectRef>
+          <a:fontRef idx="minor">
+            <a:schemeClr val="lt1"/>
+          </a:fontRef>
+        </p:style>
+        <p:txBody>
+          <a:bodyPr rtlCol="0" anchor="ctr"/>
+          <a:lstStyle/>
+          <a:p>
+            <a:pPr algn="ctr"/>
+          </a:p>
+        </p:txBody>
+      </p:sp>
+      <p:sp>
+        <p:nvSpPr>
+          <p:cNvPr id="5" name="TextBox 4"/>
+          <p:cNvSpPr txBox="1"/>
+          <p:nvPr/>
+        </p:nvSpPr>
+        <p:spPr>
+          <a:xfrm>
+            <a:off x="457200" y="109728"/>
+            <a:ext cx="11247120" cy="777240"/>
+          </a:xfrm>
+          <a:prstGeom prst="rect">
+            <a:avLst/>
+          </a:prstGeom>
+          <a:noFill/>
+        </p:spPr>
+        <p:txBody>
+          <a:bodyPr wrap="square" anchor="ctr">
+            <a:spAutoFit/>
+          </a:bodyPr>
+          <a:lstStyle/>
+          <a:p>
+            <a:r>
+              <a:rPr sz="1300" b="1" i="0">
+                <a:solidFill>
+                  <a:srgbClr val="F2B705"/>
+                </a:solidFill>
+                <a:latin typeface="Malgun Gothic"/>
+                <a:ea typeface="Malgun Gothic"/>
+                <a:cs typeface="Malgun Gothic"/>
+              </a:rPr>
+              <a:t>PREREQ   </a:t>
+            </a:r>
+            <a:r>
+              <a:rPr sz="2400" b="1" i="0">
+                <a:solidFill>
+                  <a:srgbClr val="FFFFFF"/>
+                </a:solidFill>
+                <a:latin typeface="Malgun Gothic"/>
+                <a:ea typeface="Malgun Gothic"/>
+                <a:cs typeface="Malgun Gothic"/>
+              </a:rPr>
+              <a:t>선수지식</a:t>
+            </a:r>
+          </a:p>
+        </p:txBody>
+      </p:sp>
+      <p:sp>
+        <p:nvSpPr>
+          <p:cNvPr id="6" name="TextBox 5"/>
+          <p:cNvSpPr txBox="1"/>
+          <p:nvPr/>
+        </p:nvSpPr>
+        <p:spPr>
+          <a:xfrm>
+            <a:off x="457200" y="6446520"/>
+            <a:ext cx="11247120" cy="301752"/>
+          </a:xfrm>
+          <a:prstGeom prst="rect">
+            <a:avLst/>
+          </a:prstGeom>
+          <a:noFill/>
+        </p:spPr>
+        <p:txBody>
+          <a:bodyPr wrap="square" anchor="ctr">
+            <a:spAutoFit/>
+          </a:bodyPr>
+          <a:lstStyle/>
+          <a:p>
+            <a:r>
+              <a:rPr sz="900" b="0" i="0">
+                <a:solidFill>
+                  <a:srgbClr val="66788A"/>
+                </a:solidFill>
+                <a:latin typeface="Malgun Gothic"/>
+                <a:ea typeface="Malgun Gothic"/>
+                <a:cs typeface="Malgun Gothic"/>
+              </a:rPr>
+              <a:t>M03-W03-L03  ·  Ribosome과 번역의 단계</a:t>
+            </a:r>
+            <a:r>
+              <a:rPr sz="900" b="1" i="0">
+                <a:solidFill>
+                  <a:srgbClr val="003C71"/>
+                </a:solidFill>
+                <a:latin typeface="Malgun Gothic"/>
+                <a:ea typeface="Malgun Gothic"/>
+                <a:cs typeface="Malgun Gothic"/>
+              </a:rPr>
+              <a:t>      3</a:t>
+            </a:r>
+          </a:p>
+        </p:txBody>
+      </p:sp>
+      <p:sp>
+        <p:nvSpPr>
+          <p:cNvPr id="7" name="TextBox 6"/>
+          <p:cNvSpPr txBox="1"/>
+          <p:nvPr/>
+        </p:nvSpPr>
+        <p:spPr>
+          <a:xfrm>
+            <a:off x="640080" y="1280160"/>
+            <a:ext cx="10881360" cy="5029200"/>
+          </a:xfrm>
+          <a:prstGeom prst="rect">
+            <a:avLst/>
+          </a:prstGeom>
+          <a:noFill/>
+        </p:spPr>
+        <p:txBody>
+          <a:bodyPr wrap="square" anchor="t">
+            <a:spAutoFit/>
+          </a:bodyPr>
+          <a:lstStyle/>
+          <a:p>
+            <a:pPr>
+              <a:spcAft>
+                <a:spcPts val="900"/>
+              </a:spcAft>
+            </a:pPr>
+            <a:r>
+              <a:rPr sz="2000" b="1" i="0">
+                <a:solidFill>
+                  <a:srgbClr val="F2B705"/>
+                </a:solidFill>
+                <a:latin typeface="Malgun Gothic"/>
+                <a:ea typeface="Malgun Gothic"/>
+                <a:cs typeface="Malgun Gothic"/>
+              </a:rPr>
+              <a:t>•  </a:t>
+            </a:r>
+            <a:r>
+              <a:rPr sz="2000" b="0" i="0">
+                <a:solidFill>
+                  <a:srgbClr val="11202B"/>
+                </a:solidFill>
+                <a:latin typeface="Malgun Gothic"/>
+                <a:ea typeface="Malgun Gothic"/>
+                <a:cs typeface="Malgun Gothic"/>
+              </a:rPr>
+              <a:t>M03-W03-L02 유전암호와 tRNA의 역할 — 코돈, anticodon, aminoacyl-tRNA의 생성</a:t>
+            </a:r>
+          </a:p>
+          <a:p>
+            <a:pPr>
+              <a:spcAft>
+                <a:spcPts val="900"/>
+              </a:spcAft>
+            </a:pPr>
+            <a:r>
+              <a:rPr sz="2000" b="1" i="0">
+                <a:solidFill>
+                  <a:srgbClr val="F2B705"/>
+                </a:solidFill>
+                <a:latin typeface="Malgun Gothic"/>
+                <a:ea typeface="Malgun Gothic"/>
+                <a:cs typeface="Malgun Gothic"/>
+              </a:rPr>
+              <a:t>•  </a:t>
+            </a:r>
+            <a:r>
+              <a:rPr sz="2000" b="0" i="0">
+                <a:solidFill>
+                  <a:srgbClr val="11202B"/>
+                </a:solidFill>
+                <a:latin typeface="Malgun Gothic"/>
+                <a:ea typeface="Malgun Gothic"/>
+                <a:cs typeface="Malgun Gothic"/>
+              </a:rPr>
+              <a:t>M03-W03-L01 Splicing 이상과 질환 — 성숙 mRNA의 구조, 5' cap과 poly(A)</a:t>
+            </a:r>
+          </a:p>
+          <a:p>
+            <a:pPr>
+              <a:spcAft>
+                <a:spcPts val="900"/>
+              </a:spcAft>
+            </a:pPr>
+            <a:r>
+              <a:rPr sz="2000" b="1" i="0">
+                <a:solidFill>
+                  <a:srgbClr val="F2B705"/>
+                </a:solidFill>
+                <a:latin typeface="Malgun Gothic"/>
+                <a:ea typeface="Malgun Gothic"/>
+                <a:cs typeface="Malgun Gothic"/>
+              </a:rPr>
+              <a:t>•  </a:t>
+            </a:r>
+            <a:r>
+              <a:rPr sz="2000" b="0" i="0">
+                <a:solidFill>
+                  <a:srgbClr val="11202B"/>
+                </a:solidFill>
+                <a:latin typeface="Malgun Gothic"/>
+                <a:ea typeface="Malgun Gothic"/>
+                <a:cs typeface="Malgun Gothic"/>
+              </a:rPr>
+              <a:t>M01-W03-L01 단백질의 1차 구조 — peptide 결합의 성질과 N·C 말단의 정의</a:t>
+            </a:r>
+          </a:p>
+        </p:txBody>
+      </p:sp>
+    </p:spTree>
+  </p:cSld>
+  <p:clrMapOvr>
+    <a:masterClrMapping/>
+  </p:clrMapOvr>
+</p:sld>
+</file>
+
+<file path=ppt/slides/slide30.xml><?xml version="1.0" encoding="utf-8"?>
+<p:sld xmlns:a="http://schemas.openxmlformats.org/drawingml/2006/main" xmlns:p="http://schemas.openxmlformats.org/presentationml/2006/main" xmlns:r="http://schemas.openxmlformats.org/officeDocument/2006/relationships">
+  <p:cSld>
+    <p:spTree>
+      <p:nvGrpSpPr>
+        <p:cNvPr id="1" name=""/>
+        <p:cNvGrpSpPr/>
+        <p:nvPr/>
+      </p:nvGrpSpPr>
+      <p:grpSpPr/>
+      <p:sp>
+        <p:nvSpPr>
+          <p:cNvPr id="2" name="Rectangle 1"/>
+          <p:cNvSpPr/>
+          <p:nvPr/>
+        </p:nvSpPr>
+        <p:spPr>
+          <a:xfrm>
+            <a:off x="0" y="0"/>
+            <a:ext cx="12191695" cy="6858000"/>
+          </a:xfrm>
+          <a:prstGeom prst="rect">
+            <a:avLst/>
+          </a:prstGeom>
+          <a:solidFill>
+            <a:srgbClr val="F5F8F9"/>
+          </a:solidFill>
+          <a:ln>
+            <a:noFill/>
+          </a:ln>
+          <a:effectLst/>
+        </p:spPr>
+        <p:style>
+          <a:lnRef idx="1">
+            <a:schemeClr val="accent1"/>
+          </a:lnRef>
+          <a:fillRef idx="3">
+            <a:schemeClr val="accent1"/>
+          </a:fillRef>
+          <a:effectRef idx="2">
+            <a:schemeClr val="accent1"/>
+          </a:effectRef>
+          <a:fontRef idx="minor">
+            <a:schemeClr val="lt1"/>
+          </a:fontRef>
+        </p:style>
+        <p:txBody>
+          <a:bodyPr rtlCol="0" anchor="ctr"/>
+          <a:lstStyle/>
+          <a:p>
+            <a:pPr algn="ctr"/>
+          </a:p>
+        </p:txBody>
+      </p:sp>
+      <p:sp>
+        <p:nvSpPr>
+          <p:cNvPr id="3" name="Rectangle 2"/>
+          <p:cNvSpPr/>
+          <p:nvPr/>
+        </p:nvSpPr>
+        <p:spPr>
+          <a:xfrm>
+            <a:off x="0" y="0"/>
+            <a:ext cx="12191695" cy="960120"/>
+          </a:xfrm>
+          <a:prstGeom prst="rect">
+            <a:avLst/>
+          </a:prstGeom>
+          <a:solidFill>
+            <a:srgbClr val="003C71"/>
+          </a:solidFill>
+          <a:ln>
+            <a:noFill/>
+          </a:ln>
+          <a:effectLst/>
+        </p:spPr>
+        <p:style>
+          <a:lnRef idx="1">
+            <a:schemeClr val="accent1"/>
+          </a:lnRef>
+          <a:fillRef idx="3">
+            <a:schemeClr val="accent1"/>
+          </a:fillRef>
+          <a:effectRef idx="2">
+            <a:schemeClr val="accent1"/>
+          </a:effectRef>
+          <a:fontRef idx="minor">
+            <a:schemeClr val="lt1"/>
+          </a:fontRef>
+        </p:style>
+        <p:txBody>
+          <a:bodyPr rtlCol="0" anchor="ctr"/>
+          <a:lstStyle/>
+          <a:p>
+            <a:pPr algn="ctr"/>
+          </a:p>
+        </p:txBody>
+      </p:sp>
+      <p:sp>
+        <p:nvSpPr>
+          <p:cNvPr id="4" name="Rectangle 3"/>
+          <p:cNvSpPr/>
+          <p:nvPr/>
+        </p:nvSpPr>
+        <p:spPr>
+          <a:xfrm>
+            <a:off x="0" y="960120"/>
+            <a:ext cx="12191695" cy="54864"/>
+          </a:xfrm>
+          <a:prstGeom prst="rect">
+            <a:avLst/>
+          </a:prstGeom>
+          <a:solidFill>
+            <a:srgbClr val="F2B705"/>
+          </a:solidFill>
+          <a:ln>
+            <a:noFill/>
+          </a:ln>
+          <a:effectLst/>
+        </p:spPr>
+        <p:style>
+          <a:lnRef idx="1">
+            <a:schemeClr val="accent1"/>
+          </a:lnRef>
+          <a:fillRef idx="3">
+            <a:schemeClr val="accent1"/>
+          </a:fillRef>
+          <a:effectRef idx="2">
+            <a:schemeClr val="accent1"/>
+          </a:effectRef>
+          <a:fontRef idx="minor">
+            <a:schemeClr val="lt1"/>
+          </a:fontRef>
+        </p:style>
+        <p:txBody>
+          <a:bodyPr rtlCol="0" anchor="ctr"/>
+          <a:lstStyle/>
+          <a:p>
+            <a:pPr algn="ctr"/>
+          </a:p>
+        </p:txBody>
+      </p:sp>
+      <p:sp>
+        <p:nvSpPr>
+          <p:cNvPr id="5" name="TextBox 4"/>
+          <p:cNvSpPr txBox="1"/>
+          <p:nvPr/>
+        </p:nvSpPr>
+        <p:spPr>
+          <a:xfrm>
+            <a:off x="457200" y="109728"/>
+            <a:ext cx="11247120" cy="777240"/>
+          </a:xfrm>
+          <a:prstGeom prst="rect">
+            <a:avLst/>
+          </a:prstGeom>
+          <a:noFill/>
+        </p:spPr>
+        <p:txBody>
+          <a:bodyPr wrap="square" anchor="ctr">
+            <a:spAutoFit/>
+          </a:bodyPr>
+          <a:lstStyle/>
+          <a:p>
+            <a:r>
+              <a:rPr sz="1300" b="1" i="0">
+                <a:solidFill>
+                  <a:srgbClr val="F2B705"/>
+                </a:solidFill>
+                <a:latin typeface="Malgun Gothic"/>
+                <a:ea typeface="Malgun Gothic"/>
+                <a:cs typeface="Malgun Gothic"/>
+              </a:rPr>
+              <a:t>07   </a:t>
+            </a:r>
+            <a:r>
+              <a:rPr sz="2400" b="1" i="0">
+                <a:solidFill>
+                  <a:srgbClr val="FFFFFF"/>
+                </a:solidFill>
+                <a:latin typeface="Malgun Gothic"/>
+                <a:ea typeface="Malgun Gothic"/>
+                <a:cs typeface="Malgun Gothic"/>
+              </a:rPr>
+              <a:t>7. 번역을 표적으로 하는 항생제</a:t>
+            </a:r>
+          </a:p>
+        </p:txBody>
+      </p:sp>
+      <p:sp>
+        <p:nvSpPr>
+          <p:cNvPr id="6" name="TextBox 5"/>
+          <p:cNvSpPr txBox="1"/>
+          <p:nvPr/>
+        </p:nvSpPr>
+        <p:spPr>
+          <a:xfrm>
+            <a:off x="457200" y="6446520"/>
+            <a:ext cx="11247120" cy="301752"/>
+          </a:xfrm>
+          <a:prstGeom prst="rect">
+            <a:avLst/>
+          </a:prstGeom>
+          <a:noFill/>
+        </p:spPr>
+        <p:txBody>
+          <a:bodyPr wrap="square" anchor="ctr">
+            <a:spAutoFit/>
+          </a:bodyPr>
+          <a:lstStyle/>
+          <a:p>
+            <a:r>
+              <a:rPr sz="900" b="0" i="0">
+                <a:solidFill>
+                  <a:srgbClr val="66788A"/>
+                </a:solidFill>
+                <a:latin typeface="Malgun Gothic"/>
+                <a:ea typeface="Malgun Gothic"/>
+                <a:cs typeface="Malgun Gothic"/>
+              </a:rPr>
+              <a:t>M03-W03-L03  ·  Ribosome과 번역의 단계</a:t>
+            </a:r>
+            <a:r>
+              <a:rPr sz="900" b="1" i="0">
+                <a:solidFill>
+                  <a:srgbClr val="003C71"/>
+                </a:solidFill>
+                <a:latin typeface="Malgun Gothic"/>
+                <a:ea typeface="Malgun Gothic"/>
+                <a:cs typeface="Malgun Gothic"/>
+              </a:rPr>
+              <a:t>      30</a:t>
+            </a:r>
+          </a:p>
+        </p:txBody>
+      </p:sp>
+      <p:sp>
+        <p:nvSpPr>
+          <p:cNvPr id="7" name="TextBox 6"/>
+          <p:cNvSpPr txBox="1"/>
+          <p:nvPr/>
+        </p:nvSpPr>
+        <p:spPr>
+          <a:xfrm>
+            <a:off x="640080" y="1280160"/>
+            <a:ext cx="10881360" cy="5029200"/>
+          </a:xfrm>
+          <a:prstGeom prst="rect">
+            <a:avLst/>
+          </a:prstGeom>
+          <a:noFill/>
+        </p:spPr>
+        <p:txBody>
+          <a:bodyPr wrap="square" anchor="t">
+            <a:spAutoFit/>
+          </a:bodyPr>
+          <a:lstStyle/>
+          <a:p>
+            <a:pPr>
+              <a:spcAft>
+                <a:spcPts val="900"/>
+              </a:spcAft>
+            </a:pPr>
+            <a:r>
+              <a:rPr sz="1400" b="1" i="0">
+                <a:solidFill>
+                  <a:srgbClr val="F2B705"/>
+                </a:solidFill>
+                <a:latin typeface="Malgun Gothic"/>
+                <a:ea typeface="Malgun Gothic"/>
+                <a:cs typeface="Malgun Gothic"/>
+              </a:rPr>
+              <a:t>•  </a:t>
+            </a:r>
+            <a:r>
+              <a:rPr sz="1400" b="0" i="0">
+                <a:solidFill>
+                  <a:srgbClr val="11202B"/>
+                </a:solidFill>
+                <a:latin typeface="Malgun Gothic"/>
+                <a:ea typeface="Malgun Gothic"/>
+                <a:cs typeface="Malgun Gothic"/>
+              </a:rPr>
+              <a:t>작용 지점을 알면 임상적 성질이 설명된다.</a:t>
+            </a:r>
+          </a:p>
+          <a:p>
+            <a:pPr>
+              <a:spcAft>
+                <a:spcPts val="900"/>
+              </a:spcAft>
+            </a:pPr>
+            <a:r>
+              <a:rPr sz="1400" b="1" i="0">
+                <a:solidFill>
+                  <a:srgbClr val="F2B705"/>
+                </a:solidFill>
+                <a:latin typeface="Malgun Gothic"/>
+                <a:ea typeface="Malgun Gothic"/>
+                <a:cs typeface="Malgun Gothic"/>
+              </a:rPr>
+              <a:t>•  </a:t>
+            </a:r>
+            <a:r>
+              <a:rPr sz="1400" b="1" i="0">
+                <a:solidFill>
+                  <a:srgbClr val="11202B"/>
+                </a:solidFill>
+                <a:latin typeface="Malgun Gothic"/>
+                <a:ea typeface="Malgun Gothic"/>
+                <a:cs typeface="Malgun Gothic"/>
+              </a:rPr>
+              <a:t>Aminoglycoside만 살균 작용을 보인다.</a:t>
+            </a:r>
+            <a:r>
+              <a:rPr sz="1400" b="0" i="0">
+                <a:solidFill>
+                  <a:srgbClr val="11202B"/>
+                </a:solidFill>
+                <a:latin typeface="Malgun Gothic"/>
+                <a:ea typeface="Malgun Gothic"/>
+                <a:cs typeface="Malgun Gothic"/>
+              </a:rPr>
+              <a:t> 단순히 번역을 멈추는 것이 아니라 코돈을 잘못 읽게 해 기능이 없는 단백질을 만들게 하고, 그 단백질이 세균 막에 끼어 들어 약물이 더 들어오게 만드는 자가증폭이 일어나기 때문이다.</a:t>
+            </a:r>
+          </a:p>
+          <a:p>
+            <a:pPr>
+              <a:spcAft>
+                <a:spcPts val="900"/>
+              </a:spcAft>
+            </a:pPr>
+            <a:r>
+              <a:rPr sz="1400" b="1" i="0">
+                <a:solidFill>
+                  <a:srgbClr val="F2B705"/>
+                </a:solidFill>
+                <a:latin typeface="Malgun Gothic"/>
+                <a:ea typeface="Malgun Gothic"/>
+                <a:cs typeface="Malgun Gothic"/>
+              </a:rPr>
+              <a:t>•  </a:t>
+            </a:r>
+            <a:r>
+              <a:rPr sz="1400" b="1" i="0">
+                <a:solidFill>
+                  <a:srgbClr val="11202B"/>
+                </a:solidFill>
+                <a:latin typeface="Malgun Gothic"/>
+                <a:ea typeface="Malgun Gothic"/>
+                <a:cs typeface="Malgun Gothic"/>
+              </a:rPr>
+              <a:t>Macrolide와 clindamycin은 결합 부위가 겹친다.</a:t>
+            </a:r>
+            <a:r>
+              <a:rPr sz="1400" b="0" i="0">
+                <a:solidFill>
+                  <a:srgbClr val="11202B"/>
+                </a:solidFill>
+                <a:latin typeface="Malgun Gothic"/>
+                <a:ea typeface="Malgun Gothic"/>
+                <a:cs typeface="Malgun Gothic"/>
+              </a:rPr>
+              <a:t> 그래서 23S rRNA를 methylation하는 </a:t>
+            </a:r>
+            <a:r>
+              <a:rPr sz="1400" b="1" i="0">
+                <a:solidFill>
+                  <a:srgbClr val="11202B"/>
+                </a:solidFill>
+                <a:latin typeface="Malgun Gothic"/>
+                <a:ea typeface="Malgun Gothic"/>
+                <a:cs typeface="Malgun Gothic"/>
+              </a:rPr>
+              <a:t>erm</a:t>
+            </a:r>
+            <a:r>
+              <a:rPr sz="1400" b="0" i="0">
+                <a:solidFill>
+                  <a:srgbClr val="11202B"/>
+                </a:solidFill>
+                <a:latin typeface="Malgun Gothic"/>
+                <a:ea typeface="Malgun Gothic"/>
+                <a:cs typeface="Malgun Gothic"/>
+              </a:rPr>
+              <a:t> 유전자 하나로 macrolide, lincosamide, streptogramin에 동시에 저항성이 생긴다(MLS 저항성). 임상에서 erythromycin 저항성이 확인된 균주의 clindamycin 감수성을 D-test로 확인하는 근거다.</a:t>
+            </a:r>
+          </a:p>
+          <a:p>
+            <a:pPr>
+              <a:spcAft>
+                <a:spcPts val="900"/>
+              </a:spcAft>
+            </a:pPr>
+            <a:r>
+              <a:rPr sz="1400" b="1" i="0">
+                <a:solidFill>
+                  <a:srgbClr val="F2B705"/>
+                </a:solidFill>
+                <a:latin typeface="Malgun Gothic"/>
+                <a:ea typeface="Malgun Gothic"/>
+                <a:cs typeface="Malgun Gothic"/>
+              </a:rPr>
+              <a:t>•  </a:t>
+            </a:r>
+            <a:r>
+              <a:rPr sz="1400" b="1" i="0">
+                <a:solidFill>
+                  <a:srgbClr val="11202B"/>
+                </a:solidFill>
+                <a:latin typeface="Malgun Gothic"/>
+                <a:ea typeface="Malgun Gothic"/>
+                <a:cs typeface="Malgun Gothic"/>
+              </a:rPr>
+              <a:t>번역 저해제 중 일부는 농도에 따라 정균과 살균이 바뀌고</a:t>
+            </a:r>
+            <a:r>
+              <a:rPr sz="1400" b="0" i="0">
+                <a:solidFill>
+                  <a:srgbClr val="11202B"/>
+                </a:solidFill>
+                <a:latin typeface="Malgun Gothic"/>
+                <a:ea typeface="Malgun Gothic"/>
+                <a:cs typeface="Malgun Gothic"/>
+              </a:rPr>
+              <a:t>, 세포 내 농축 여부에 따라 세포내 세균에 대한 효과가 달라진다. Macrolide와 tetracycline이 세포 내 농도가 높아 비전형 폐렴 원인균에 쓰이는 이유다.</a:t>
+            </a:r>
+          </a:p>
+          <a:p>
+            <a:pPr>
+              <a:spcAft>
+                <a:spcPts val="900"/>
+              </a:spcAft>
+            </a:pPr>
+            <a:r>
+              <a:rPr sz="1400" b="1" i="0">
+                <a:solidFill>
+                  <a:srgbClr val="F2B705"/>
+                </a:solidFill>
+                <a:latin typeface="Malgun Gothic"/>
+                <a:ea typeface="Malgun Gothic"/>
+                <a:cs typeface="Malgun Gothic"/>
+              </a:rPr>
+              <a:t>•  </a:t>
+            </a:r>
+            <a:r>
+              <a:rPr sz="1400" b="0" i="0">
+                <a:solidFill>
+                  <a:srgbClr val="11202B"/>
+                </a:solidFill>
+                <a:latin typeface="Malgun Gothic"/>
+                <a:ea typeface="Malgun Gothic"/>
+                <a:cs typeface="Malgun Gothic"/>
+              </a:rPr>
+              <a:t>실험실에서 쓰이는 저해제도 작용 지점으로 구분된다. </a:t>
+            </a:r>
+            <a:r>
+              <a:rPr sz="1400" b="1" i="0">
+                <a:solidFill>
+                  <a:srgbClr val="11202B"/>
+                </a:solidFill>
+                <a:latin typeface="Malgun Gothic"/>
+                <a:ea typeface="Malgun Gothic"/>
+                <a:cs typeface="Malgun Gothic"/>
+              </a:rPr>
+              <a:t>Puromycin</a:t>
+            </a:r>
+            <a:r>
+              <a:rPr sz="1400" b="0" i="0">
+                <a:solidFill>
+                  <a:srgbClr val="11202B"/>
+                </a:solidFill>
+                <a:latin typeface="Malgun Gothic"/>
+                <a:ea typeface="Malgun Gothic"/>
+                <a:cs typeface="Malgun Gothic"/>
+              </a:rPr>
+              <a:t>은 aminoacyl-tRNA의 구조 유사체로 A 자리에 들어가 사슬을 조기 방출시키며 원핵과 진핵 모두에 작용한다. </a:t>
+            </a:r>
+            <a:r>
+              <a:rPr sz="1400" b="1" i="0">
+                <a:solidFill>
+                  <a:srgbClr val="11202B"/>
+                </a:solidFill>
+                <a:latin typeface="Malgun Gothic"/>
+                <a:ea typeface="Malgun Gothic"/>
+                <a:cs typeface="Malgun Gothic"/>
+              </a:rPr>
+              <a:t>Cycloheximide</a:t>
+            </a:r>
+            <a:r>
+              <a:rPr sz="1400" b="0" i="0">
+                <a:solidFill>
+                  <a:srgbClr val="11202B"/>
+                </a:solidFill>
+                <a:latin typeface="Malgun Gothic"/>
+                <a:ea typeface="Malgun Gothic"/>
+                <a:cs typeface="Malgun Gothic"/>
+              </a:rPr>
+              <a:t>는 진핵 60S에 결합해 translocation을 막으므로 치료에 쓸 수 없고 실험 도구로만 쓴다.</a:t>
+            </a:r>
+          </a:p>
+        </p:txBody>
+      </p:sp>
+    </p:spTree>
+  </p:cSld>
+  <p:clrMapOvr>
+    <a:masterClrMapping/>
+  </p:clrMapOvr>
+</p:sld>
+</file>
+
 <file path=ppt/slides/slide31.xml><?xml version="1.0" encoding="utf-8"?>
 <p:sld xmlns:a="http://schemas.openxmlformats.org/drawingml/2006/main" xmlns:p="http://schemas.openxmlformats.org/presentationml/2006/main" xmlns:r="http://schemas.openxmlformats.org/officeDocument/2006/relationships">
   <p:cSld>
@@ -14740,7 +14982,7 @@
                 <a:ea typeface="Malgun Gothic"/>
                 <a:cs typeface="Malgun Gothic"/>
               </a:rPr>
-              <a:t>07   </a:t>
+              <a:t>08   </a:t>
             </a:r>
             <a:r>
               <a:rPr sz="2400" b="1" i="0">
@@ -14751,7 +14993,7 @@
                 <a:ea typeface="Malgun Gothic"/>
                 <a:cs typeface="Malgun Gothic"/>
               </a:rPr>
-              <a:t>7. 번역을 표적으로 하는 항생제</a:t>
+              <a:t>8. 선택독성의 한계와 임상적 결과</a:t>
             </a:r>
           </a:p>
         </p:txBody>
@@ -14850,7 +15092,7 @@
                 <a:ea typeface="Malgun Gothic"/>
                 <a:cs typeface="Malgun Gothic"/>
               </a:rPr>
-              <a:t>작용 지점을 알면 임상적 성질이 설명된다.</a:t>
+              <a:t>항생제의 선택독성은 완전하지 않다. 한계가 생기는 지점은 두 곳이다.</a:t>
             </a:r>
           </a:p>
           <a:p>
@@ -14879,7 +15121,7 @@
                 <a:ea typeface="Malgun Gothic"/>
                 <a:cs typeface="Malgun Gothic"/>
               </a:rPr>
-              <a:t>Aminoglycoside만 살균 작용을 보인다.</a:t>
+              <a:t>(1) 미토콘드리아 ribosome</a:t>
             </a:r>
             <a:r>
               <a:rPr sz="1400" b="0" i="0">
@@ -14890,7 +15132,7 @@
                 <a:ea typeface="Malgun Gothic"/>
                 <a:cs typeface="Malgun Gothic"/>
               </a:rPr>
-              <a:t> 단순히 번역을 멈추는 것이 아니라 코돈을 잘못 읽게 해 기능이 없는 단백질을 만들게 하고, 그 단백질이 세균 막에 끼어 들어 약물이 더 들어오게 만드는 자가증폭이 일어나기 때문이다.</a:t>
+              <a:t> 미토콘드리아 ribosome의 rRNA는 세균형에 가까우므로 일부 항생제가 여기에도 결합한다.</a:t>
             </a:r>
           </a:p>
           <a:p>
@@ -14919,7 +15161,7 @@
                 <a:ea typeface="Malgun Gothic"/>
                 <a:cs typeface="Malgun Gothic"/>
               </a:rPr>
-              <a:t>Macrolide와 clindamycin은 결합 부위가 겹친다.</a:t>
+              <a:t>Linezolid</a:t>
             </a:r>
             <a:r>
               <a:rPr sz="1400" b="0" i="0">
@@ -14930,29 +15172,7 @@
                 <a:ea typeface="Malgun Gothic"/>
                 <a:cs typeface="Malgun Gothic"/>
               </a:rPr>
-              <a:t> 그래서 23S rRNA를 methylation하는 </a:t>
-            </a:r>
-            <a:r>
-              <a:rPr sz="1400" b="1" i="0">
-                <a:solidFill>
-                  <a:srgbClr val="11202B"/>
-                </a:solidFill>
-                <a:latin typeface="Malgun Gothic"/>
-                <a:ea typeface="Malgun Gothic"/>
-                <a:cs typeface="Malgun Gothic"/>
-              </a:rPr>
-              <a:t>erm</a:t>
-            </a:r>
-            <a:r>
-              <a:rPr sz="1400" b="0" i="0">
-                <a:solidFill>
-                  <a:srgbClr val="11202B"/>
-                </a:solidFill>
-                <a:latin typeface="Malgun Gothic"/>
-                <a:ea typeface="Malgun Gothic"/>
-                <a:cs typeface="Malgun Gothic"/>
-              </a:rPr>
-              <a:t> 유전자 하나로 macrolide, lincosamide, streptogramin에 동시에 저항성이 생긴다(MLS 저항성). 임상에서 erythromycin 저항성이 확인된 균주의 clindamycin 감수성을 D-test로 확인하는 근거다.</a:t>
+              <a:t>는 미토콘드리아 단백질 합성을 억제해 장기 투여 시 골수 억제, lactate 산증, 시신경병, 말초신경병을 일으킨다. 2주를 넘겨 쓸 때 혈구 수를 감시하는 근거다.</a:t>
             </a:r>
           </a:p>
           <a:p>
@@ -14981,7 +15201,7 @@
                 <a:ea typeface="Malgun Gothic"/>
                 <a:cs typeface="Malgun Gothic"/>
               </a:rPr>
-              <a:t>번역 저해제 중 일부는 농도에 따라 정균과 살균이 바뀌고</a:t>
+              <a:t>Chloramphenicol</a:t>
             </a:r>
             <a:r>
               <a:rPr sz="1400" b="0" i="0">
@@ -14992,7 +15212,29 @@
                 <a:ea typeface="Malgun Gothic"/>
                 <a:cs typeface="Malgun Gothic"/>
               </a:rPr>
-              <a:t>, 세포 내 농축 여부에 따라 세포내 세균에 대한 효과가 달라진다. Macrolide와 tetracycline이 세포 내 농도가 높아 비전형 폐렴 원인균에 쓰이는 이유다.</a:t>
+              <a:t>은 가역적 골수 억제(용량 의존적)와 비가역적 무형성 빈혈(용량 비의존적)을 일으킨다. 신생아에서는 glucuronidation 능력이 낮아 축적되어 </a:t>
+            </a:r>
+            <a:r>
+              <a:rPr sz="1400" b="1" i="0">
+                <a:solidFill>
+                  <a:srgbClr val="11202B"/>
+                </a:solidFill>
+                <a:latin typeface="Malgun Gothic"/>
+                <a:ea typeface="Malgun Gothic"/>
+                <a:cs typeface="Malgun Gothic"/>
+              </a:rPr>
+              <a:t>gray baby syndrome</a:t>
+            </a:r>
+            <a:r>
+              <a:rPr sz="1400" b="0" i="0">
+                <a:solidFill>
+                  <a:srgbClr val="11202B"/>
+                </a:solidFill>
+                <a:latin typeface="Malgun Gothic"/>
+                <a:ea typeface="Malgun Gothic"/>
+                <a:cs typeface="Malgun Gothic"/>
+              </a:rPr>
+              <a:t>이 생긴다.</a:t>
             </a:r>
           </a:p>
           <a:p>
@@ -15013,6 +15255,17 @@
               <a:t>•  </a:t>
             </a:r>
             <a:r>
+              <a:rPr sz="1400" b="1" i="0">
+                <a:solidFill>
+                  <a:srgbClr val="11202B"/>
+                </a:solidFill>
+                <a:latin typeface="Malgun Gothic"/>
+                <a:ea typeface="Malgun Gothic"/>
+                <a:cs typeface="Malgun Gothic"/>
+              </a:rPr>
+              <a:t>Aminoglycoside</a:t>
+            </a:r>
+            <a:r>
               <a:rPr sz="1400" b="0" i="0">
                 <a:solidFill>
                   <a:srgbClr val="11202B"/>
@@ -15021,7 +15274,7 @@
                 <a:ea typeface="Malgun Gothic"/>
                 <a:cs typeface="Malgun Gothic"/>
               </a:rPr>
-              <a:t>실험실에서 쓰이는 저해제도 작용 지점으로 구분된다. </a:t>
+              <a:t>의 비가역적 난청은 내이 유모세포의 미토콘드리아 ribosome 저해와 관련된다. *MT-RNR1*의 </a:t>
             </a:r>
             <a:r>
               <a:rPr sz="1400" b="1" i="0">
@@ -15032,7 +15285,7 @@
                 <a:ea typeface="Malgun Gothic"/>
                 <a:cs typeface="Malgun Gothic"/>
               </a:rPr>
-              <a:t>Puromycin</a:t>
+              <a:t>m.1555A&gt;G</a:t>
             </a:r>
             <a:r>
               <a:rPr sz="1400" b="0" i="0">
@@ -15043,7 +15296,7 @@
                 <a:ea typeface="Malgun Gothic"/>
                 <a:cs typeface="Malgun Gothic"/>
               </a:rPr>
-              <a:t>은 aminoacyl-tRNA의 구조 유사체로 A 자리에 들어가 사슬을 조기 방출시키며 원핵과 진핵 모두에 작용한다. </a:t>
+              <a:t> 변이가 있으면 12S rRNA 구조가 세균형에 더 가까워져 </a:t>
             </a:r>
             <a:r>
               <a:rPr sz="1400" b="1" i="0">
@@ -15054,7 +15307,7 @@
                 <a:ea typeface="Malgun Gothic"/>
                 <a:cs typeface="Malgun Gothic"/>
               </a:rPr>
-              <a:t>Cycloheximide</a:t>
+              <a:t>치료 용량에서도 비가역적 난청이 생긴다.</a:t>
             </a:r>
             <a:r>
               <a:rPr sz="1400" b="0" i="0">
@@ -15065,7 +15318,58 @@
                 <a:ea typeface="Malgun Gothic"/>
                 <a:cs typeface="Malgun Gothic"/>
               </a:rPr>
-              <a:t>는 진핵 60S에 결합해 translocation을 막으므로 치료에 쓸 수 없고 실험 도구로만 쓴다.</a:t>
+              <a:t> 모계 유전이므로 가족력이 있으면 투여 전 유전 검사를 고려한다.</a:t>
+            </a:r>
+          </a:p>
+          <a:p>
+            <a:pPr>
+              <a:spcAft>
+                <a:spcPts val="900"/>
+              </a:spcAft>
+            </a:pPr>
+            <a:r>
+              <a:rPr sz="1400" b="1" i="0">
+                <a:solidFill>
+                  <a:srgbClr val="F2B705"/>
+                </a:solidFill>
+                <a:latin typeface="Malgun Gothic"/>
+                <a:ea typeface="Malgun Gothic"/>
+                <a:cs typeface="Malgun Gothic"/>
+              </a:rPr>
+              <a:t>•  </a:t>
+            </a:r>
+            <a:r>
+              <a:rPr sz="1400" b="1" i="0">
+                <a:solidFill>
+                  <a:srgbClr val="11202B"/>
+                </a:solidFill>
+                <a:latin typeface="Malgun Gothic"/>
+                <a:ea typeface="Malgun Gothic"/>
+                <a:cs typeface="Malgun Gothic"/>
+              </a:rPr>
+              <a:t>(2) 조직 축적과 다른 기전의 독성</a:t>
+            </a:r>
+            <a:r>
+              <a:rPr sz="1400" b="0" i="0">
+                <a:solidFill>
+                  <a:srgbClr val="11202B"/>
+                </a:solidFill>
+                <a:latin typeface="Malgun Gothic"/>
+                <a:ea typeface="Malgun Gothic"/>
+                <a:cs typeface="Malgun Gothic"/>
+              </a:rPr>
+              <a:t> Aminoglycoside의 신독성은 근위 세뇨관 세포가 약물을 흡수해 축적하기 때문이고, tetracycline의 치아 변색과 성장판 영향은 칼슘과의 결합 때문이다. </a:t>
+            </a:r>
+            <a:r>
+              <a:rPr sz="1400" b="1" i="0">
+                <a:solidFill>
+                  <a:srgbClr val="11202B"/>
+                </a:solidFill>
+                <a:latin typeface="Malgun Gothic"/>
+                <a:ea typeface="Malgun Gothic"/>
+                <a:cs typeface="Malgun Gothic"/>
+              </a:rPr>
+              <a:t>이 독성은 ribosome 선택성과 무관하므로 약물의 구조에서 따로 설명해야 한다.</a:t>
             </a:r>
           </a:p>
         </p:txBody>
@@ -15310,579 +15614,6 @@
                 <a:cs typeface="Malgun Gothic"/>
               </a:rPr>
               <a:t>      32</a:t>
-            </a:r>
-          </a:p>
-        </p:txBody>
-      </p:sp>
-      <p:sp>
-        <p:nvSpPr>
-          <p:cNvPr id="7" name="TextBox 6"/>
-          <p:cNvSpPr txBox="1"/>
-          <p:nvPr/>
-        </p:nvSpPr>
-        <p:spPr>
-          <a:xfrm>
-            <a:off x="640080" y="1280160"/>
-            <a:ext cx="10881360" cy="5029200"/>
-          </a:xfrm>
-          <a:prstGeom prst="rect">
-            <a:avLst/>
-          </a:prstGeom>
-          <a:noFill/>
-        </p:spPr>
-        <p:txBody>
-          <a:bodyPr wrap="square" anchor="t">
-            <a:spAutoFit/>
-          </a:bodyPr>
-          <a:lstStyle/>
-          <a:p>
-            <a:pPr>
-              <a:spcAft>
-                <a:spcPts val="900"/>
-              </a:spcAft>
-            </a:pPr>
-            <a:r>
-              <a:rPr sz="1400" b="1" i="0">
-                <a:solidFill>
-                  <a:srgbClr val="F2B705"/>
-                </a:solidFill>
-                <a:latin typeface="Malgun Gothic"/>
-                <a:ea typeface="Malgun Gothic"/>
-                <a:cs typeface="Malgun Gothic"/>
-              </a:rPr>
-              <a:t>•  </a:t>
-            </a:r>
-            <a:r>
-              <a:rPr sz="1400" b="0" i="0">
-                <a:solidFill>
-                  <a:srgbClr val="11202B"/>
-                </a:solidFill>
-                <a:latin typeface="Malgun Gothic"/>
-                <a:ea typeface="Malgun Gothic"/>
-                <a:cs typeface="Malgun Gothic"/>
-              </a:rPr>
-              <a:t>항생제의 선택독성은 완전하지 않다. 한계가 생기는 지점은 두 곳이다.</a:t>
-            </a:r>
-          </a:p>
-          <a:p>
-            <a:pPr>
-              <a:spcAft>
-                <a:spcPts val="900"/>
-              </a:spcAft>
-            </a:pPr>
-            <a:r>
-              <a:rPr sz="1400" b="1" i="0">
-                <a:solidFill>
-                  <a:srgbClr val="F2B705"/>
-                </a:solidFill>
-                <a:latin typeface="Malgun Gothic"/>
-                <a:ea typeface="Malgun Gothic"/>
-                <a:cs typeface="Malgun Gothic"/>
-              </a:rPr>
-              <a:t>•  </a:t>
-            </a:r>
-            <a:r>
-              <a:rPr sz="1400" b="1" i="0">
-                <a:solidFill>
-                  <a:srgbClr val="11202B"/>
-                </a:solidFill>
-                <a:latin typeface="Malgun Gothic"/>
-                <a:ea typeface="Malgun Gothic"/>
-                <a:cs typeface="Malgun Gothic"/>
-              </a:rPr>
-              <a:t>(1) 미토콘드리아 ribosome</a:t>
-            </a:r>
-            <a:r>
-              <a:rPr sz="1400" b="0" i="0">
-                <a:solidFill>
-                  <a:srgbClr val="11202B"/>
-                </a:solidFill>
-                <a:latin typeface="Malgun Gothic"/>
-                <a:ea typeface="Malgun Gothic"/>
-                <a:cs typeface="Malgun Gothic"/>
-              </a:rPr>
-              <a:t> 미토콘드리아 ribosome의 rRNA는 세균형에 가까우므로 일부 항생제가 여기에도 결합한다.</a:t>
-            </a:r>
-          </a:p>
-          <a:p>
-            <a:pPr>
-              <a:spcAft>
-                <a:spcPts val="900"/>
-              </a:spcAft>
-            </a:pPr>
-            <a:r>
-              <a:rPr sz="1400" b="1" i="0">
-                <a:solidFill>
-                  <a:srgbClr val="F2B705"/>
-                </a:solidFill>
-                <a:latin typeface="Malgun Gothic"/>
-                <a:ea typeface="Malgun Gothic"/>
-                <a:cs typeface="Malgun Gothic"/>
-              </a:rPr>
-              <a:t>•  </a:t>
-            </a:r>
-            <a:r>
-              <a:rPr sz="1400" b="1" i="0">
-                <a:solidFill>
-                  <a:srgbClr val="11202B"/>
-                </a:solidFill>
-                <a:latin typeface="Malgun Gothic"/>
-                <a:ea typeface="Malgun Gothic"/>
-                <a:cs typeface="Malgun Gothic"/>
-              </a:rPr>
-              <a:t>Linezolid</a:t>
-            </a:r>
-            <a:r>
-              <a:rPr sz="1400" b="0" i="0">
-                <a:solidFill>
-                  <a:srgbClr val="11202B"/>
-                </a:solidFill>
-                <a:latin typeface="Malgun Gothic"/>
-                <a:ea typeface="Malgun Gothic"/>
-                <a:cs typeface="Malgun Gothic"/>
-              </a:rPr>
-              <a:t>는 미토콘드리아 단백질 합성을 억제해 장기 투여 시 골수 억제, lactate 산증, 시신경병, 말초신경병을 일으킨다. 2주를 넘겨 쓸 때 혈구 수를 감시하는 근거다.</a:t>
-            </a:r>
-          </a:p>
-          <a:p>
-            <a:pPr>
-              <a:spcAft>
-                <a:spcPts val="900"/>
-              </a:spcAft>
-            </a:pPr>
-            <a:r>
-              <a:rPr sz="1400" b="1" i="0">
-                <a:solidFill>
-                  <a:srgbClr val="F2B705"/>
-                </a:solidFill>
-                <a:latin typeface="Malgun Gothic"/>
-                <a:ea typeface="Malgun Gothic"/>
-                <a:cs typeface="Malgun Gothic"/>
-              </a:rPr>
-              <a:t>•  </a:t>
-            </a:r>
-            <a:r>
-              <a:rPr sz="1400" b="1" i="0">
-                <a:solidFill>
-                  <a:srgbClr val="11202B"/>
-                </a:solidFill>
-                <a:latin typeface="Malgun Gothic"/>
-                <a:ea typeface="Malgun Gothic"/>
-                <a:cs typeface="Malgun Gothic"/>
-              </a:rPr>
-              <a:t>Chloramphenicol</a:t>
-            </a:r>
-            <a:r>
-              <a:rPr sz="1400" b="0" i="0">
-                <a:solidFill>
-                  <a:srgbClr val="11202B"/>
-                </a:solidFill>
-                <a:latin typeface="Malgun Gothic"/>
-                <a:ea typeface="Malgun Gothic"/>
-                <a:cs typeface="Malgun Gothic"/>
-              </a:rPr>
-              <a:t>은 가역적 골수 억제(용량 의존적)와 비가역적 무형성 빈혈(용량 비의존적)을 일으킨다. 신생아에서는 glucuronidation 능력이 낮아 축적되어 </a:t>
-            </a:r>
-            <a:r>
-              <a:rPr sz="1400" b="1" i="0">
-                <a:solidFill>
-                  <a:srgbClr val="11202B"/>
-                </a:solidFill>
-                <a:latin typeface="Malgun Gothic"/>
-                <a:ea typeface="Malgun Gothic"/>
-                <a:cs typeface="Malgun Gothic"/>
-              </a:rPr>
-              <a:t>gray baby syndrome</a:t>
-            </a:r>
-            <a:r>
-              <a:rPr sz="1400" b="0" i="0">
-                <a:solidFill>
-                  <a:srgbClr val="11202B"/>
-                </a:solidFill>
-                <a:latin typeface="Malgun Gothic"/>
-                <a:ea typeface="Malgun Gothic"/>
-                <a:cs typeface="Malgun Gothic"/>
-              </a:rPr>
-              <a:t>이 생긴다.</a:t>
-            </a:r>
-          </a:p>
-          <a:p>
-            <a:pPr>
-              <a:spcAft>
-                <a:spcPts val="900"/>
-              </a:spcAft>
-            </a:pPr>
-            <a:r>
-              <a:rPr sz="1400" b="1" i="0">
-                <a:solidFill>
-                  <a:srgbClr val="F2B705"/>
-                </a:solidFill>
-                <a:latin typeface="Malgun Gothic"/>
-                <a:ea typeface="Malgun Gothic"/>
-                <a:cs typeface="Malgun Gothic"/>
-              </a:rPr>
-              <a:t>•  </a:t>
-            </a:r>
-            <a:r>
-              <a:rPr sz="1400" b="1" i="0">
-                <a:solidFill>
-                  <a:srgbClr val="11202B"/>
-                </a:solidFill>
-                <a:latin typeface="Malgun Gothic"/>
-                <a:ea typeface="Malgun Gothic"/>
-                <a:cs typeface="Malgun Gothic"/>
-              </a:rPr>
-              <a:t>Aminoglycoside</a:t>
-            </a:r>
-            <a:r>
-              <a:rPr sz="1400" b="0" i="0">
-                <a:solidFill>
-                  <a:srgbClr val="11202B"/>
-                </a:solidFill>
-                <a:latin typeface="Malgun Gothic"/>
-                <a:ea typeface="Malgun Gothic"/>
-                <a:cs typeface="Malgun Gothic"/>
-              </a:rPr>
-              <a:t>의 비가역적 난청은 내이 유모세포의 미토콘드리아 ribosome 저해와 관련된다. *MT-RNR1*의 </a:t>
-            </a:r>
-            <a:r>
-              <a:rPr sz="1400" b="1" i="0">
-                <a:solidFill>
-                  <a:srgbClr val="11202B"/>
-                </a:solidFill>
-                <a:latin typeface="Malgun Gothic"/>
-                <a:ea typeface="Malgun Gothic"/>
-                <a:cs typeface="Malgun Gothic"/>
-              </a:rPr>
-              <a:t>m.1555A&gt;G</a:t>
-            </a:r>
-            <a:r>
-              <a:rPr sz="1400" b="0" i="0">
-                <a:solidFill>
-                  <a:srgbClr val="11202B"/>
-                </a:solidFill>
-                <a:latin typeface="Malgun Gothic"/>
-                <a:ea typeface="Malgun Gothic"/>
-                <a:cs typeface="Malgun Gothic"/>
-              </a:rPr>
-              <a:t> 변이가 있으면 12S rRNA 구조가 세균형에 더 가까워져 </a:t>
-            </a:r>
-            <a:r>
-              <a:rPr sz="1400" b="1" i="0">
-                <a:solidFill>
-                  <a:srgbClr val="11202B"/>
-                </a:solidFill>
-                <a:latin typeface="Malgun Gothic"/>
-                <a:ea typeface="Malgun Gothic"/>
-                <a:cs typeface="Malgun Gothic"/>
-              </a:rPr>
-              <a:t>치료 용량에서도 비가역적 난청이 생긴다.</a:t>
-            </a:r>
-            <a:r>
-              <a:rPr sz="1400" b="0" i="0">
-                <a:solidFill>
-                  <a:srgbClr val="11202B"/>
-                </a:solidFill>
-                <a:latin typeface="Malgun Gothic"/>
-                <a:ea typeface="Malgun Gothic"/>
-                <a:cs typeface="Malgun Gothic"/>
-              </a:rPr>
-              <a:t> 모계 유전이므로 가족력이 있으면 투여 전 유전 검사를 고려한다.</a:t>
-            </a:r>
-          </a:p>
-          <a:p>
-            <a:pPr>
-              <a:spcAft>
-                <a:spcPts val="900"/>
-              </a:spcAft>
-            </a:pPr>
-            <a:r>
-              <a:rPr sz="1400" b="1" i="0">
-                <a:solidFill>
-                  <a:srgbClr val="F2B705"/>
-                </a:solidFill>
-                <a:latin typeface="Malgun Gothic"/>
-                <a:ea typeface="Malgun Gothic"/>
-                <a:cs typeface="Malgun Gothic"/>
-              </a:rPr>
-              <a:t>•  </a:t>
-            </a:r>
-            <a:r>
-              <a:rPr sz="1400" b="1" i="0">
-                <a:solidFill>
-                  <a:srgbClr val="11202B"/>
-                </a:solidFill>
-                <a:latin typeface="Malgun Gothic"/>
-                <a:ea typeface="Malgun Gothic"/>
-                <a:cs typeface="Malgun Gothic"/>
-              </a:rPr>
-              <a:t>(2) 조직 축적과 다른 기전의 독성</a:t>
-            </a:r>
-            <a:r>
-              <a:rPr sz="1400" b="0" i="0">
-                <a:solidFill>
-                  <a:srgbClr val="11202B"/>
-                </a:solidFill>
-                <a:latin typeface="Malgun Gothic"/>
-                <a:ea typeface="Malgun Gothic"/>
-                <a:cs typeface="Malgun Gothic"/>
-              </a:rPr>
-              <a:t> Aminoglycoside의 신독성은 근위 세뇨관 세포가 약물을 흡수해 축적하기 때문이고, tetracycline의 치아 변색과 성장판 영향은 칼슘과의 결합 때문이다. </a:t>
-            </a:r>
-            <a:r>
-              <a:rPr sz="1400" b="1" i="0">
-                <a:solidFill>
-                  <a:srgbClr val="11202B"/>
-                </a:solidFill>
-                <a:latin typeface="Malgun Gothic"/>
-                <a:ea typeface="Malgun Gothic"/>
-                <a:cs typeface="Malgun Gothic"/>
-              </a:rPr>
-              <a:t>이 독성은 ribosome 선택성과 무관하므로 약물의 구조에서 따로 설명해야 한다.</a:t>
-            </a:r>
-          </a:p>
-        </p:txBody>
-      </p:sp>
-    </p:spTree>
-  </p:cSld>
-  <p:clrMapOvr>
-    <a:masterClrMapping/>
-  </p:clrMapOvr>
-</p:sld>
-</file>
-
-<file path=ppt/slides/slide33.xml><?xml version="1.0" encoding="utf-8"?>
-<p:sld xmlns:a="http://schemas.openxmlformats.org/drawingml/2006/main" xmlns:p="http://schemas.openxmlformats.org/presentationml/2006/main" xmlns:r="http://schemas.openxmlformats.org/officeDocument/2006/relationships">
-  <p:cSld>
-    <p:spTree>
-      <p:nvGrpSpPr>
-        <p:cNvPr id="1" name=""/>
-        <p:cNvGrpSpPr/>
-        <p:nvPr/>
-      </p:nvGrpSpPr>
-      <p:grpSpPr/>
-      <p:sp>
-        <p:nvSpPr>
-          <p:cNvPr id="2" name="Rectangle 1"/>
-          <p:cNvSpPr/>
-          <p:nvPr/>
-        </p:nvSpPr>
-        <p:spPr>
-          <a:xfrm>
-            <a:off x="0" y="0"/>
-            <a:ext cx="12191695" cy="6858000"/>
-          </a:xfrm>
-          <a:prstGeom prst="rect">
-            <a:avLst/>
-          </a:prstGeom>
-          <a:solidFill>
-            <a:srgbClr val="F5F8F9"/>
-          </a:solidFill>
-          <a:ln>
-            <a:noFill/>
-          </a:ln>
-          <a:effectLst/>
-        </p:spPr>
-        <p:style>
-          <a:lnRef idx="1">
-            <a:schemeClr val="accent1"/>
-          </a:lnRef>
-          <a:fillRef idx="3">
-            <a:schemeClr val="accent1"/>
-          </a:fillRef>
-          <a:effectRef idx="2">
-            <a:schemeClr val="accent1"/>
-          </a:effectRef>
-          <a:fontRef idx="minor">
-            <a:schemeClr val="lt1"/>
-          </a:fontRef>
-        </p:style>
-        <p:txBody>
-          <a:bodyPr rtlCol="0" anchor="ctr"/>
-          <a:lstStyle/>
-          <a:p>
-            <a:pPr algn="ctr"/>
-          </a:p>
-        </p:txBody>
-      </p:sp>
-      <p:sp>
-        <p:nvSpPr>
-          <p:cNvPr id="3" name="Rectangle 2"/>
-          <p:cNvSpPr/>
-          <p:nvPr/>
-        </p:nvSpPr>
-        <p:spPr>
-          <a:xfrm>
-            <a:off x="0" y="0"/>
-            <a:ext cx="12191695" cy="960120"/>
-          </a:xfrm>
-          <a:prstGeom prst="rect">
-            <a:avLst/>
-          </a:prstGeom>
-          <a:solidFill>
-            <a:srgbClr val="003C71"/>
-          </a:solidFill>
-          <a:ln>
-            <a:noFill/>
-          </a:ln>
-          <a:effectLst/>
-        </p:spPr>
-        <p:style>
-          <a:lnRef idx="1">
-            <a:schemeClr val="accent1"/>
-          </a:lnRef>
-          <a:fillRef idx="3">
-            <a:schemeClr val="accent1"/>
-          </a:fillRef>
-          <a:effectRef idx="2">
-            <a:schemeClr val="accent1"/>
-          </a:effectRef>
-          <a:fontRef idx="minor">
-            <a:schemeClr val="lt1"/>
-          </a:fontRef>
-        </p:style>
-        <p:txBody>
-          <a:bodyPr rtlCol="0" anchor="ctr"/>
-          <a:lstStyle/>
-          <a:p>
-            <a:pPr algn="ctr"/>
-          </a:p>
-        </p:txBody>
-      </p:sp>
-      <p:sp>
-        <p:nvSpPr>
-          <p:cNvPr id="4" name="Rectangle 3"/>
-          <p:cNvSpPr/>
-          <p:nvPr/>
-        </p:nvSpPr>
-        <p:spPr>
-          <a:xfrm>
-            <a:off x="0" y="960120"/>
-            <a:ext cx="12191695" cy="54864"/>
-          </a:xfrm>
-          <a:prstGeom prst="rect">
-            <a:avLst/>
-          </a:prstGeom>
-          <a:solidFill>
-            <a:srgbClr val="F2B705"/>
-          </a:solidFill>
-          <a:ln>
-            <a:noFill/>
-          </a:ln>
-          <a:effectLst/>
-        </p:spPr>
-        <p:style>
-          <a:lnRef idx="1">
-            <a:schemeClr val="accent1"/>
-          </a:lnRef>
-          <a:fillRef idx="3">
-            <a:schemeClr val="accent1"/>
-          </a:fillRef>
-          <a:effectRef idx="2">
-            <a:schemeClr val="accent1"/>
-          </a:effectRef>
-          <a:fontRef idx="minor">
-            <a:schemeClr val="lt1"/>
-          </a:fontRef>
-        </p:style>
-        <p:txBody>
-          <a:bodyPr rtlCol="0" anchor="ctr"/>
-          <a:lstStyle/>
-          <a:p>
-            <a:pPr algn="ctr"/>
-          </a:p>
-        </p:txBody>
-      </p:sp>
-      <p:sp>
-        <p:nvSpPr>
-          <p:cNvPr id="5" name="TextBox 4"/>
-          <p:cNvSpPr txBox="1"/>
-          <p:nvPr/>
-        </p:nvSpPr>
-        <p:spPr>
-          <a:xfrm>
-            <a:off x="457200" y="109728"/>
-            <a:ext cx="11247120" cy="777240"/>
-          </a:xfrm>
-          <a:prstGeom prst="rect">
-            <a:avLst/>
-          </a:prstGeom>
-          <a:noFill/>
-        </p:spPr>
-        <p:txBody>
-          <a:bodyPr wrap="square" anchor="ctr">
-            <a:spAutoFit/>
-          </a:bodyPr>
-          <a:lstStyle/>
-          <a:p>
-            <a:r>
-              <a:rPr sz="1300" b="1" i="0">
-                <a:solidFill>
-                  <a:srgbClr val="F2B705"/>
-                </a:solidFill>
-                <a:latin typeface="Malgun Gothic"/>
-                <a:ea typeface="Malgun Gothic"/>
-                <a:cs typeface="Malgun Gothic"/>
-              </a:rPr>
-              <a:t>08   </a:t>
-            </a:r>
-            <a:r>
-              <a:rPr sz="2400" b="1" i="0">
-                <a:solidFill>
-                  <a:srgbClr val="FFFFFF"/>
-                </a:solidFill>
-                <a:latin typeface="Malgun Gothic"/>
-                <a:ea typeface="Malgun Gothic"/>
-                <a:cs typeface="Malgun Gothic"/>
-              </a:rPr>
-              <a:t>8. 선택독성의 한계와 임상적 결과</a:t>
-            </a:r>
-          </a:p>
-        </p:txBody>
-      </p:sp>
-      <p:sp>
-        <p:nvSpPr>
-          <p:cNvPr id="6" name="TextBox 5"/>
-          <p:cNvSpPr txBox="1"/>
-          <p:nvPr/>
-        </p:nvSpPr>
-        <p:spPr>
-          <a:xfrm>
-            <a:off x="457200" y="6446520"/>
-            <a:ext cx="11247120" cy="301752"/>
-          </a:xfrm>
-          <a:prstGeom prst="rect">
-            <a:avLst/>
-          </a:prstGeom>
-          <a:noFill/>
-        </p:spPr>
-        <p:txBody>
-          <a:bodyPr wrap="square" anchor="ctr">
-            <a:spAutoFit/>
-          </a:bodyPr>
-          <a:lstStyle/>
-          <a:p>
-            <a:r>
-              <a:rPr sz="900" b="0" i="0">
-                <a:solidFill>
-                  <a:srgbClr val="66788A"/>
-                </a:solidFill>
-                <a:latin typeface="Malgun Gothic"/>
-                <a:ea typeface="Malgun Gothic"/>
-                <a:cs typeface="Malgun Gothic"/>
-              </a:rPr>
-              <a:t>M03-W03-L03  ·  Ribosome과 번역의 단계</a:t>
-            </a:r>
-            <a:r>
-              <a:rPr sz="900" b="1" i="0">
-                <a:solidFill>
-                  <a:srgbClr val="003C71"/>
-                </a:solidFill>
-                <a:latin typeface="Malgun Gothic"/>
-                <a:ea typeface="Malgun Gothic"/>
-                <a:cs typeface="Malgun Gothic"/>
-              </a:rPr>
-              <a:t>      33</a:t>
             </a:r>
           </a:p>
         </p:txBody>
@@ -16292,6 +16023,346 @@
 </p:sld>
 </file>
 
+<file path=ppt/slides/slide33.xml><?xml version="1.0" encoding="utf-8"?>
+<p:sld xmlns:a="http://schemas.openxmlformats.org/drawingml/2006/main" xmlns:p="http://schemas.openxmlformats.org/presentationml/2006/main" xmlns:r="http://schemas.openxmlformats.org/officeDocument/2006/relationships">
+  <p:cSld>
+    <p:spTree>
+      <p:nvGrpSpPr>
+        <p:cNvPr id="1" name=""/>
+        <p:cNvGrpSpPr/>
+        <p:nvPr/>
+      </p:nvGrpSpPr>
+      <p:grpSpPr/>
+      <p:sp>
+        <p:nvSpPr>
+          <p:cNvPr id="2" name="Rectangle 1"/>
+          <p:cNvSpPr/>
+          <p:nvPr/>
+        </p:nvSpPr>
+        <p:spPr>
+          <a:xfrm>
+            <a:off x="0" y="0"/>
+            <a:ext cx="12191695" cy="6858000"/>
+          </a:xfrm>
+          <a:prstGeom prst="rect">
+            <a:avLst/>
+          </a:prstGeom>
+          <a:solidFill>
+            <a:srgbClr val="F5F8F9"/>
+          </a:solidFill>
+          <a:ln>
+            <a:noFill/>
+          </a:ln>
+          <a:effectLst/>
+        </p:spPr>
+        <p:style>
+          <a:lnRef idx="1">
+            <a:schemeClr val="accent1"/>
+          </a:lnRef>
+          <a:fillRef idx="3">
+            <a:schemeClr val="accent1"/>
+          </a:fillRef>
+          <a:effectRef idx="2">
+            <a:schemeClr val="accent1"/>
+          </a:effectRef>
+          <a:fontRef idx="minor">
+            <a:schemeClr val="lt1"/>
+          </a:fontRef>
+        </p:style>
+        <p:txBody>
+          <a:bodyPr rtlCol="0" anchor="ctr"/>
+          <a:lstStyle/>
+          <a:p>
+            <a:pPr algn="ctr"/>
+          </a:p>
+        </p:txBody>
+      </p:sp>
+      <p:sp>
+        <p:nvSpPr>
+          <p:cNvPr id="3" name="Rectangle 2"/>
+          <p:cNvSpPr/>
+          <p:nvPr/>
+        </p:nvSpPr>
+        <p:spPr>
+          <a:xfrm>
+            <a:off x="0" y="0"/>
+            <a:ext cx="12191695" cy="960120"/>
+          </a:xfrm>
+          <a:prstGeom prst="rect">
+            <a:avLst/>
+          </a:prstGeom>
+          <a:solidFill>
+            <a:srgbClr val="003C71"/>
+          </a:solidFill>
+          <a:ln>
+            <a:noFill/>
+          </a:ln>
+          <a:effectLst/>
+        </p:spPr>
+        <p:style>
+          <a:lnRef idx="1">
+            <a:schemeClr val="accent1"/>
+          </a:lnRef>
+          <a:fillRef idx="3">
+            <a:schemeClr val="accent1"/>
+          </a:fillRef>
+          <a:effectRef idx="2">
+            <a:schemeClr val="accent1"/>
+          </a:effectRef>
+          <a:fontRef idx="minor">
+            <a:schemeClr val="lt1"/>
+          </a:fontRef>
+        </p:style>
+        <p:txBody>
+          <a:bodyPr rtlCol="0" anchor="ctr"/>
+          <a:lstStyle/>
+          <a:p>
+            <a:pPr algn="ctr"/>
+          </a:p>
+        </p:txBody>
+      </p:sp>
+      <p:sp>
+        <p:nvSpPr>
+          <p:cNvPr id="4" name="Rectangle 3"/>
+          <p:cNvSpPr/>
+          <p:nvPr/>
+        </p:nvSpPr>
+        <p:spPr>
+          <a:xfrm>
+            <a:off x="0" y="960120"/>
+            <a:ext cx="12191695" cy="54864"/>
+          </a:xfrm>
+          <a:prstGeom prst="rect">
+            <a:avLst/>
+          </a:prstGeom>
+          <a:solidFill>
+            <a:srgbClr val="F2B705"/>
+          </a:solidFill>
+          <a:ln>
+            <a:noFill/>
+          </a:ln>
+          <a:effectLst/>
+        </p:spPr>
+        <p:style>
+          <a:lnRef idx="1">
+            <a:schemeClr val="accent1"/>
+          </a:lnRef>
+          <a:fillRef idx="3">
+            <a:schemeClr val="accent1"/>
+          </a:fillRef>
+          <a:effectRef idx="2">
+            <a:schemeClr val="accent1"/>
+          </a:effectRef>
+          <a:fontRef idx="minor">
+            <a:schemeClr val="lt1"/>
+          </a:fontRef>
+        </p:style>
+        <p:txBody>
+          <a:bodyPr rtlCol="0" anchor="ctr"/>
+          <a:lstStyle/>
+          <a:p>
+            <a:pPr algn="ctr"/>
+          </a:p>
+        </p:txBody>
+      </p:sp>
+      <p:sp>
+        <p:nvSpPr>
+          <p:cNvPr id="5" name="TextBox 4"/>
+          <p:cNvSpPr txBox="1"/>
+          <p:nvPr/>
+        </p:nvSpPr>
+        <p:spPr>
+          <a:xfrm>
+            <a:off x="457200" y="109728"/>
+            <a:ext cx="11247120" cy="777240"/>
+          </a:xfrm>
+          <a:prstGeom prst="rect">
+            <a:avLst/>
+          </a:prstGeom>
+          <a:noFill/>
+        </p:spPr>
+        <p:txBody>
+          <a:bodyPr wrap="square" anchor="ctr">
+            <a:spAutoFit/>
+          </a:bodyPr>
+          <a:lstStyle/>
+          <a:p>
+            <a:r>
+              <a:rPr sz="1300" b="1" i="0">
+                <a:solidFill>
+                  <a:srgbClr val="F2B705"/>
+                </a:solidFill>
+                <a:latin typeface="Malgun Gothic"/>
+                <a:ea typeface="Malgun Gothic"/>
+                <a:cs typeface="Malgun Gothic"/>
+              </a:rPr>
+              <a:t>08   </a:t>
+            </a:r>
+            <a:r>
+              <a:rPr sz="2400" b="1" i="0">
+                <a:solidFill>
+                  <a:srgbClr val="FFFFFF"/>
+                </a:solidFill>
+                <a:latin typeface="Malgun Gothic"/>
+                <a:ea typeface="Malgun Gothic"/>
+                <a:cs typeface="Malgun Gothic"/>
+              </a:rPr>
+              <a:t>8. 선택독성의 한계와 임상적 결과</a:t>
+            </a:r>
+          </a:p>
+        </p:txBody>
+      </p:sp>
+      <p:sp>
+        <p:nvSpPr>
+          <p:cNvPr id="6" name="TextBox 5"/>
+          <p:cNvSpPr txBox="1"/>
+          <p:nvPr/>
+        </p:nvSpPr>
+        <p:spPr>
+          <a:xfrm>
+            <a:off x="457200" y="6446520"/>
+            <a:ext cx="11247120" cy="301752"/>
+          </a:xfrm>
+          <a:prstGeom prst="rect">
+            <a:avLst/>
+          </a:prstGeom>
+          <a:noFill/>
+        </p:spPr>
+        <p:txBody>
+          <a:bodyPr wrap="square" anchor="ctr">
+            <a:spAutoFit/>
+          </a:bodyPr>
+          <a:lstStyle/>
+          <a:p>
+            <a:r>
+              <a:rPr sz="900" b="0" i="0">
+                <a:solidFill>
+                  <a:srgbClr val="66788A"/>
+                </a:solidFill>
+                <a:latin typeface="Malgun Gothic"/>
+                <a:ea typeface="Malgun Gothic"/>
+                <a:cs typeface="Malgun Gothic"/>
+              </a:rPr>
+              <a:t>M03-W03-L03  ·  Ribosome과 번역의 단계</a:t>
+            </a:r>
+            <a:r>
+              <a:rPr sz="900" b="1" i="0">
+                <a:solidFill>
+                  <a:srgbClr val="003C71"/>
+                </a:solidFill>
+                <a:latin typeface="Malgun Gothic"/>
+                <a:ea typeface="Malgun Gothic"/>
+                <a:cs typeface="Malgun Gothic"/>
+              </a:rPr>
+              <a:t>      33</a:t>
+            </a:r>
+          </a:p>
+        </p:txBody>
+      </p:sp>
+      <p:sp>
+        <p:nvSpPr>
+          <p:cNvPr id="7" name="TextBox 6"/>
+          <p:cNvSpPr txBox="1"/>
+          <p:nvPr/>
+        </p:nvSpPr>
+        <p:spPr>
+          <a:xfrm>
+            <a:off x="640080" y="1280160"/>
+            <a:ext cx="10881360" cy="5029200"/>
+          </a:xfrm>
+          <a:prstGeom prst="rect">
+            <a:avLst/>
+          </a:prstGeom>
+          <a:noFill/>
+        </p:spPr>
+        <p:txBody>
+          <a:bodyPr wrap="square" anchor="t">
+            <a:spAutoFit/>
+          </a:bodyPr>
+          <a:lstStyle/>
+          <a:p>
+            <a:pPr>
+              <a:spcAft>
+                <a:spcPts val="900"/>
+              </a:spcAft>
+            </a:pPr>
+            <a:r>
+              <a:rPr sz="2000" b="1" i="0">
+                <a:solidFill>
+                  <a:srgbClr val="F2B705"/>
+                </a:solidFill>
+                <a:latin typeface="Malgun Gothic"/>
+                <a:ea typeface="Malgun Gothic"/>
+                <a:cs typeface="Malgun Gothic"/>
+              </a:rPr>
+              <a:t>•  </a:t>
+            </a:r>
+            <a:r>
+              <a:rPr sz="2000" b="0" i="0">
+                <a:solidFill>
+                  <a:srgbClr val="11202B"/>
+                </a:solidFill>
+                <a:latin typeface="Malgun Gothic"/>
+                <a:ea typeface="Malgun Gothic"/>
+                <a:cs typeface="Malgun Gothic"/>
+              </a:rPr>
+              <a:t>한편 번역 기구를 겨냥한 약물이 항균제만은 아니다. 이전 수업에서 본 </a:t>
+            </a:r>
+            <a:r>
+              <a:rPr sz="2000" b="1" i="0">
+                <a:solidFill>
+                  <a:srgbClr val="11202B"/>
+                </a:solidFill>
+                <a:latin typeface="Malgun Gothic"/>
+                <a:ea typeface="Malgun Gothic"/>
+                <a:cs typeface="Malgun Gothic"/>
+              </a:rPr>
+              <a:t>mupirocin</a:t>
+            </a:r>
+            <a:r>
+              <a:rPr sz="2000" b="0" i="0">
+                <a:solidFill>
+                  <a:srgbClr val="11202B"/>
+                </a:solidFill>
+                <a:latin typeface="Malgun Gothic"/>
+                <a:ea typeface="Malgun Gothic"/>
+                <a:cs typeface="Malgun Gothic"/>
+              </a:rPr>
+              <a:t>은 세균의 isoleucyl-tRNA synthetase를 억제하고, </a:t>
+            </a:r>
+            <a:r>
+              <a:rPr sz="2000" b="1" i="0">
+                <a:solidFill>
+                  <a:srgbClr val="11202B"/>
+                </a:solidFill>
+                <a:latin typeface="Malgun Gothic"/>
+                <a:ea typeface="Malgun Gothic"/>
+                <a:cs typeface="Malgun Gothic"/>
+              </a:rPr>
+              <a:t>fusidic acid</a:t>
+            </a:r>
+            <a:r>
+              <a:rPr sz="2000" b="0" i="0">
+                <a:solidFill>
+                  <a:srgbClr val="11202B"/>
+                </a:solidFill>
+                <a:latin typeface="Malgun Gothic"/>
+                <a:ea typeface="Malgun Gothic"/>
+                <a:cs typeface="Malgun Gothic"/>
+              </a:rPr>
+              <a:t>는 EF-G를 억제한다. 번역의 어느 단계든 약물의 표적이 될 수 있다는 점에서 번역 경로 전체를 약물 표적 지도로 보아야 한다.</a:t>
+            </a:r>
+          </a:p>
+        </p:txBody>
+      </p:sp>
+    </p:spTree>
+  </p:cSld>
+  <p:clrMapOvr>
+    <a:masterClrMapping/>
+  </p:clrMapOvr>
+</p:sld>
+</file>
+
 <file path=ppt/slides/slide34.xml><?xml version="1.0" encoding="utf-8"?>
 <p:sld xmlns:a="http://schemas.openxmlformats.org/drawingml/2006/main" xmlns:p="http://schemas.openxmlformats.org/presentationml/2006/main" xmlns:r="http://schemas.openxmlformats.org/officeDocument/2006/relationships">
   <p:cSld>
@@ -16530,44 +16601,58 @@
       </p:sp>
       <p:sp>
         <p:nvSpPr>
-          <p:cNvPr id="7" name="TextBox 6"/>
-          <p:cNvSpPr txBox="1"/>
-          <p:nvPr/>
-        </p:nvSpPr>
-        <p:spPr>
-          <a:xfrm>
-            <a:off x="640080" y="1280160"/>
-            <a:ext cx="10881360" cy="5029200"/>
-          </a:xfrm>
-          <a:prstGeom prst="rect">
-            <a:avLst/>
-          </a:prstGeom>
-          <a:noFill/>
-        </p:spPr>
-        <p:txBody>
-          <a:bodyPr wrap="square" anchor="t">
-            <a:spAutoFit/>
-          </a:bodyPr>
-          <a:lstStyle/>
-          <a:p>
-            <a:pPr>
-              <a:spcAft>
-                <a:spcPts val="900"/>
-              </a:spcAft>
-            </a:pPr>
-            <a:r>
-              <a:rPr sz="2000" b="1" i="0">
-                <a:solidFill>
-                  <a:srgbClr val="F2B705"/>
-                </a:solidFill>
-                <a:latin typeface="Malgun Gothic"/>
-                <a:ea typeface="Malgun Gothic"/>
-                <a:cs typeface="Malgun Gothic"/>
-              </a:rPr>
-              <a:t>•  </a:t>
-            </a:r>
-            <a:r>
-              <a:rPr sz="2000" b="0" i="0">
+          <p:cNvPr id="7" name="Rectangle 6"/>
+          <p:cNvSpPr/>
+          <p:nvPr/>
+        </p:nvSpPr>
+        <p:spPr>
+          <a:xfrm>
+            <a:off x="640080" y="1325880"/>
+            <a:ext cx="10881360" cy="1386839"/>
+          </a:xfrm>
+          <a:prstGeom prst="rect">
+            <a:avLst/>
+          </a:prstGeom>
+          <a:solidFill>
+            <a:srgbClr val="FFF5D6"/>
+          </a:solidFill>
+          <a:ln>
+            <a:noFill/>
+          </a:ln>
+          <a:effectLst/>
+        </p:spPr>
+        <p:style>
+          <a:lnRef idx="1">
+            <a:schemeClr val="accent1"/>
+          </a:lnRef>
+          <a:fillRef idx="3">
+            <a:schemeClr val="accent1"/>
+          </a:fillRef>
+          <a:effectRef idx="2">
+            <a:schemeClr val="accent1"/>
+          </a:effectRef>
+          <a:fontRef idx="minor">
+            <a:schemeClr val="lt1"/>
+          </a:fontRef>
+        </p:style>
+        <p:txBody>
+          <a:bodyPr rtlCol="0" anchor="ctr" wrap="square" lIns="228600" rIns="228600"/>
+          <a:lstStyle/>
+          <a:p>
+            <a:pPr algn="l"/>
+            <a:r>
+              <a:rPr sz="1200" b="1" i="0">
+                <a:solidFill>
+                  <a:srgbClr val="8A6300"/>
+                </a:solidFill>
+                <a:latin typeface="Malgun Gothic"/>
+                <a:ea typeface="Malgun Gothic"/>
+                <a:cs typeface="Malgun Gothic"/>
+              </a:rPr>
+              <a:t>핵심 정리   </a:t>
+            </a:r>
+            <a:r>
+              <a:rPr sz="1600" b="1" i="0">
                 <a:solidFill>
                   <a:srgbClr val="11202B"/>
                 </a:solidFill>
@@ -16575,10 +16660,10 @@
                 <a:ea typeface="Malgun Gothic"/>
                 <a:cs typeface="Malgun Gothic"/>
               </a:rPr>
-              <a:t>한편 번역 기구를 겨냥한 약물이 항균제만은 아니다. 이전 수업에서 본 </a:t>
-            </a:r>
-            <a:r>
-              <a:rPr sz="2000" b="1" i="0">
+              <a:t>핵심 정리</a:t>
+            </a:r>
+            <a:r>
+              <a:rPr sz="1600" b="0" i="0">
                 <a:solidFill>
                   <a:srgbClr val="11202B"/>
                 </a:solidFill>
@@ -16586,40 +16671,7 @@
                 <a:ea typeface="Malgun Gothic"/>
                 <a:cs typeface="Malgun Gothic"/>
               </a:rPr>
-              <a:t>mupirocin</a:t>
-            </a:r>
-            <a:r>
-              <a:rPr sz="2000" b="0" i="0">
-                <a:solidFill>
-                  <a:srgbClr val="11202B"/>
-                </a:solidFill>
-                <a:latin typeface="Malgun Gothic"/>
-                <a:ea typeface="Malgun Gothic"/>
-                <a:cs typeface="Malgun Gothic"/>
-              </a:rPr>
-              <a:t>은 세균의 isoleucyl-tRNA synthetase를 억제하고, </a:t>
-            </a:r>
-            <a:r>
-              <a:rPr sz="2000" b="1" i="0">
-                <a:solidFill>
-                  <a:srgbClr val="11202B"/>
-                </a:solidFill>
-                <a:latin typeface="Malgun Gothic"/>
-                <a:ea typeface="Malgun Gothic"/>
-                <a:cs typeface="Malgun Gothic"/>
-              </a:rPr>
-              <a:t>fusidic acid</a:t>
-            </a:r>
-            <a:r>
-              <a:rPr sz="2000" b="0" i="0">
-                <a:solidFill>
-                  <a:srgbClr val="11202B"/>
-                </a:solidFill>
-                <a:latin typeface="Malgun Gothic"/>
-                <a:ea typeface="Malgun Gothic"/>
-                <a:cs typeface="Malgun Gothic"/>
-              </a:rPr>
-              <a:t>는 EF-G를 억제한다. 번역의 어느 단계든 약물의 표적이 될 수 있다는 점에서 번역 경로 전체를 약물 표적 지도로 보아야 한다.</a:t>
+              <a:t> 번역은 개시·신장·종결의 세 단계로 나뉘고, 각 단계에 서로 다른 인자와 서로 다른 약물·독소가 작용한다. 선택독성은 세균 ribosome과 진핵 세포질 ribosome의 구조 차이에서 나오고, 그 독성의 한계는 미토콘드리아 ribosome이 세균형에 가깝다는 사실에서 나온다. 항생제의 부작용을 외우는 대신 결합 부위를 따라가면 예측할 수 있다.</a:t>
             </a:r>
           </a:p>
         </p:txBody>
@@ -16805,7 +16857,7 @@
                 <a:ea typeface="Malgun Gothic"/>
                 <a:cs typeface="Malgun Gothic"/>
               </a:rPr>
-              <a:t>08   </a:t>
+              <a:t>Q1   </a:t>
             </a:r>
             <a:r>
               <a:rPr sz="2400" b="1" i="0">
@@ -16816,7 +16868,7 @@
                 <a:ea typeface="Malgun Gothic"/>
                 <a:cs typeface="Malgun Gothic"/>
               </a:rPr>
-              <a:t>8. 선택독성의 한계와 임상적 결과</a:t>
+              <a:t>확인 문항</a:t>
             </a:r>
           </a:p>
         </p:txBody>
@@ -16870,23 +16922,61 @@
       </p:sp>
       <p:sp>
         <p:nvSpPr>
-          <p:cNvPr id="7" name="Rectangle 6"/>
+          <p:cNvPr id="7" name="TextBox 6"/>
+          <p:cNvSpPr txBox="1"/>
+          <p:nvPr/>
+        </p:nvSpPr>
+        <p:spPr>
+          <a:xfrm>
+            <a:off x="640080" y="1371600"/>
+            <a:ext cx="10881360" cy="2103120"/>
+          </a:xfrm>
+          <a:prstGeom prst="rect">
+            <a:avLst/>
+          </a:prstGeom>
+          <a:noFill/>
+        </p:spPr>
+        <p:txBody>
+          <a:bodyPr wrap="square" anchor="t">
+            <a:spAutoFit/>
+          </a:bodyPr>
+          <a:lstStyle/>
+          <a:p>
+            <a:r>
+              <a:rPr sz="1900" b="1" i="0">
+                <a:solidFill>
+                  <a:srgbClr val="11202B"/>
+                </a:solidFill>
+                <a:latin typeface="Malgun Gothic"/>
+                <a:ea typeface="Malgun Gothic"/>
+                <a:cs typeface="Malgun Gothic"/>
+              </a:rPr>
+              <a:t>Ribosome에서 peptide 결합을 만드는 활성이 단백질이 아니라 rRNA에 있다는 사실이 가지는 의미를 두 가지 들라.</a:t>
+            </a:r>
+          </a:p>
+        </p:txBody>
+      </p:sp>
+      <p:sp>
+        <p:nvSpPr>
+          <p:cNvPr id="8" name="Rectangle 7"/>
           <p:cNvSpPr/>
           <p:nvPr/>
         </p:nvSpPr>
         <p:spPr>
           <a:xfrm>
-            <a:off x="640080" y="1325880"/>
-            <a:ext cx="10881360" cy="1386839"/>
+            <a:off x="640080" y="3657600"/>
+            <a:ext cx="10881360" cy="2606040"/>
           </a:xfrm>
           <a:prstGeom prst="rect">
             <a:avLst/>
           </a:prstGeom>
           <a:solidFill>
-            <a:srgbClr val="FFF5D6"/>
+            <a:srgbClr val="FFFFFF"/>
           </a:solidFill>
           <a:ln>
-            <a:noFill/>
+            <a:solidFill>
+              <a:srgbClr val="C2CDD6"/>
+            </a:solidFill>
           </a:ln>
           <a:effectLst/>
         </p:spPr>
@@ -16905,23 +16995,23 @@
           </a:fontRef>
         </p:style>
         <p:txBody>
-          <a:bodyPr rtlCol="0" anchor="ctr" wrap="square" lIns="228600" rIns="228600"/>
+          <a:bodyPr rtlCol="0" anchor="ctr" wrap="square" lIns="228600" rIns="228600" tIns="164592"/>
           <a:lstStyle/>
           <a:p>
             <a:pPr algn="l"/>
             <a:r>
               <a:rPr sz="1200" b="1" i="0">
                 <a:solidFill>
-                  <a:srgbClr val="8A6300"/>
-                </a:solidFill>
-                <a:latin typeface="Malgun Gothic"/>
-                <a:ea typeface="Malgun Gothic"/>
-                <a:cs typeface="Malgun Gothic"/>
-              </a:rPr>
-              <a:t>핵심 정리   </a:t>
-            </a:r>
-            <a:r>
-              <a:rPr sz="1600" b="1" i="0">
+                  <a:srgbClr val="003C71"/>
+                </a:solidFill>
+                <a:latin typeface="Malgun Gothic"/>
+                <a:ea typeface="Malgun Gothic"/>
+                <a:cs typeface="Malgun Gothic"/>
+              </a:rPr>
+              <a:t>해설   </a:t>
+            </a:r>
+            <a:r>
+              <a:rPr sz="1500" b="0" i="0">
                 <a:solidFill>
                   <a:srgbClr val="11202B"/>
                 </a:solidFill>
@@ -16929,18 +17019,7 @@
                 <a:ea typeface="Malgun Gothic"/>
                 <a:cs typeface="Malgun Gothic"/>
               </a:rPr>
-              <a:t>핵심 정리</a:t>
-            </a:r>
-            <a:r>
-              <a:rPr sz="1600" b="0" i="0">
-                <a:solidFill>
-                  <a:srgbClr val="11202B"/>
-                </a:solidFill>
-                <a:latin typeface="Malgun Gothic"/>
-                <a:ea typeface="Malgun Gothic"/>
-                <a:cs typeface="Malgun Gothic"/>
-              </a:rPr>
-              <a:t> 번역은 개시·신장·종결의 세 단계로 나뉘고, 각 단계에 서로 다른 인자와 서로 다른 약물·독소가 작용한다. 선택독성은 세균 ribosome과 진핵 세포질 ribosome의 구조 차이에서 나오고, 그 독성의 한계는 미토콘드리아 ribosome이 세균형에 가깝다는 사실에서 나온다. 항생제의 부작용을 외우는 대신 결합 부위를 따라가면 예측할 수 있다.</a:t>
+              <a:t>첫째, 생화학적으로 RNA가 촉매 능력을 가진다는 증거이며, 유전 정보 저장과 촉매를 모두 RNA가 담당했던 단계를 지나왔다는 설명과 맞닿는다. 둘째, 약물 설계의 관점에서 번역 저해제의 표적이 대부분 rRNA의 특정 서열과 구조라는 뜻이다. 그래서 rRNA 서열의 작은 차이가 선택독성을 만들고, 반대로 rRNA를 methylation하는 erm 같은 효소 하나로 여러 계열 약물에 동시에 저항성이 생긴다.</a:t>
             </a:r>
           </a:p>
         </p:txBody>
@@ -17126,7 +17205,7 @@
                 <a:ea typeface="Malgun Gothic"/>
                 <a:cs typeface="Malgun Gothic"/>
               </a:rPr>
-              <a:t>Q1   </a:t>
+              <a:t>Q2   </a:t>
             </a:r>
             <a:r>
               <a:rPr sz="2400" b="1" i="0">
@@ -17220,7 +17299,7 @@
                 <a:ea typeface="Malgun Gothic"/>
                 <a:cs typeface="Malgun Gothic"/>
               </a:rPr>
-              <a:t>Ribosome에서 peptide 결합을 만드는 활성이 단백질이 아니라 rRNA에 있다는 사실이 가지는 의미를 두 가지 들라.</a:t>
+              <a:t>아미노산 하나를 polypeptide에 추가하는 데 소비되는 고에너지 인산 결합의 수를 단계별로 적고, peptide 결합 형성 자체에는 ATP나 GTP가 쓰이지 않는 이유를 설명하라.</a:t>
             </a:r>
           </a:p>
         </p:txBody>
@@ -17288,7 +17367,7 @@
                 <a:ea typeface="Malgun Gothic"/>
                 <a:cs typeface="Malgun Gothic"/>
               </a:rPr>
-              <a:t>첫째, 생화학적으로 RNA가 촉매 능력을 가진다는 증거이며, 유전 정보 저장과 촉매를 모두 RNA가 담당했던 단계를 지나왔다는 설명과 맞닿는다. 둘째, 약물 설계의 관점에서 번역 저해제의 표적이 대부분 rRNA의 특정 서열과 구조라는 뜻이다. 그래서 rRNA 서열의 작은 차이가 선택독성을 만들고, 반대로 rRNA를 methylation하는 erm 같은 효소 하나로 여러 계열 약물에 동시에 저항성이 생긴다.</a:t>
+              <a:t>tRNA 충전에서 ATP가 AMP와 2 Pi로 분해되어 2개, EF-Tu(eEF1A)가 A 자리에 tRNA를 결합시킬 때 GTP 1개, EF-G(eEF2)의 translocation에서 GTP 1개로 모두 4개다. Peptide 결합 형성 단계에 추가 에너지가 들지 않는 것은, 충전 단계에서 소비한 에너지가 aminoacyl-tRNA의 고에너지 에스터 결합으로 이미 저장되어 있기 때문이다. Peptidyl transferase 반응은 그 에스터 결합을 peptide 결합으로 바꾸는 것이므로 열역학적으로 유리하다.</a:t>
             </a:r>
           </a:p>
         </p:txBody>
@@ -17474,7 +17553,7 @@
                 <a:ea typeface="Malgun Gothic"/>
                 <a:cs typeface="Malgun Gothic"/>
               </a:rPr>
-              <a:t>Q2   </a:t>
+              <a:t>Q3   </a:t>
             </a:r>
             <a:r>
               <a:rPr sz="2400" b="1" i="0">
@@ -17568,7 +17647,7 @@
                 <a:ea typeface="Malgun Gothic"/>
                 <a:cs typeface="Malgun Gothic"/>
               </a:rPr>
-              <a:t>아미노산 하나를 polypeptide에 추가하는 데 소비되는 고에너지 인산 결합의 수를 단계별로 적고, peptide 결합 형성 자체에는 ATP나 GTP가 쓰이지 않는 이유를 설명하라.</a:t>
+              <a:t>원핵세포의 mRNA는 polycistronic일 수 있지만 진핵세포의 mRNA는 거의 모두 monocistronic이다. 개시 기전의 차이로 설명하라.</a:t>
             </a:r>
           </a:p>
         </p:txBody>
@@ -17636,7 +17715,7 @@
                 <a:ea typeface="Malgun Gothic"/>
                 <a:cs typeface="Malgun Gothic"/>
               </a:rPr>
-              <a:t>tRNA 충전에서 ATP가 AMP와 2 Pi로 분해되어 2개, EF-Tu(eEF1A)가 A 자리에 tRNA를 결합시킬 때 GTP 1개, EF-G(eEF2)의 translocation에서 GTP 1개로 모두 4개다. Peptide 결합 형성 단계에 추가 에너지가 들지 않는 것은, 충전 단계에서 소비한 에너지가 aminoacyl-tRNA의 고에너지 에스터 결합으로 이미 저장되어 있기 때문이다. Peptidyl transferase 반응은 그 에스터 결합을 peptide 결합으로 바꾸는 것이므로 열역학적으로 유리하다.</a:t>
+              <a:t>원핵세포는 개시 코돈 상류의 Shine-Dalgarno 서열이 16S rRNA와 염기쌍을 이루어 소단위를 해당 개시 코돈에 직접 올려놓는다. 따라서 한 mRNA 안에 Shine-Dalgarno 서열과 AUG의 조합이 여러 번 나타나면 각각이 독립적인 개시 지점이 되어 여러 단백질을 만들 수 있다. 진핵세포는 5' cap에 결합한 복합체가 5' 말단에서 하류로 훑어 내려가 처음 만나는 AUG에서 개시하므로, 그 뒤쪽에 있는 개시 코돈에는 원칙적으로 접근하지 못한다. 접근 방식의 차이가 한 mRNA가 담을 수 있는 유전 정보의 개수를 정한다.</a:t>
             </a:r>
           </a:p>
         </p:txBody>
@@ -17822,7 +17901,7 @@
                 <a:ea typeface="Malgun Gothic"/>
                 <a:cs typeface="Malgun Gothic"/>
               </a:rPr>
-              <a:t>Q3   </a:t>
+              <a:t>Q4   </a:t>
             </a:r>
             <a:r>
               <a:rPr sz="2400" b="1" i="0">
@@ -17916,7 +17995,7 @@
                 <a:ea typeface="Malgun Gothic"/>
                 <a:cs typeface="Malgun Gothic"/>
               </a:rPr>
-              <a:t>원핵세포의 mRNA는 polycistronic일 수 있지만 진핵세포의 mRNA는 거의 모두 monocistronic이다. 개시 기전의 차이로 설명하라.</a:t>
+              <a:t>적혈구 전구세포에서 heme이 부족할 때 globin 합성이 멈추는 기전과 그 생리적 의미를 설명하라.</a:t>
             </a:r>
           </a:p>
         </p:txBody>
@@ -17984,7 +18063,7 @@
                 <a:ea typeface="Malgun Gothic"/>
                 <a:cs typeface="Malgun Gothic"/>
               </a:rPr>
-              <a:t>원핵세포는 개시 코돈 상류의 Shine-Dalgarno 서열이 16S rRNA와 염기쌍을 이루어 소단위를 해당 개시 코돈에 직접 올려놓는다. 따라서 한 mRNA 안에 Shine-Dalgarno 서열과 AUG의 조합이 여러 번 나타나면 각각이 독립적인 개시 지점이 되어 여러 단백질을 만들 수 있다. 진핵세포는 5' cap에 결합한 복합체가 5' 말단에서 하류로 훑어 내려가 처음 만나는 AUG에서 개시하므로, 그 뒤쪽에 있는 개시 코돈에는 원칙적으로 접근하지 못한다. 접근 방식의 차이가 한 mRNA가 담을 수 있는 유전 정보의 개수를 정한다.</a:t>
+              <a:t>Heme이 부족하면 heme-regulated inhibitor(HRI)가 활성화되어 eIF2의 α 소단위를 인산화한다. 인산화된 eIF2는 Met-tRNA를 40S에 실어 오지 못하므로 번역 개시가 전반적으로 멈추고 globin 합성도 중단된다. 생리적 의미는 양의 짝맞춤이다. Heme과 globin은 1:1로 결합해야 하므로 어느 한쪽이 남으면 짝을 찾지 못한 분자가 침전하거나 산화 손상을 일으킨다. 개시 단계에서 globin 합성을 heme 공급에 맞추면 이 손상을 막을 수 있다. 이 조절이 작동하지 않는 상황이 thalassemia에서 짝 없는 사슬이 침전해 적혈구를 파괴하는 기전이다.</a:t>
             </a:r>
           </a:p>
         </p:txBody>
@@ -18170,7 +18249,7 @@
                 <a:ea typeface="Malgun Gothic"/>
                 <a:cs typeface="Malgun Gothic"/>
               </a:rPr>
-              <a:t>Q4   </a:t>
+              <a:t>Q5   </a:t>
             </a:r>
             <a:r>
               <a:rPr sz="2400" b="1" i="0">
@@ -18264,7 +18343,7 @@
                 <a:ea typeface="Malgun Gothic"/>
                 <a:cs typeface="Malgun Gothic"/>
               </a:rPr>
-              <a:t>적혈구 전구세포에서 heme이 부족할 때 globin 합성이 멈추는 기전과 그 생리적 의미를 설명하라.</a:t>
+              <a:t>Aminoglycoside는 번역 저해제 중 거의 유일하게 살균 작용을 보인다. 그 근거를 작용 기전으로 설명하라.</a:t>
             </a:r>
           </a:p>
         </p:txBody>
@@ -18332,7 +18411,7 @@
                 <a:ea typeface="Malgun Gothic"/>
                 <a:cs typeface="Malgun Gothic"/>
               </a:rPr>
-              <a:t>Heme이 부족하면 heme-regulated inhibitor(HRI)가 활성화되어 eIF2의 α 소단위를 인산화한다. 인산화된 eIF2는 Met-tRNA를 40S에 실어 오지 못하므로 번역 개시가 전반적으로 멈추고 globin 합성도 중단된다. 생리적 의미는 양의 짝맞춤이다. Heme과 globin은 1:1로 결합해야 하므로 어느 한쪽이 남으면 짝을 찾지 못한 분자가 침전하거나 산화 손상을 일으킨다. 개시 단계에서 globin 합성을 heme 공급에 맞추면 이 손상을 막을 수 있다. 이 조절이 작동하지 않는 상황이 thalassemia에서 짝 없는 사슬이 침전해 적혈구를 파괴하는 기전이다.</a:t>
+              <a:t>다른 번역 저해제는 단백질 합성을 멈추게 할 뿐이므로 약물을 제거하면 세균이 회복한다. Aminoglycoside는 30S의 16S rRNA A 자리에 결합해 코돈을 잘못 읽게 하고 translocation을 방해한다. 그 결과 합성이 멈추는 데 그치지 않고 아미노산 서열이 틀린 비정상 단백질이 만들어지며, 이 단백질이 세균의 세포막에 끼어 들어 투과성을 높여 약물이 더 많이 들어오게 한다. 자가증폭되는 손상이 더해져 비가역적인 살균 효과가 나타난다.</a:t>
             </a:r>
           </a:p>
         </p:txBody>
@@ -19017,7 +19096,7 @@
                 <a:ea typeface="Malgun Gothic"/>
                 <a:cs typeface="Malgun Gothic"/>
               </a:rPr>
-              <a:t>Q5   </a:t>
+              <a:t>Q6   </a:t>
             </a:r>
             <a:r>
               <a:rPr sz="2400" b="1" i="0">
@@ -19111,7 +19190,7 @@
                 <a:ea typeface="Malgun Gothic"/>
                 <a:cs typeface="Malgun Gothic"/>
               </a:rPr>
-              <a:t>Aminoglycoside는 번역 저해제 중 거의 유일하게 살균 작용을 보인다. 그 근거를 작용 기전으로 설명하라.</a:t>
+              <a:t>어떤 환자가 감염 치료로 aminoglycoside를 표준 용량 투여했는데 첫 투여 후 비가역적 난청이 발생했다. 어떤 기전을 의심하고 가족에게 무엇을 확인해야 하는가.</a:t>
             </a:r>
           </a:p>
         </p:txBody>
@@ -19179,7 +19258,29 @@
                 <a:ea typeface="Malgun Gothic"/>
                 <a:cs typeface="Malgun Gothic"/>
               </a:rPr>
-              <a:t>다른 번역 저해제는 단백질 합성을 멈추게 할 뿐이므로 약물을 제거하면 세균이 회복한다. Aminoglycoside는 30S의 16S rRNA A 자리에 결합해 코돈을 잘못 읽게 하고 translocation을 방해한다. 그 결과 합성이 멈추는 데 그치지 않고 아미노산 서열이 틀린 비정상 단백질이 만들어지며, 이 단백질이 세균의 세포막에 끼어 들어 투과성을 높여 약물이 더 많이 들어오게 한다. 자가증폭되는 손상이 더해져 비가역적인 살균 효과가 나타난다.</a:t>
+              <a:t>미토콘드리아 12S rRNA 유전자 *MT-RNR1*의 변이, 특히 </a:t>
+            </a:r>
+            <a:r>
+              <a:rPr sz="1500" b="1" i="0">
+                <a:solidFill>
+                  <a:srgbClr val="11202B"/>
+                </a:solidFill>
+                <a:latin typeface="Malgun Gothic"/>
+                <a:ea typeface="Malgun Gothic"/>
+                <a:cs typeface="Malgun Gothic"/>
+              </a:rPr>
+              <a:t>m.1555A&gt;G</a:t>
+            </a:r>
+            <a:r>
+              <a:rPr sz="1500" b="0" i="0">
+                <a:solidFill>
+                  <a:srgbClr val="11202B"/>
+                </a:solidFill>
+                <a:latin typeface="Malgun Gothic"/>
+                <a:ea typeface="Malgun Gothic"/>
+                <a:cs typeface="Malgun Gothic"/>
+              </a:rPr>
+              <a:t>를 의심한다. 이 변이가 있으면 미토콘드리아 12S rRNA의 구조가 세균 16S rRNA에 더 가까워져 치료 용량의 aminoglycoside가 내이 유모세포의 미토콘드리아 번역을 억제하고 비가역적 감각신경성 난청을 일으킨다. 미토콘드리아 유전체는 모계로만 전달되므로 어머니와 외가 쪽 형제·자매에게 난청이나 항생제 투여 후 청력 손실의 병력이 있는지 확인해야 하고, 해당 가계에서는 투여 전 유전 검사와 대체 항생제 선택을 고려한다.</a:t>
             </a:r>
           </a:p>
         </p:txBody>
@@ -19365,7 +19466,7 @@
                 <a:ea typeface="Malgun Gothic"/>
                 <a:cs typeface="Malgun Gothic"/>
               </a:rPr>
-              <a:t>Q6   </a:t>
+              <a:t>Q7   </a:t>
             </a:r>
             <a:r>
               <a:rPr sz="2400" b="1" i="0">
@@ -19459,7 +19560,7 @@
                 <a:ea typeface="Malgun Gothic"/>
                 <a:cs typeface="Malgun Gothic"/>
               </a:rPr>
-              <a:t>어떤 환자가 감염 치료로 aminoglycoside를 표준 용량 투여했는데 첫 투여 후 비가역적 난청이 발생했다. 어떤 기전을 의심하고 가족에게 무엇을 확인해야 하는가.</a:t>
+              <a:t>Erythromycin에 저항성을 보이는 Staphylococcus aureus 균주에서 clindamycin 감수성 결과가 나왔을 때, 그 결과를 그대로 믿고 clindamycin을 쓰기 어려운 이유를 설명하라.</a:t>
             </a:r>
           </a:p>
         </p:txBody>
@@ -19527,29 +19628,7 @@
                 <a:ea typeface="Malgun Gothic"/>
                 <a:cs typeface="Malgun Gothic"/>
               </a:rPr>
-              <a:t>미토콘드리아 12S rRNA 유전자 *MT-RNR1*의 변이, 특히 </a:t>
-            </a:r>
-            <a:r>
-              <a:rPr sz="1500" b="1" i="0">
-                <a:solidFill>
-                  <a:srgbClr val="11202B"/>
-                </a:solidFill>
-                <a:latin typeface="Malgun Gothic"/>
-                <a:ea typeface="Malgun Gothic"/>
-                <a:cs typeface="Malgun Gothic"/>
-              </a:rPr>
-              <a:t>m.1555A&gt;G</a:t>
-            </a:r>
-            <a:r>
-              <a:rPr sz="1500" b="0" i="0">
-                <a:solidFill>
-                  <a:srgbClr val="11202B"/>
-                </a:solidFill>
-                <a:latin typeface="Malgun Gothic"/>
-                <a:ea typeface="Malgun Gothic"/>
-                <a:cs typeface="Malgun Gothic"/>
-              </a:rPr>
-              <a:t>를 의심한다. 이 변이가 있으면 미토콘드리아 12S rRNA의 구조가 세균 16S rRNA에 더 가까워져 치료 용량의 aminoglycoside가 내이 유모세포의 미토콘드리아 번역을 억제하고 비가역적 감각신경성 난청을 일으킨다. 미토콘드리아 유전체는 모계로만 전달되므로 어머니와 외가 쪽 형제·자매에게 난청이나 항생제 투여 후 청력 손실의 병력이 있는지 확인해야 하고, 해당 가계에서는 투여 전 유전 검사와 대체 항생제 선택을 고려한다.</a:t>
+              <a:t>Macrolide와 lincosamide는 50S의 23S rRNA에서 결합 부위가 겹친다. erm 유전자가 암호화하는 methylase가 23S rRNA를 methylation하면 두 계열 모두에 저항성이 생긴다(MLS 저항성). 그런데 erm이 유도성으로 발현되는 균주는 macrolide 노출 없이는 methylase를 만들지 않아 일반 감수성 검사에서 clindamycin 감수성으로 보인다. 치료 중 유도되어 저항성이 나타날 수 있으므로 디스크를 인접 배치하는 D-test로 유도 저항성을 확인한 뒤 결정한다.</a:t>
             </a:r>
           </a:p>
         </p:txBody>
@@ -19735,7 +19814,7 @@
                 <a:ea typeface="Malgun Gothic"/>
                 <a:cs typeface="Malgun Gothic"/>
               </a:rPr>
-              <a:t>Q7   </a:t>
+              <a:t>Q8   </a:t>
             </a:r>
             <a:r>
               <a:rPr sz="2400" b="1" i="0">
@@ -19829,7 +19908,7 @@
                 <a:ea typeface="Malgun Gothic"/>
                 <a:cs typeface="Malgun Gothic"/>
               </a:rPr>
-              <a:t>Erythromycin에 저항성을 보이는 Staphylococcus aureus 균주에서 clindamycin 감수성 결과가 나왔을 때, 그 결과를 그대로 믿고 clindamycin을 쓰기 어려운 이유를 설명하라.</a:t>
+              <a:t>Linezolid를 4주간 투여한 환자에서 빈혈과 혈소판 감소, lactate 상승이 나타났다. 선택독성의 관점에서 이 현상을 설명하라.</a:t>
             </a:r>
           </a:p>
         </p:txBody>
@@ -19897,7 +19976,7 @@
                 <a:ea typeface="Malgun Gothic"/>
                 <a:cs typeface="Malgun Gothic"/>
               </a:rPr>
-              <a:t>Macrolide와 lincosamide는 50S의 23S rRNA에서 결합 부위가 겹친다. erm 유전자가 암호화하는 methylase가 23S rRNA를 methylation하면 두 계열 모두에 저항성이 생긴다(MLS 저항성). 그런데 erm이 유도성으로 발현되는 균주는 macrolide 노출 없이는 methylase를 만들지 않아 일반 감수성 검사에서 clindamycin 감수성으로 보인다. 치료 중 유도되어 저항성이 나타날 수 있으므로 디스크를 인접 배치하는 D-test로 유도 저항성을 확인한 뒤 결정한다.</a:t>
+              <a:t>Linezolid는 세균 50S의 23S rRNA에 결합해 70S 개시 복합체 형성을 막는다. 사람 미토콘드리아 ribosome의 rRNA는 세포질 ribosome보다 세균형에 가까워 이 약물이 미토콘드리아 번역도 억제한다. 미토콘드리아에서 번역되는 13개 단백질은 모두 산화적 인산화 복합체의 구성 요소이므로, 억제가 누적되면 ATP 생산이 줄고 pyruvate가 lactate로 돌아가 lactate 산증이 생기며, 분열이 빠른 골수에서 조혈이 억제되어 빈혈과 혈소판 감소가 나타난다. 즉 선택독성이 세균과 사람 세포질 사이에서는 성립하지만 세균과 사람 미토콘드리아 사이에서는 불완전하다. 장기 투여 시 혈구 수와 lactate, 시야를 감시해야 하는 근거다.</a:t>
             </a:r>
           </a:p>
         </p:txBody>
@@ -20083,7 +20162,7 @@
                 <a:ea typeface="Malgun Gothic"/>
                 <a:cs typeface="Malgun Gothic"/>
               </a:rPr>
-              <a:t>Q8   </a:t>
+              <a:t>REFERENCES   </a:t>
             </a:r>
             <a:r>
               <a:rPr sz="2400" b="1" i="0">
@@ -20094,7 +20173,7 @@
                 <a:ea typeface="Malgun Gothic"/>
                 <a:cs typeface="Malgun Gothic"/>
               </a:rPr>
-              <a:t>확인 문항</a:t>
+              <a:t>참고문헌</a:t>
             </a:r>
           </a:p>
         </p:txBody>
@@ -20142,354 +20221,6 @@
                 <a:cs typeface="Malgun Gothic"/>
               </a:rPr>
               <a:t>      43</a:t>
-            </a:r>
-          </a:p>
-        </p:txBody>
-      </p:sp>
-      <p:sp>
-        <p:nvSpPr>
-          <p:cNvPr id="7" name="TextBox 6"/>
-          <p:cNvSpPr txBox="1"/>
-          <p:nvPr/>
-        </p:nvSpPr>
-        <p:spPr>
-          <a:xfrm>
-            <a:off x="640080" y="1371600"/>
-            <a:ext cx="10881360" cy="2103120"/>
-          </a:xfrm>
-          <a:prstGeom prst="rect">
-            <a:avLst/>
-          </a:prstGeom>
-          <a:noFill/>
-        </p:spPr>
-        <p:txBody>
-          <a:bodyPr wrap="square" anchor="t">
-            <a:spAutoFit/>
-          </a:bodyPr>
-          <a:lstStyle/>
-          <a:p>
-            <a:r>
-              <a:rPr sz="1900" b="1" i="0">
-                <a:solidFill>
-                  <a:srgbClr val="11202B"/>
-                </a:solidFill>
-                <a:latin typeface="Malgun Gothic"/>
-                <a:ea typeface="Malgun Gothic"/>
-                <a:cs typeface="Malgun Gothic"/>
-              </a:rPr>
-              <a:t>Linezolid를 4주간 투여한 환자에서 빈혈과 혈소판 감소, lactate 상승이 나타났다. 선택독성의 관점에서 이 현상을 설명하라.</a:t>
-            </a:r>
-          </a:p>
-        </p:txBody>
-      </p:sp>
-      <p:sp>
-        <p:nvSpPr>
-          <p:cNvPr id="8" name="Rectangle 7"/>
-          <p:cNvSpPr/>
-          <p:nvPr/>
-        </p:nvSpPr>
-        <p:spPr>
-          <a:xfrm>
-            <a:off x="640080" y="3657600"/>
-            <a:ext cx="10881360" cy="2606040"/>
-          </a:xfrm>
-          <a:prstGeom prst="rect">
-            <a:avLst/>
-          </a:prstGeom>
-          <a:solidFill>
-            <a:srgbClr val="FFFFFF"/>
-          </a:solidFill>
-          <a:ln>
-            <a:solidFill>
-              <a:srgbClr val="C2CDD6"/>
-            </a:solidFill>
-          </a:ln>
-          <a:effectLst/>
-        </p:spPr>
-        <p:style>
-          <a:lnRef idx="1">
-            <a:schemeClr val="accent1"/>
-          </a:lnRef>
-          <a:fillRef idx="3">
-            <a:schemeClr val="accent1"/>
-          </a:fillRef>
-          <a:effectRef idx="2">
-            <a:schemeClr val="accent1"/>
-          </a:effectRef>
-          <a:fontRef idx="minor">
-            <a:schemeClr val="lt1"/>
-          </a:fontRef>
-        </p:style>
-        <p:txBody>
-          <a:bodyPr rtlCol="0" anchor="ctr" wrap="square" lIns="228600" rIns="228600" tIns="164592"/>
-          <a:lstStyle/>
-          <a:p>
-            <a:pPr algn="l"/>
-            <a:r>
-              <a:rPr sz="1200" b="1" i="0">
-                <a:solidFill>
-                  <a:srgbClr val="003C71"/>
-                </a:solidFill>
-                <a:latin typeface="Malgun Gothic"/>
-                <a:ea typeface="Malgun Gothic"/>
-                <a:cs typeface="Malgun Gothic"/>
-              </a:rPr>
-              <a:t>해설   </a:t>
-            </a:r>
-            <a:r>
-              <a:rPr sz="1500" b="0" i="0">
-                <a:solidFill>
-                  <a:srgbClr val="11202B"/>
-                </a:solidFill>
-                <a:latin typeface="Malgun Gothic"/>
-                <a:ea typeface="Malgun Gothic"/>
-                <a:cs typeface="Malgun Gothic"/>
-              </a:rPr>
-              <a:t>Linezolid는 세균 50S의 23S rRNA에 결합해 70S 개시 복합체 형성을 막는다. 사람 미토콘드리아 ribosome의 rRNA는 세포질 ribosome보다 세균형에 가까워 이 약물이 미토콘드리아 번역도 억제한다. 미토콘드리아에서 번역되는 13개 단백질은 모두 산화적 인산화 복합체의 구성 요소이므로, 억제가 누적되면 ATP 생산이 줄고 pyruvate가 lactate로 돌아가 lactate 산증이 생기며, 분열이 빠른 골수에서 조혈이 억제되어 빈혈과 혈소판 감소가 나타난다. 즉 선택독성이 세균과 사람 세포질 사이에서는 성립하지만 세균과 사람 미토콘드리아 사이에서는 불완전하다. 장기 투여 시 혈구 수와 lactate, 시야를 감시해야 하는 근거다.</a:t>
-            </a:r>
-          </a:p>
-        </p:txBody>
-      </p:sp>
-    </p:spTree>
-  </p:cSld>
-  <p:clrMapOvr>
-    <a:masterClrMapping/>
-  </p:clrMapOvr>
-</p:sld>
-</file>
-
-<file path=ppt/slides/slide44.xml><?xml version="1.0" encoding="utf-8"?>
-<p:sld xmlns:a="http://schemas.openxmlformats.org/drawingml/2006/main" xmlns:p="http://schemas.openxmlformats.org/presentationml/2006/main" xmlns:r="http://schemas.openxmlformats.org/officeDocument/2006/relationships">
-  <p:cSld>
-    <p:spTree>
-      <p:nvGrpSpPr>
-        <p:cNvPr id="1" name=""/>
-        <p:cNvGrpSpPr/>
-        <p:nvPr/>
-      </p:nvGrpSpPr>
-      <p:grpSpPr/>
-      <p:sp>
-        <p:nvSpPr>
-          <p:cNvPr id="2" name="Rectangle 1"/>
-          <p:cNvSpPr/>
-          <p:nvPr/>
-        </p:nvSpPr>
-        <p:spPr>
-          <a:xfrm>
-            <a:off x="0" y="0"/>
-            <a:ext cx="12191695" cy="6858000"/>
-          </a:xfrm>
-          <a:prstGeom prst="rect">
-            <a:avLst/>
-          </a:prstGeom>
-          <a:solidFill>
-            <a:srgbClr val="F5F8F9"/>
-          </a:solidFill>
-          <a:ln>
-            <a:noFill/>
-          </a:ln>
-          <a:effectLst/>
-        </p:spPr>
-        <p:style>
-          <a:lnRef idx="1">
-            <a:schemeClr val="accent1"/>
-          </a:lnRef>
-          <a:fillRef idx="3">
-            <a:schemeClr val="accent1"/>
-          </a:fillRef>
-          <a:effectRef idx="2">
-            <a:schemeClr val="accent1"/>
-          </a:effectRef>
-          <a:fontRef idx="minor">
-            <a:schemeClr val="lt1"/>
-          </a:fontRef>
-        </p:style>
-        <p:txBody>
-          <a:bodyPr rtlCol="0" anchor="ctr"/>
-          <a:lstStyle/>
-          <a:p>
-            <a:pPr algn="ctr"/>
-          </a:p>
-        </p:txBody>
-      </p:sp>
-      <p:sp>
-        <p:nvSpPr>
-          <p:cNvPr id="3" name="Rectangle 2"/>
-          <p:cNvSpPr/>
-          <p:nvPr/>
-        </p:nvSpPr>
-        <p:spPr>
-          <a:xfrm>
-            <a:off x="0" y="0"/>
-            <a:ext cx="12191695" cy="960120"/>
-          </a:xfrm>
-          <a:prstGeom prst="rect">
-            <a:avLst/>
-          </a:prstGeom>
-          <a:solidFill>
-            <a:srgbClr val="003C71"/>
-          </a:solidFill>
-          <a:ln>
-            <a:noFill/>
-          </a:ln>
-          <a:effectLst/>
-        </p:spPr>
-        <p:style>
-          <a:lnRef idx="1">
-            <a:schemeClr val="accent1"/>
-          </a:lnRef>
-          <a:fillRef idx="3">
-            <a:schemeClr val="accent1"/>
-          </a:fillRef>
-          <a:effectRef idx="2">
-            <a:schemeClr val="accent1"/>
-          </a:effectRef>
-          <a:fontRef idx="minor">
-            <a:schemeClr val="lt1"/>
-          </a:fontRef>
-        </p:style>
-        <p:txBody>
-          <a:bodyPr rtlCol="0" anchor="ctr"/>
-          <a:lstStyle/>
-          <a:p>
-            <a:pPr algn="ctr"/>
-          </a:p>
-        </p:txBody>
-      </p:sp>
-      <p:sp>
-        <p:nvSpPr>
-          <p:cNvPr id="4" name="Rectangle 3"/>
-          <p:cNvSpPr/>
-          <p:nvPr/>
-        </p:nvSpPr>
-        <p:spPr>
-          <a:xfrm>
-            <a:off x="0" y="960120"/>
-            <a:ext cx="12191695" cy="54864"/>
-          </a:xfrm>
-          <a:prstGeom prst="rect">
-            <a:avLst/>
-          </a:prstGeom>
-          <a:solidFill>
-            <a:srgbClr val="F2B705"/>
-          </a:solidFill>
-          <a:ln>
-            <a:noFill/>
-          </a:ln>
-          <a:effectLst/>
-        </p:spPr>
-        <p:style>
-          <a:lnRef idx="1">
-            <a:schemeClr val="accent1"/>
-          </a:lnRef>
-          <a:fillRef idx="3">
-            <a:schemeClr val="accent1"/>
-          </a:fillRef>
-          <a:effectRef idx="2">
-            <a:schemeClr val="accent1"/>
-          </a:effectRef>
-          <a:fontRef idx="minor">
-            <a:schemeClr val="lt1"/>
-          </a:fontRef>
-        </p:style>
-        <p:txBody>
-          <a:bodyPr rtlCol="0" anchor="ctr"/>
-          <a:lstStyle/>
-          <a:p>
-            <a:pPr algn="ctr"/>
-          </a:p>
-        </p:txBody>
-      </p:sp>
-      <p:sp>
-        <p:nvSpPr>
-          <p:cNvPr id="5" name="TextBox 4"/>
-          <p:cNvSpPr txBox="1"/>
-          <p:nvPr/>
-        </p:nvSpPr>
-        <p:spPr>
-          <a:xfrm>
-            <a:off x="457200" y="109728"/>
-            <a:ext cx="11247120" cy="777240"/>
-          </a:xfrm>
-          <a:prstGeom prst="rect">
-            <a:avLst/>
-          </a:prstGeom>
-          <a:noFill/>
-        </p:spPr>
-        <p:txBody>
-          <a:bodyPr wrap="square" anchor="ctr">
-            <a:spAutoFit/>
-          </a:bodyPr>
-          <a:lstStyle/>
-          <a:p>
-            <a:r>
-              <a:rPr sz="1300" b="1" i="0">
-                <a:solidFill>
-                  <a:srgbClr val="F2B705"/>
-                </a:solidFill>
-                <a:latin typeface="Malgun Gothic"/>
-                <a:ea typeface="Malgun Gothic"/>
-                <a:cs typeface="Malgun Gothic"/>
-              </a:rPr>
-              <a:t>REFERENCES   </a:t>
-            </a:r>
-            <a:r>
-              <a:rPr sz="2400" b="1" i="0">
-                <a:solidFill>
-                  <a:srgbClr val="FFFFFF"/>
-                </a:solidFill>
-                <a:latin typeface="Malgun Gothic"/>
-                <a:ea typeface="Malgun Gothic"/>
-                <a:cs typeface="Malgun Gothic"/>
-              </a:rPr>
-              <a:t>참고문헌 (1/2)</a:t>
-            </a:r>
-          </a:p>
-        </p:txBody>
-      </p:sp>
-      <p:sp>
-        <p:nvSpPr>
-          <p:cNvPr id="6" name="TextBox 5"/>
-          <p:cNvSpPr txBox="1"/>
-          <p:nvPr/>
-        </p:nvSpPr>
-        <p:spPr>
-          <a:xfrm>
-            <a:off x="457200" y="6446520"/>
-            <a:ext cx="11247120" cy="301752"/>
-          </a:xfrm>
-          <a:prstGeom prst="rect">
-            <a:avLst/>
-          </a:prstGeom>
-          <a:noFill/>
-        </p:spPr>
-        <p:txBody>
-          <a:bodyPr wrap="square" anchor="ctr">
-            <a:spAutoFit/>
-          </a:bodyPr>
-          <a:lstStyle/>
-          <a:p>
-            <a:r>
-              <a:rPr sz="900" b="0" i="0">
-                <a:solidFill>
-                  <a:srgbClr val="66788A"/>
-                </a:solidFill>
-                <a:latin typeface="Malgun Gothic"/>
-                <a:ea typeface="Malgun Gothic"/>
-                <a:cs typeface="Malgun Gothic"/>
-              </a:rPr>
-              <a:t>M03-W03-L03  ·  Ribosome과 번역의 단계</a:t>
-            </a:r>
-            <a:r>
-              <a:rPr sz="900" b="1" i="0">
-                <a:solidFill>
-                  <a:srgbClr val="003C71"/>
-                </a:solidFill>
-                <a:latin typeface="Malgun Gothic"/>
-                <a:ea typeface="Malgun Gothic"/>
-                <a:cs typeface="Malgun Gothic"/>
-              </a:rPr>
-              <a:t>      44</a:t>
             </a:r>
           </a:p>
         </p:txBody>
@@ -20689,273 +20420,6 @@
               <a:t>Prezant TR et al. Mitochondrial ribosomal RNA mutation associated with both antibiotic-induced and non-syndromic deafness. Nat Genet 1993;4:289–294.</a:t>
             </a:r>
           </a:p>
-        </p:txBody>
-      </p:sp>
-    </p:spTree>
-  </p:cSld>
-  <p:clrMapOvr>
-    <a:masterClrMapping/>
-  </p:clrMapOvr>
-</p:sld>
-</file>
-
-<file path=ppt/slides/slide45.xml><?xml version="1.0" encoding="utf-8"?>
-<p:sld xmlns:a="http://schemas.openxmlformats.org/drawingml/2006/main" xmlns:p="http://schemas.openxmlformats.org/presentationml/2006/main" xmlns:r="http://schemas.openxmlformats.org/officeDocument/2006/relationships">
-  <p:cSld>
-    <p:spTree>
-      <p:nvGrpSpPr>
-        <p:cNvPr id="1" name=""/>
-        <p:cNvGrpSpPr/>
-        <p:nvPr/>
-      </p:nvGrpSpPr>
-      <p:grpSpPr/>
-      <p:sp>
-        <p:nvSpPr>
-          <p:cNvPr id="2" name="Rectangle 1"/>
-          <p:cNvSpPr/>
-          <p:nvPr/>
-        </p:nvSpPr>
-        <p:spPr>
-          <a:xfrm>
-            <a:off x="0" y="0"/>
-            <a:ext cx="12191695" cy="6858000"/>
-          </a:xfrm>
-          <a:prstGeom prst="rect">
-            <a:avLst/>
-          </a:prstGeom>
-          <a:solidFill>
-            <a:srgbClr val="F5F8F9"/>
-          </a:solidFill>
-          <a:ln>
-            <a:noFill/>
-          </a:ln>
-          <a:effectLst/>
-        </p:spPr>
-        <p:style>
-          <a:lnRef idx="1">
-            <a:schemeClr val="accent1"/>
-          </a:lnRef>
-          <a:fillRef idx="3">
-            <a:schemeClr val="accent1"/>
-          </a:fillRef>
-          <a:effectRef idx="2">
-            <a:schemeClr val="accent1"/>
-          </a:effectRef>
-          <a:fontRef idx="minor">
-            <a:schemeClr val="lt1"/>
-          </a:fontRef>
-        </p:style>
-        <p:txBody>
-          <a:bodyPr rtlCol="0" anchor="ctr"/>
-          <a:lstStyle/>
-          <a:p>
-            <a:pPr algn="ctr"/>
-          </a:p>
-        </p:txBody>
-      </p:sp>
-      <p:sp>
-        <p:nvSpPr>
-          <p:cNvPr id="3" name="Rectangle 2"/>
-          <p:cNvSpPr/>
-          <p:nvPr/>
-        </p:nvSpPr>
-        <p:spPr>
-          <a:xfrm>
-            <a:off x="0" y="0"/>
-            <a:ext cx="12191695" cy="960120"/>
-          </a:xfrm>
-          <a:prstGeom prst="rect">
-            <a:avLst/>
-          </a:prstGeom>
-          <a:solidFill>
-            <a:srgbClr val="003C71"/>
-          </a:solidFill>
-          <a:ln>
-            <a:noFill/>
-          </a:ln>
-          <a:effectLst/>
-        </p:spPr>
-        <p:style>
-          <a:lnRef idx="1">
-            <a:schemeClr val="accent1"/>
-          </a:lnRef>
-          <a:fillRef idx="3">
-            <a:schemeClr val="accent1"/>
-          </a:fillRef>
-          <a:effectRef idx="2">
-            <a:schemeClr val="accent1"/>
-          </a:effectRef>
-          <a:fontRef idx="minor">
-            <a:schemeClr val="lt1"/>
-          </a:fontRef>
-        </p:style>
-        <p:txBody>
-          <a:bodyPr rtlCol="0" anchor="ctr"/>
-          <a:lstStyle/>
-          <a:p>
-            <a:pPr algn="ctr"/>
-          </a:p>
-        </p:txBody>
-      </p:sp>
-      <p:sp>
-        <p:nvSpPr>
-          <p:cNvPr id="4" name="Rectangle 3"/>
-          <p:cNvSpPr/>
-          <p:nvPr/>
-        </p:nvSpPr>
-        <p:spPr>
-          <a:xfrm>
-            <a:off x="0" y="960120"/>
-            <a:ext cx="12191695" cy="54864"/>
-          </a:xfrm>
-          <a:prstGeom prst="rect">
-            <a:avLst/>
-          </a:prstGeom>
-          <a:solidFill>
-            <a:srgbClr val="F2B705"/>
-          </a:solidFill>
-          <a:ln>
-            <a:noFill/>
-          </a:ln>
-          <a:effectLst/>
-        </p:spPr>
-        <p:style>
-          <a:lnRef idx="1">
-            <a:schemeClr val="accent1"/>
-          </a:lnRef>
-          <a:fillRef idx="3">
-            <a:schemeClr val="accent1"/>
-          </a:fillRef>
-          <a:effectRef idx="2">
-            <a:schemeClr val="accent1"/>
-          </a:effectRef>
-          <a:fontRef idx="minor">
-            <a:schemeClr val="lt1"/>
-          </a:fontRef>
-        </p:style>
-        <p:txBody>
-          <a:bodyPr rtlCol="0" anchor="ctr"/>
-          <a:lstStyle/>
-          <a:p>
-            <a:pPr algn="ctr"/>
-          </a:p>
-        </p:txBody>
-      </p:sp>
-      <p:sp>
-        <p:nvSpPr>
-          <p:cNvPr id="5" name="TextBox 4"/>
-          <p:cNvSpPr txBox="1"/>
-          <p:nvPr/>
-        </p:nvSpPr>
-        <p:spPr>
-          <a:xfrm>
-            <a:off x="457200" y="109728"/>
-            <a:ext cx="11247120" cy="777240"/>
-          </a:xfrm>
-          <a:prstGeom prst="rect">
-            <a:avLst/>
-          </a:prstGeom>
-          <a:noFill/>
-        </p:spPr>
-        <p:txBody>
-          <a:bodyPr wrap="square" anchor="ctr">
-            <a:spAutoFit/>
-          </a:bodyPr>
-          <a:lstStyle/>
-          <a:p>
-            <a:r>
-              <a:rPr sz="1300" b="1" i="0">
-                <a:solidFill>
-                  <a:srgbClr val="F2B705"/>
-                </a:solidFill>
-                <a:latin typeface="Malgun Gothic"/>
-                <a:ea typeface="Malgun Gothic"/>
-                <a:cs typeface="Malgun Gothic"/>
-              </a:rPr>
-              <a:t>REFERENCES   </a:t>
-            </a:r>
-            <a:r>
-              <a:rPr sz="2400" b="1" i="0">
-                <a:solidFill>
-                  <a:srgbClr val="FFFFFF"/>
-                </a:solidFill>
-                <a:latin typeface="Malgun Gothic"/>
-                <a:ea typeface="Malgun Gothic"/>
-                <a:cs typeface="Malgun Gothic"/>
-              </a:rPr>
-              <a:t>참고문헌 (2/2)</a:t>
-            </a:r>
-          </a:p>
-        </p:txBody>
-      </p:sp>
-      <p:sp>
-        <p:nvSpPr>
-          <p:cNvPr id="6" name="TextBox 5"/>
-          <p:cNvSpPr txBox="1"/>
-          <p:nvPr/>
-        </p:nvSpPr>
-        <p:spPr>
-          <a:xfrm>
-            <a:off x="457200" y="6446520"/>
-            <a:ext cx="11247120" cy="301752"/>
-          </a:xfrm>
-          <a:prstGeom prst="rect">
-            <a:avLst/>
-          </a:prstGeom>
-          <a:noFill/>
-        </p:spPr>
-        <p:txBody>
-          <a:bodyPr wrap="square" anchor="ctr">
-            <a:spAutoFit/>
-          </a:bodyPr>
-          <a:lstStyle/>
-          <a:p>
-            <a:r>
-              <a:rPr sz="900" b="0" i="0">
-                <a:solidFill>
-                  <a:srgbClr val="66788A"/>
-                </a:solidFill>
-                <a:latin typeface="Malgun Gothic"/>
-                <a:ea typeface="Malgun Gothic"/>
-                <a:cs typeface="Malgun Gothic"/>
-              </a:rPr>
-              <a:t>M03-W03-L03  ·  Ribosome과 번역의 단계</a:t>
-            </a:r>
-            <a:r>
-              <a:rPr sz="900" b="1" i="0">
-                <a:solidFill>
-                  <a:srgbClr val="003C71"/>
-                </a:solidFill>
-                <a:latin typeface="Malgun Gothic"/>
-                <a:ea typeface="Malgun Gothic"/>
-                <a:cs typeface="Malgun Gothic"/>
-              </a:rPr>
-              <a:t>      45</a:t>
-            </a:r>
-          </a:p>
-        </p:txBody>
-      </p:sp>
-      <p:sp>
-        <p:nvSpPr>
-          <p:cNvPr id="7" name="TextBox 6"/>
-          <p:cNvSpPr txBox="1"/>
-          <p:nvPr/>
-        </p:nvSpPr>
-        <p:spPr>
-          <a:xfrm>
-            <a:off x="640080" y="1280160"/>
-            <a:ext cx="10881360" cy="5029200"/>
-          </a:xfrm>
-          <a:prstGeom prst="rect">
-            <a:avLst/>
-          </a:prstGeom>
-          <a:noFill/>
-        </p:spPr>
-        <p:txBody>
-          <a:bodyPr wrap="square" anchor="t">
-            <a:spAutoFit/>
-          </a:bodyPr>
-          <a:lstStyle/>
           <a:p>
             <a:pPr>
               <a:spcAft>
@@ -20963,7 +20427,7 @@
               </a:spcAft>
             </a:pPr>
             <a:r>
-              <a:rPr sz="2000" b="1" i="0">
+              <a:rPr sz="1400" b="1" i="0">
                 <a:solidFill>
                   <a:srgbClr val="F2B705"/>
                 </a:solidFill>
@@ -20974,7 +20438,7 @@
               <a:t>•  </a:t>
             </a:r>
             <a:r>
-              <a:rPr sz="2000" b="0" i="0">
+              <a:rPr sz="1400" b="0" i="0">
                 <a:solidFill>
                   <a:srgbClr val="11202B"/>
                 </a:solidFill>
